--- a/index/designs/y7-l10/l3-half-past/l3-half-past.pptx
+++ b/index/designs/y7-l10/l3-half-past/l3-half-past.pptx
@@ -2159,7 +2159,7 @@
         </p:nvSpPr>
         <p:spPr>
           <a:xfrm>
-            <a:off x="4948510" y="1702296"/>
+            <a:off x="4948510" y="2121396"/>
             <a:ext cx="2294831" cy="142875"/>
           </a:xfrm>
           <a:prstGeom prst="rect">
@@ -2198,7 +2198,7 @@
         </p:nvSpPr>
         <p:spPr>
           <a:xfrm>
-            <a:off x="4786229" y="1870472"/>
+            <a:off x="4786229" y="2289572"/>
             <a:ext cx="2619542" cy="314325"/>
           </a:xfrm>
           <a:prstGeom prst="rect">
@@ -2237,7 +2237,7 @@
         </p:nvSpPr>
         <p:spPr>
           <a:xfrm>
-            <a:off x="3834110" y="2210098"/>
+            <a:off x="3834110" y="2629198"/>
             <a:ext cx="4523780" cy="161925"/>
           </a:xfrm>
           <a:prstGeom prst="rect">
@@ -2276,7 +2276,7 @@
         </p:nvSpPr>
         <p:spPr>
           <a:xfrm>
-            <a:off x="4681686" y="2473523"/>
+            <a:off x="4681686" y="2892623"/>
             <a:ext cx="489793" cy="530126"/>
           </a:xfrm>
           <a:prstGeom prst="roundRect">
@@ -2308,7 +2308,7 @@
         </p:nvSpPr>
         <p:spPr>
           <a:xfrm>
-            <a:off x="4806278" y="2562374"/>
+            <a:off x="4806278" y="2981474"/>
             <a:ext cx="240610" cy="247650"/>
           </a:xfrm>
           <a:prstGeom prst="rect">
@@ -2347,7 +2347,7 @@
         </p:nvSpPr>
         <p:spPr>
           <a:xfrm>
-            <a:off x="4806278" y="2810024"/>
+            <a:off x="4806278" y="3229124"/>
             <a:ext cx="240610" cy="104775"/>
           </a:xfrm>
           <a:prstGeom prst="rect">
@@ -2386,7 +2386,7 @@
         </p:nvSpPr>
         <p:spPr>
           <a:xfrm>
-            <a:off x="5272007" y="2638574"/>
+            <a:off x="5272007" y="3057674"/>
             <a:ext cx="99280" cy="200025"/>
           </a:xfrm>
           <a:prstGeom prst="rect">
@@ -2431,7 +2431,7 @@
         </p:nvSpPr>
         <p:spPr>
           <a:xfrm>
-            <a:off x="5471815" y="2473523"/>
+            <a:off x="5471815" y="2892623"/>
             <a:ext cx="429816" cy="530126"/>
           </a:xfrm>
           <a:prstGeom prst="roundRect">
@@ -2463,7 +2463,7 @@
         </p:nvSpPr>
         <p:spPr>
           <a:xfrm>
-            <a:off x="5597006" y="2562374"/>
+            <a:off x="5597006" y="2981474"/>
             <a:ext cx="179433" cy="247650"/>
           </a:xfrm>
           <a:prstGeom prst="rect">
@@ -2502,7 +2502,7 @@
         </p:nvSpPr>
         <p:spPr>
           <a:xfrm>
-            <a:off x="5597006" y="2810024"/>
+            <a:off x="5597006" y="3229124"/>
             <a:ext cx="179433" cy="104775"/>
           </a:xfrm>
           <a:prstGeom prst="rect">
@@ -2541,7 +2541,7 @@
         </p:nvSpPr>
         <p:spPr>
           <a:xfrm>
-            <a:off x="6002158" y="2638574"/>
+            <a:off x="6002158" y="3057674"/>
             <a:ext cx="99280" cy="200025"/>
           </a:xfrm>
           <a:prstGeom prst="rect">
@@ -2586,7 +2586,7 @@
         </p:nvSpPr>
         <p:spPr>
           <a:xfrm>
-            <a:off x="6201966" y="2473523"/>
+            <a:off x="6201966" y="2892623"/>
             <a:ext cx="486221" cy="530126"/>
           </a:xfrm>
           <a:prstGeom prst="roundRect">
@@ -2618,7 +2618,7 @@
         </p:nvSpPr>
         <p:spPr>
           <a:xfrm>
-            <a:off x="6326593" y="2562374"/>
+            <a:off x="6326593" y="2981474"/>
             <a:ext cx="236967" cy="247650"/>
           </a:xfrm>
           <a:prstGeom prst="rect">
@@ -2657,7 +2657,7 @@
         </p:nvSpPr>
         <p:spPr>
           <a:xfrm>
-            <a:off x="6326593" y="2810024"/>
+            <a:off x="6326593" y="3229124"/>
             <a:ext cx="236967" cy="104775"/>
           </a:xfrm>
           <a:prstGeom prst="rect">
@@ -2696,7 +2696,7 @@
         </p:nvSpPr>
         <p:spPr>
           <a:xfrm>
-            <a:off x="6788715" y="2638574"/>
+            <a:off x="6788715" y="3057674"/>
             <a:ext cx="99280" cy="200025"/>
           </a:xfrm>
           <a:prstGeom prst="rect">
@@ -2741,7 +2741,7 @@
         </p:nvSpPr>
         <p:spPr>
           <a:xfrm>
-            <a:off x="6988522" y="2473523"/>
+            <a:off x="6988522" y="2892623"/>
             <a:ext cx="521791" cy="530126"/>
           </a:xfrm>
           <a:prstGeom prst="roundRect">
@@ -2773,7 +2773,7 @@
         </p:nvSpPr>
         <p:spPr>
           <a:xfrm>
-            <a:off x="7112794" y="2562374"/>
+            <a:off x="7112794" y="2981474"/>
             <a:ext cx="273248" cy="247650"/>
           </a:xfrm>
           <a:prstGeom prst="rect">
@@ -2812,7 +2812,7 @@
         </p:nvSpPr>
         <p:spPr>
           <a:xfrm>
-            <a:off x="7112794" y="2810024"/>
+            <a:off x="7112794" y="3229124"/>
             <a:ext cx="273248" cy="104775"/>
           </a:xfrm>
           <a:prstGeom prst="rect">
@@ -2851,12 +2851,12 @@
         </p:nvSpPr>
         <p:spPr>
           <a:xfrm>
-            <a:off x="4486275" y="3130600"/>
-            <a:ext cx="1022300" cy="764977"/>
+            <a:off x="4580334" y="3549700"/>
+            <a:ext cx="959644" cy="345877"/>
           </a:xfrm>
           <a:prstGeom prst="roundRect">
             <a:avLst>
-              <a:gd name="adj" fmla="val 9961"/>
+              <a:gd name="adj" fmla="val 22031"/>
             </a:avLst>
           </a:prstGeom>
           <a:solidFill>
@@ -2883,8 +2883,8 @@
         </p:nvSpPr>
         <p:spPr>
           <a:xfrm>
-            <a:off x="4553776" y="3232100"/>
-            <a:ext cx="887298" cy="104775"/>
+            <a:off x="4648462" y="3651200"/>
+            <a:ext cx="823389" cy="104775"/>
           </a:xfrm>
           <a:prstGeom prst="rect">
             <a:avLst/>
@@ -2922,129 +2922,12 @@
         </p:nvSpPr>
         <p:spPr>
           <a:xfrm>
-            <a:off x="4553776" y="3336875"/>
-            <a:ext cx="887298" cy="104775"/>
-          </a:xfrm>
-          <a:prstGeom prst="rect">
-            <a:avLst/>
-          </a:prstGeom>
-          <a:noFill/>
-          <a:ln/>
-        </p:spPr>
-        <p:txBody>
-          <a:bodyPr wrap="square" lIns="0" tIns="0" rIns="0" bIns="0" rtlCol="0" anchor="t"/>
-          <a:lstStyle/>
-          <a:p>
-            <a:pPr algn="ctr" indent="0" marL="0">
-              <a:buNone/>
-            </a:pPr>
-            <a:r>
-              <a:rPr lang="en-US" sz="600" dirty="0">
-                <a:solidFill>
-                  <a:srgbClr val="8B94A3"/>
-                </a:solidFill>
-                <a:latin typeface="Noto Sans SC" pitchFamily="34" charset="0"/>
-                <a:ea typeface="Noto Sans SC" pitchFamily="34" charset="-122"/>
-                <a:cs typeface="Noto Sans SC" pitchFamily="34" charset="-120"/>
-              </a:rPr>
-              <a:t>Pattern: 点</a:t>
-            </a:r>
-            <a:endParaRPr lang="en-US" sz="600" dirty="0"/>
-          </a:p>
-        </p:txBody>
-      </p:sp>
-      <p:sp>
-        <p:nvSpPr>
-          <p:cNvPr id="28" name="Text 26"/>
-          <p:cNvSpPr/>
-          <p:nvPr/>
-        </p:nvSpPr>
-        <p:spPr>
-          <a:xfrm>
-            <a:off x="4553776" y="3441650"/>
-            <a:ext cx="887298" cy="209550"/>
-          </a:xfrm>
-          <a:prstGeom prst="rect">
-            <a:avLst/>
-          </a:prstGeom>
-          <a:noFill/>
-          <a:ln/>
-        </p:spPr>
-        <p:txBody>
-          <a:bodyPr wrap="square" lIns="0" tIns="0" rIns="0" bIns="0" rtlCol="0" anchor="t"/>
-          <a:lstStyle/>
-          <a:p>
-            <a:pPr algn="ctr" indent="0" marL="0">
-              <a:buNone/>
-            </a:pPr>
-            <a:r>
-              <a:rPr lang="en-US" sz="1200" b="1" dirty="0">
-                <a:solidFill>
-                  <a:srgbClr val="1E2A38"/>
-                </a:solidFill>
-                <a:latin typeface="Noto Serif SC" pitchFamily="34" charset="0"/>
-                <a:ea typeface="Noto Serif SC" pitchFamily="34" charset="-122"/>
-                <a:cs typeface="Noto Serif SC" pitchFamily="34" charset="-120"/>
-              </a:rPr>
-              <a:t>七点</a:t>
-            </a:r>
-            <a:endParaRPr lang="en-US" sz="1200" dirty="0"/>
-          </a:p>
-        </p:txBody>
-      </p:sp>
-      <p:sp>
-        <p:nvSpPr>
-          <p:cNvPr id="29" name="Text 27"/>
-          <p:cNvSpPr/>
-          <p:nvPr/>
-        </p:nvSpPr>
-        <p:spPr>
-          <a:xfrm>
-            <a:off x="4553776" y="3651200"/>
-            <a:ext cx="887298" cy="104775"/>
-          </a:xfrm>
-          <a:prstGeom prst="rect">
-            <a:avLst/>
-          </a:prstGeom>
-          <a:noFill/>
-          <a:ln/>
-        </p:spPr>
-        <p:txBody>
-          <a:bodyPr wrap="square" lIns="0" tIns="0" rIns="0" bIns="0" rtlCol="0" anchor="t"/>
-          <a:lstStyle/>
-          <a:p>
-            <a:pPr algn="ctr" indent="0" marL="0">
-              <a:buNone/>
-            </a:pPr>
-            <a:r>
-              <a:rPr lang="en-US" sz="600" dirty="0">
-                <a:solidFill>
-                  <a:srgbClr val="8B94A3"/>
-                </a:solidFill>
-                <a:latin typeface="Noto Sans SC" pitchFamily="34" charset="0"/>
-                <a:ea typeface="Noto Sans SC" pitchFamily="34" charset="-122"/>
-                <a:cs typeface="Noto Sans SC" pitchFamily="34" charset="-120"/>
-              </a:rPr>
-              <a:t>7:00</a:t>
-            </a:r>
-            <a:endParaRPr lang="en-US" sz="600" dirty="0"/>
-          </a:p>
-        </p:txBody>
-      </p:sp>
-      <p:sp>
-        <p:nvSpPr>
-          <p:cNvPr id="30" name="Text 28"/>
-          <p:cNvSpPr/>
-          <p:nvPr/>
-        </p:nvSpPr>
-        <p:spPr>
-          <a:xfrm>
-            <a:off x="5584775" y="3130600"/>
-            <a:ext cx="1022300" cy="764977"/>
+            <a:off x="5616178" y="3549700"/>
+            <a:ext cx="959644" cy="345877"/>
           </a:xfrm>
           <a:prstGeom prst="roundRect">
             <a:avLst>
-              <a:gd name="adj" fmla="val 9961"/>
+              <a:gd name="adj" fmla="val 22031"/>
             </a:avLst>
           </a:prstGeom>
           <a:solidFill>
@@ -3065,14 +2948,14 @@
       </p:sp>
       <p:sp>
         <p:nvSpPr>
-          <p:cNvPr id="31" name="Text 29"/>
-          <p:cNvSpPr/>
-          <p:nvPr/>
-        </p:nvSpPr>
-        <p:spPr>
-          <a:xfrm>
-            <a:off x="5652276" y="3232100"/>
-            <a:ext cx="887298" cy="104775"/>
+          <p:cNvPr id="28" name="Text 26"/>
+          <p:cNvSpPr/>
+          <p:nvPr/>
+        </p:nvSpPr>
+        <p:spPr>
+          <a:xfrm>
+            <a:off x="5684306" y="3651200"/>
+            <a:ext cx="823389" cy="104775"/>
           </a:xfrm>
           <a:prstGeom prst="rect">
             <a:avLst/>
@@ -3104,135 +2987,18 @@
       </p:sp>
       <p:sp>
         <p:nvSpPr>
-          <p:cNvPr id="32" name="Text 30"/>
-          <p:cNvSpPr/>
-          <p:nvPr/>
-        </p:nvSpPr>
-        <p:spPr>
-          <a:xfrm>
-            <a:off x="5652276" y="3336875"/>
-            <a:ext cx="887298" cy="104775"/>
-          </a:xfrm>
-          <a:prstGeom prst="rect">
-            <a:avLst/>
-          </a:prstGeom>
-          <a:noFill/>
-          <a:ln/>
-        </p:spPr>
-        <p:txBody>
-          <a:bodyPr wrap="square" lIns="0" tIns="0" rIns="0" bIns="0" rtlCol="0" anchor="t"/>
-          <a:lstStyle/>
-          <a:p>
-            <a:pPr algn="ctr" indent="0" marL="0">
-              <a:buNone/>
-            </a:pPr>
-            <a:r>
-              <a:rPr lang="en-US" sz="600" dirty="0">
-                <a:solidFill>
-                  <a:srgbClr val="8B94A3"/>
-                </a:solidFill>
-                <a:latin typeface="Noto Sans SC" pitchFamily="34" charset="0"/>
-                <a:ea typeface="Noto Sans SC" pitchFamily="34" charset="-122"/>
-                <a:cs typeface="Noto Sans SC" pitchFamily="34" charset="-120"/>
-              </a:rPr>
-              <a:t>Pattern: 分</a:t>
-            </a:r>
-            <a:endParaRPr lang="en-US" sz="600" dirty="0"/>
-          </a:p>
-        </p:txBody>
-      </p:sp>
-      <p:sp>
-        <p:nvSpPr>
-          <p:cNvPr id="33" name="Text 31"/>
-          <p:cNvSpPr/>
-          <p:nvPr/>
-        </p:nvSpPr>
-        <p:spPr>
-          <a:xfrm>
-            <a:off x="5652276" y="3441650"/>
-            <a:ext cx="887298" cy="209550"/>
-          </a:xfrm>
-          <a:prstGeom prst="rect">
-            <a:avLst/>
-          </a:prstGeom>
-          <a:noFill/>
-          <a:ln/>
-        </p:spPr>
-        <p:txBody>
-          <a:bodyPr wrap="square" lIns="0" tIns="0" rIns="0" bIns="0" rtlCol="0" anchor="t"/>
-          <a:lstStyle/>
-          <a:p>
-            <a:pPr algn="ctr" indent="0" marL="0">
-              <a:buNone/>
-            </a:pPr>
-            <a:r>
-              <a:rPr lang="en-US" sz="1200" b="1" dirty="0">
-                <a:solidFill>
-                  <a:srgbClr val="1E2A38"/>
-                </a:solidFill>
-                <a:latin typeface="Noto Serif SC" pitchFamily="34" charset="0"/>
-                <a:ea typeface="Noto Serif SC" pitchFamily="34" charset="-122"/>
-                <a:cs typeface="Noto Serif SC" pitchFamily="34" charset="-120"/>
-              </a:rPr>
-              <a:t>四点十五分</a:t>
-            </a:r>
-            <a:endParaRPr lang="en-US" sz="1200" dirty="0"/>
-          </a:p>
-        </p:txBody>
-      </p:sp>
-      <p:sp>
-        <p:nvSpPr>
-          <p:cNvPr id="34" name="Text 32"/>
-          <p:cNvSpPr/>
-          <p:nvPr/>
-        </p:nvSpPr>
-        <p:spPr>
-          <a:xfrm>
-            <a:off x="5652276" y="3651200"/>
-            <a:ext cx="887298" cy="104775"/>
-          </a:xfrm>
-          <a:prstGeom prst="rect">
-            <a:avLst/>
-          </a:prstGeom>
-          <a:noFill/>
-          <a:ln/>
-        </p:spPr>
-        <p:txBody>
-          <a:bodyPr wrap="square" lIns="0" tIns="0" rIns="0" bIns="0" rtlCol="0" anchor="t"/>
-          <a:lstStyle/>
-          <a:p>
-            <a:pPr algn="ctr" indent="0" marL="0">
-              <a:buNone/>
-            </a:pPr>
-            <a:r>
-              <a:rPr lang="en-US" sz="600" dirty="0">
-                <a:solidFill>
-                  <a:srgbClr val="8B94A3"/>
-                </a:solidFill>
-                <a:latin typeface="Noto Sans SC" pitchFamily="34" charset="0"/>
-                <a:ea typeface="Noto Sans SC" pitchFamily="34" charset="-122"/>
-                <a:cs typeface="Noto Sans SC" pitchFamily="34" charset="-120"/>
-              </a:rPr>
-              <a:t>4:15</a:t>
-            </a:r>
-            <a:endParaRPr lang="en-US" sz="600" dirty="0"/>
-          </a:p>
-        </p:txBody>
-      </p:sp>
-      <p:sp>
-        <p:nvSpPr>
-          <p:cNvPr id="35" name="Text 33"/>
-          <p:cNvSpPr/>
-          <p:nvPr/>
-        </p:nvSpPr>
-        <p:spPr>
-          <a:xfrm>
-            <a:off x="6683276" y="3130600"/>
-            <a:ext cx="1022300" cy="764977"/>
+          <p:cNvPr id="29" name="Text 27"/>
+          <p:cNvSpPr/>
+          <p:nvPr/>
+        </p:nvSpPr>
+        <p:spPr>
+          <a:xfrm>
+            <a:off x="6652022" y="3549700"/>
+            <a:ext cx="959644" cy="345877"/>
           </a:xfrm>
           <a:prstGeom prst="roundRect">
             <a:avLst>
-              <a:gd name="adj" fmla="val 9961"/>
+              <a:gd name="adj" fmla="val 22031"/>
             </a:avLst>
           </a:prstGeom>
           <a:solidFill>
@@ -3257,14 +3023,14 @@
       </p:sp>
       <p:sp>
         <p:nvSpPr>
-          <p:cNvPr id="36" name="Text 34"/>
-          <p:cNvSpPr/>
-          <p:nvPr/>
-        </p:nvSpPr>
-        <p:spPr>
-          <a:xfrm>
-            <a:off x="6770208" y="3251150"/>
-            <a:ext cx="848436" cy="104775"/>
+          <p:cNvPr id="30" name="Text 28"/>
+          <p:cNvSpPr/>
+          <p:nvPr/>
+        </p:nvSpPr>
+        <p:spPr>
+          <a:xfrm>
+            <a:off x="6739580" y="3670250"/>
+            <a:ext cx="784527" cy="104775"/>
           </a:xfrm>
           <a:prstGeom prst="rect">
             <a:avLst/>
@@ -3296,695 +3062,14 @@
       </p:sp>
       <p:sp>
         <p:nvSpPr>
-          <p:cNvPr id="37" name="Text 35"/>
-          <p:cNvSpPr/>
-          <p:nvPr/>
-        </p:nvSpPr>
-        <p:spPr>
-          <a:xfrm>
-            <a:off x="6770208" y="3355925"/>
-            <a:ext cx="848436" cy="104775"/>
-          </a:xfrm>
-          <a:prstGeom prst="rect">
-            <a:avLst/>
-          </a:prstGeom>
-          <a:noFill/>
-          <a:ln/>
-        </p:spPr>
-        <p:txBody>
-          <a:bodyPr wrap="square" lIns="0" tIns="0" rIns="0" bIns="0" rtlCol="0" anchor="t"/>
-          <a:lstStyle/>
-          <a:p>
-            <a:pPr algn="ctr" indent="0" marL="0">
-              <a:buNone/>
-            </a:pPr>
-            <a:r>
-              <a:rPr lang="en-US" sz="600" dirty="0">
-                <a:solidFill>
-                  <a:srgbClr val="8B94A3"/>
-                </a:solidFill>
-                <a:latin typeface="Noto Sans SC" pitchFamily="34" charset="0"/>
-                <a:ea typeface="Noto Sans SC" pitchFamily="34" charset="-122"/>
-                <a:cs typeface="Noto Sans SC" pitchFamily="34" charset="-120"/>
-              </a:rPr>
-              <a:t>Pattern: 半 (两 not 二!)</a:t>
-            </a:r>
-            <a:endParaRPr lang="en-US" sz="600" dirty="0"/>
-          </a:p>
-        </p:txBody>
-      </p:sp>
-      <p:sp>
-        <p:nvSpPr>
-          <p:cNvPr id="38" name="Text 36"/>
-          <p:cNvSpPr/>
-          <p:nvPr/>
-        </p:nvSpPr>
-        <p:spPr>
-          <a:xfrm>
-            <a:off x="6770208" y="3460700"/>
-            <a:ext cx="848436" cy="209550"/>
-          </a:xfrm>
-          <a:prstGeom prst="rect">
-            <a:avLst/>
-          </a:prstGeom>
-          <a:noFill/>
-          <a:ln/>
-        </p:spPr>
-        <p:txBody>
-          <a:bodyPr wrap="square" lIns="0" tIns="0" rIns="0" bIns="0" rtlCol="0" anchor="t"/>
-          <a:lstStyle/>
-          <a:p>
-            <a:pPr algn="ctr" indent="0" marL="0">
-              <a:buNone/>
-            </a:pPr>
-            <a:r>
-              <a:rPr lang="en-US" sz="1200" b="1" dirty="0">
-                <a:solidFill>
-                  <a:srgbClr val="D4756B"/>
-                </a:solidFill>
-                <a:latin typeface="Noto Serif SC" pitchFamily="34" charset="0"/>
-                <a:ea typeface="Noto Serif SC" pitchFamily="34" charset="-122"/>
-                <a:cs typeface="Noto Serif SC" pitchFamily="34" charset="-120"/>
-              </a:rPr>
-              <a:t>两点半</a:t>
-            </a:r>
-            <a:endParaRPr lang="en-US" sz="1200" dirty="0"/>
-          </a:p>
-        </p:txBody>
-      </p:sp>
-      <p:sp>
-        <p:nvSpPr>
-          <p:cNvPr id="39" name="Text 37"/>
-          <p:cNvSpPr/>
-          <p:nvPr/>
-        </p:nvSpPr>
-        <p:spPr>
-          <a:xfrm>
-            <a:off x="6770208" y="3670250"/>
-            <a:ext cx="848436" cy="104775"/>
-          </a:xfrm>
-          <a:prstGeom prst="rect">
-            <a:avLst/>
-          </a:prstGeom>
-          <a:noFill/>
-          <a:ln/>
-        </p:spPr>
-        <p:txBody>
-          <a:bodyPr wrap="square" lIns="0" tIns="0" rIns="0" bIns="0" rtlCol="0" anchor="t"/>
-          <a:lstStyle/>
-          <a:p>
-            <a:pPr algn="ctr" indent="0" marL="0">
-              <a:buNone/>
-            </a:pPr>
-            <a:r>
-              <a:rPr lang="en-US" sz="600" dirty="0">
-                <a:solidFill>
-                  <a:srgbClr val="8B94A3"/>
-                </a:solidFill>
-                <a:latin typeface="Noto Sans SC" pitchFamily="34" charset="0"/>
-                <a:ea typeface="Noto Sans SC" pitchFamily="34" charset="-122"/>
-                <a:cs typeface="Noto Sans SC" pitchFamily="34" charset="-120"/>
-              </a:rPr>
-              <a:t>2:30</a:t>
-            </a:r>
-            <a:endParaRPr lang="en-US" sz="600" dirty="0"/>
-          </a:p>
-        </p:txBody>
-      </p:sp>
-      <p:sp>
-        <p:nvSpPr>
-          <p:cNvPr id="40" name="Text 38"/>
-          <p:cNvSpPr/>
-          <p:nvPr/>
-        </p:nvSpPr>
-        <p:spPr>
-          <a:xfrm>
-            <a:off x="4486275" y="3971776"/>
-            <a:ext cx="1022300" cy="726877"/>
-          </a:xfrm>
-          <a:prstGeom prst="roundRect">
-            <a:avLst>
-              <a:gd name="adj" fmla="val 10483"/>
-            </a:avLst>
-          </a:prstGeom>
-          <a:solidFill>
-            <a:srgbClr val="F6F2E8"/>
-          </a:solidFill>
-          <a:ln/>
-        </p:spPr>
-        <p:txBody>
-          <a:bodyPr wrap="square" rtlCol="0" anchor="ctr"/>
-          <a:lstStyle/>
-          <a:p>
-            <a:pPr indent="0" marL="0">
-              <a:buNone/>
-            </a:pPr>
-            <a:endParaRPr lang="en-US" dirty="0"/>
-          </a:p>
-        </p:txBody>
-      </p:sp>
-      <p:sp>
-        <p:nvSpPr>
-          <p:cNvPr id="41" name="Text 39"/>
-          <p:cNvSpPr/>
-          <p:nvPr/>
-        </p:nvSpPr>
-        <p:spPr>
-          <a:xfrm>
-            <a:off x="4553776" y="4073277"/>
-            <a:ext cx="887298" cy="104775"/>
-          </a:xfrm>
-          <a:prstGeom prst="rect">
-            <a:avLst/>
-          </a:prstGeom>
-          <a:noFill/>
-          <a:ln/>
-        </p:spPr>
-        <p:txBody>
-          <a:bodyPr wrap="square" lIns="0" tIns="0" rIns="0" bIns="0" rtlCol="0" anchor="t"/>
-          <a:lstStyle/>
-          <a:p>
-            <a:pPr algn="ctr" indent="0" marL="0">
-              <a:buNone/>
-            </a:pPr>
-            <a:r>
-              <a:rPr lang="en-US" sz="600" b="1" dirty="0">
-                <a:solidFill>
-                  <a:srgbClr val="3A7D8C"/>
-                </a:solidFill>
-                <a:latin typeface="Noto Sans SC" pitchFamily="34" charset="0"/>
-                <a:ea typeface="Noto Sans SC" pitchFamily="34" charset="-122"/>
-                <a:cs typeface="Noto Sans SC" pitchFamily="34" charset="-120"/>
-              </a:rPr>
-              <a:t>Round 4</a:t>
-            </a:r>
-            <a:endParaRPr lang="en-US" sz="600" dirty="0"/>
-          </a:p>
-        </p:txBody>
-      </p:sp>
-      <p:sp>
-        <p:nvSpPr>
-          <p:cNvPr id="42" name="Text 40"/>
-          <p:cNvSpPr/>
-          <p:nvPr/>
-        </p:nvSpPr>
-        <p:spPr>
-          <a:xfrm>
-            <a:off x="4553776" y="4178052"/>
-            <a:ext cx="887298" cy="104775"/>
-          </a:xfrm>
-          <a:prstGeom prst="rect">
-            <a:avLst/>
-          </a:prstGeom>
-          <a:noFill/>
-          <a:ln/>
-        </p:spPr>
-        <p:txBody>
-          <a:bodyPr wrap="square" lIns="0" tIns="0" rIns="0" bIns="0" rtlCol="0" anchor="t"/>
-          <a:lstStyle/>
-          <a:p>
-            <a:pPr algn="ctr" indent="0" marL="0">
-              <a:buNone/>
-            </a:pPr>
-            <a:r>
-              <a:rPr lang="en-US" sz="600" dirty="0">
-                <a:solidFill>
-                  <a:srgbClr val="8B94A3"/>
-                </a:solidFill>
-                <a:latin typeface="Noto Sans SC" pitchFamily="34" charset="0"/>
-                <a:ea typeface="Noto Sans SC" pitchFamily="34" charset="-122"/>
-                <a:cs typeface="Noto Sans SC" pitchFamily="34" charset="-120"/>
-              </a:rPr>
-              <a:t>Pattern: 半</a:t>
-            </a:r>
-            <a:endParaRPr lang="en-US" sz="600" dirty="0"/>
-          </a:p>
-        </p:txBody>
-      </p:sp>
-      <p:sp>
-        <p:nvSpPr>
-          <p:cNvPr id="43" name="Text 41"/>
-          <p:cNvSpPr/>
-          <p:nvPr/>
-        </p:nvSpPr>
-        <p:spPr>
-          <a:xfrm>
-            <a:off x="4553776" y="4282827"/>
-            <a:ext cx="887298" cy="209550"/>
-          </a:xfrm>
-          <a:prstGeom prst="rect">
-            <a:avLst/>
-          </a:prstGeom>
-          <a:noFill/>
-          <a:ln/>
-        </p:spPr>
-        <p:txBody>
-          <a:bodyPr wrap="square" lIns="0" tIns="0" rIns="0" bIns="0" rtlCol="0" anchor="t"/>
-          <a:lstStyle/>
-          <a:p>
-            <a:pPr algn="ctr" indent="0" marL="0">
-              <a:buNone/>
-            </a:pPr>
-            <a:r>
-              <a:rPr lang="en-US" sz="1200" b="1" dirty="0">
-                <a:solidFill>
-                  <a:srgbClr val="1E2A38"/>
-                </a:solidFill>
-                <a:latin typeface="Noto Serif SC" pitchFamily="34" charset="0"/>
-                <a:ea typeface="Noto Serif SC" pitchFamily="34" charset="-122"/>
-                <a:cs typeface="Noto Serif SC" pitchFamily="34" charset="-120"/>
-              </a:rPr>
-              <a:t>十一点半</a:t>
-            </a:r>
-            <a:endParaRPr lang="en-US" sz="1200" dirty="0"/>
-          </a:p>
-        </p:txBody>
-      </p:sp>
-      <p:sp>
-        <p:nvSpPr>
-          <p:cNvPr id="44" name="Text 42"/>
-          <p:cNvSpPr/>
-          <p:nvPr/>
-        </p:nvSpPr>
-        <p:spPr>
-          <a:xfrm>
-            <a:off x="4553776" y="4492377"/>
-            <a:ext cx="887298" cy="104775"/>
-          </a:xfrm>
-          <a:prstGeom prst="rect">
-            <a:avLst/>
-          </a:prstGeom>
-          <a:noFill/>
-          <a:ln/>
-        </p:spPr>
-        <p:txBody>
-          <a:bodyPr wrap="square" lIns="0" tIns="0" rIns="0" bIns="0" rtlCol="0" anchor="t"/>
-          <a:lstStyle/>
-          <a:p>
-            <a:pPr algn="ctr" indent="0" marL="0">
-              <a:buNone/>
-            </a:pPr>
-            <a:r>
-              <a:rPr lang="en-US" sz="600" dirty="0">
-                <a:solidFill>
-                  <a:srgbClr val="8B94A3"/>
-                </a:solidFill>
-                <a:latin typeface="Noto Sans SC" pitchFamily="34" charset="0"/>
-                <a:ea typeface="Noto Sans SC" pitchFamily="34" charset="-122"/>
-                <a:cs typeface="Noto Sans SC" pitchFamily="34" charset="-120"/>
-              </a:rPr>
-              <a:t>11:30</a:t>
-            </a:r>
-            <a:endParaRPr lang="en-US" sz="600" dirty="0"/>
-          </a:p>
-        </p:txBody>
-      </p:sp>
-      <p:sp>
-        <p:nvSpPr>
-          <p:cNvPr id="45" name="Text 43"/>
-          <p:cNvSpPr/>
-          <p:nvPr/>
-        </p:nvSpPr>
-        <p:spPr>
-          <a:xfrm>
-            <a:off x="5584775" y="3971776"/>
-            <a:ext cx="1022300" cy="726877"/>
-          </a:xfrm>
-          <a:prstGeom prst="roundRect">
-            <a:avLst>
-              <a:gd name="adj" fmla="val 10483"/>
-            </a:avLst>
-          </a:prstGeom>
-          <a:solidFill>
-            <a:srgbClr val="F6F2E8"/>
-          </a:solidFill>
-          <a:ln/>
-        </p:spPr>
-        <p:txBody>
-          <a:bodyPr wrap="square" rtlCol="0" anchor="ctr"/>
-          <a:lstStyle/>
-          <a:p>
-            <a:pPr indent="0" marL="0">
-              <a:buNone/>
-            </a:pPr>
-            <a:endParaRPr lang="en-US" dirty="0"/>
-          </a:p>
-        </p:txBody>
-      </p:sp>
-      <p:sp>
-        <p:nvSpPr>
-          <p:cNvPr id="46" name="Text 44"/>
-          <p:cNvSpPr/>
-          <p:nvPr/>
-        </p:nvSpPr>
-        <p:spPr>
-          <a:xfrm>
-            <a:off x="5652276" y="4073277"/>
-            <a:ext cx="887298" cy="104775"/>
-          </a:xfrm>
-          <a:prstGeom prst="rect">
-            <a:avLst/>
-          </a:prstGeom>
-          <a:noFill/>
-          <a:ln/>
-        </p:spPr>
-        <p:txBody>
-          <a:bodyPr wrap="square" lIns="0" tIns="0" rIns="0" bIns="0" rtlCol="0" anchor="t"/>
-          <a:lstStyle/>
-          <a:p>
-            <a:pPr algn="ctr" indent="0" marL="0">
-              <a:buNone/>
-            </a:pPr>
-            <a:r>
-              <a:rPr lang="en-US" sz="600" b="1" dirty="0">
-                <a:solidFill>
-                  <a:srgbClr val="3A7D8C"/>
-                </a:solidFill>
-                <a:latin typeface="Noto Sans SC" pitchFamily="34" charset="0"/>
-                <a:ea typeface="Noto Sans SC" pitchFamily="34" charset="-122"/>
-                <a:cs typeface="Noto Sans SC" pitchFamily="34" charset="-120"/>
-              </a:rPr>
-              <a:t>Round 5</a:t>
-            </a:r>
-            <a:endParaRPr lang="en-US" sz="600" dirty="0"/>
-          </a:p>
-        </p:txBody>
-      </p:sp>
-      <p:sp>
-        <p:nvSpPr>
-          <p:cNvPr id="47" name="Text 45"/>
-          <p:cNvSpPr/>
-          <p:nvPr/>
-        </p:nvSpPr>
-        <p:spPr>
-          <a:xfrm>
-            <a:off x="5652276" y="4178052"/>
-            <a:ext cx="887298" cy="104775"/>
-          </a:xfrm>
-          <a:prstGeom prst="rect">
-            <a:avLst/>
-          </a:prstGeom>
-          <a:noFill/>
-          <a:ln/>
-        </p:spPr>
-        <p:txBody>
-          <a:bodyPr wrap="square" lIns="0" tIns="0" rIns="0" bIns="0" rtlCol="0" anchor="t"/>
-          <a:lstStyle/>
-          <a:p>
-            <a:pPr algn="ctr" indent="0" marL="0">
-              <a:buNone/>
-            </a:pPr>
-            <a:r>
-              <a:rPr lang="en-US" sz="600" dirty="0">
-                <a:solidFill>
-                  <a:srgbClr val="8B94A3"/>
-                </a:solidFill>
-                <a:latin typeface="Noto Sans SC" pitchFamily="34" charset="0"/>
-                <a:ea typeface="Noto Sans SC" pitchFamily="34" charset="-122"/>
-                <a:cs typeface="Noto Sans SC" pitchFamily="34" charset="-120"/>
-              </a:rPr>
-              <a:t>Pattern: 半</a:t>
-            </a:r>
-            <a:endParaRPr lang="en-US" sz="600" dirty="0"/>
-          </a:p>
-        </p:txBody>
-      </p:sp>
-      <p:sp>
-        <p:nvSpPr>
-          <p:cNvPr id="48" name="Text 46"/>
-          <p:cNvSpPr/>
-          <p:nvPr/>
-        </p:nvSpPr>
-        <p:spPr>
-          <a:xfrm>
-            <a:off x="5652276" y="4282827"/>
-            <a:ext cx="887298" cy="209550"/>
-          </a:xfrm>
-          <a:prstGeom prst="rect">
-            <a:avLst/>
-          </a:prstGeom>
-          <a:noFill/>
-          <a:ln/>
-        </p:spPr>
-        <p:txBody>
-          <a:bodyPr wrap="square" lIns="0" tIns="0" rIns="0" bIns="0" rtlCol="0" anchor="t"/>
-          <a:lstStyle/>
-          <a:p>
-            <a:pPr algn="ctr" indent="0" marL="0">
-              <a:buNone/>
-            </a:pPr>
-            <a:r>
-              <a:rPr lang="en-US" sz="1200" b="1" dirty="0">
-                <a:solidFill>
-                  <a:srgbClr val="1E2A38"/>
-                </a:solidFill>
-                <a:latin typeface="Noto Serif SC" pitchFamily="34" charset="0"/>
-                <a:ea typeface="Noto Serif SC" pitchFamily="34" charset="-122"/>
-                <a:cs typeface="Noto Serif SC" pitchFamily="34" charset="-120"/>
-              </a:rPr>
-              <a:t>五点半</a:t>
-            </a:r>
-            <a:endParaRPr lang="en-US" sz="1200" dirty="0"/>
-          </a:p>
-        </p:txBody>
-      </p:sp>
-      <p:sp>
-        <p:nvSpPr>
-          <p:cNvPr id="49" name="Text 47"/>
-          <p:cNvSpPr/>
-          <p:nvPr/>
-        </p:nvSpPr>
-        <p:spPr>
-          <a:xfrm>
-            <a:off x="5652276" y="4492377"/>
-            <a:ext cx="887298" cy="104775"/>
-          </a:xfrm>
-          <a:prstGeom prst="rect">
-            <a:avLst/>
-          </a:prstGeom>
-          <a:noFill/>
-          <a:ln/>
-        </p:spPr>
-        <p:txBody>
-          <a:bodyPr wrap="square" lIns="0" tIns="0" rIns="0" bIns="0" rtlCol="0" anchor="t"/>
-          <a:lstStyle/>
-          <a:p>
-            <a:pPr algn="ctr" indent="0" marL="0">
-              <a:buNone/>
-            </a:pPr>
-            <a:r>
-              <a:rPr lang="en-US" sz="600" dirty="0">
-                <a:solidFill>
-                  <a:srgbClr val="8B94A3"/>
-                </a:solidFill>
-                <a:latin typeface="Noto Sans SC" pitchFamily="34" charset="0"/>
-                <a:ea typeface="Noto Sans SC" pitchFamily="34" charset="-122"/>
-                <a:cs typeface="Noto Sans SC" pitchFamily="34" charset="-120"/>
-              </a:rPr>
-              <a:t>5:30</a:t>
-            </a:r>
-            <a:endParaRPr lang="en-US" sz="600" dirty="0"/>
-          </a:p>
-        </p:txBody>
-      </p:sp>
-      <p:sp>
-        <p:nvSpPr>
-          <p:cNvPr id="50" name="Text 48"/>
-          <p:cNvSpPr/>
-          <p:nvPr/>
-        </p:nvSpPr>
-        <p:spPr>
-          <a:xfrm>
-            <a:off x="6683276" y="3971776"/>
-            <a:ext cx="1022300" cy="726877"/>
-          </a:xfrm>
-          <a:prstGeom prst="roundRect">
-            <a:avLst>
-              <a:gd name="adj" fmla="val 10483"/>
-            </a:avLst>
-          </a:prstGeom>
-          <a:solidFill>
-            <a:srgbClr val="F6F2E8"/>
-          </a:solidFill>
-          <a:ln/>
-        </p:spPr>
-        <p:txBody>
-          <a:bodyPr wrap="square" rtlCol="0" anchor="ctr"/>
-          <a:lstStyle/>
-          <a:p>
-            <a:pPr indent="0" marL="0">
-              <a:buNone/>
-            </a:pPr>
-            <a:endParaRPr lang="en-US" dirty="0"/>
-          </a:p>
-        </p:txBody>
-      </p:sp>
-      <p:sp>
-        <p:nvSpPr>
-          <p:cNvPr id="51" name="Text 49"/>
-          <p:cNvSpPr/>
-          <p:nvPr/>
-        </p:nvSpPr>
-        <p:spPr>
-          <a:xfrm>
-            <a:off x="6750777" y="4073277"/>
-            <a:ext cx="887298" cy="104775"/>
-          </a:xfrm>
-          <a:prstGeom prst="rect">
-            <a:avLst/>
-          </a:prstGeom>
-          <a:noFill/>
-          <a:ln/>
-        </p:spPr>
-        <p:txBody>
-          <a:bodyPr wrap="square" lIns="0" tIns="0" rIns="0" bIns="0" rtlCol="0" anchor="t"/>
-          <a:lstStyle/>
-          <a:p>
-            <a:pPr algn="ctr" indent="0" marL="0">
-              <a:buNone/>
-            </a:pPr>
-            <a:r>
-              <a:rPr lang="en-US" sz="600" b="1" dirty="0">
-                <a:solidFill>
-                  <a:srgbClr val="3A7D8C"/>
-                </a:solidFill>
-                <a:latin typeface="Noto Sans SC" pitchFamily="34" charset="0"/>
-                <a:ea typeface="Noto Sans SC" pitchFamily="34" charset="-122"/>
-                <a:cs typeface="Noto Sans SC" pitchFamily="34" charset="-120"/>
-              </a:rPr>
-              <a:t>Round 6</a:t>
-            </a:r>
-            <a:endParaRPr lang="en-US" sz="600" dirty="0"/>
-          </a:p>
-        </p:txBody>
-      </p:sp>
-      <p:sp>
-        <p:nvSpPr>
-          <p:cNvPr id="52" name="Text 50"/>
-          <p:cNvSpPr/>
-          <p:nvPr/>
-        </p:nvSpPr>
-        <p:spPr>
-          <a:xfrm>
-            <a:off x="6750777" y="4178052"/>
-            <a:ext cx="887298" cy="104775"/>
-          </a:xfrm>
-          <a:prstGeom prst="rect">
-            <a:avLst/>
-          </a:prstGeom>
-          <a:noFill/>
-          <a:ln/>
-        </p:spPr>
-        <p:txBody>
-          <a:bodyPr wrap="square" lIns="0" tIns="0" rIns="0" bIns="0" rtlCol="0" anchor="t"/>
-          <a:lstStyle/>
-          <a:p>
-            <a:pPr algn="ctr" indent="0" marL="0">
-              <a:buNone/>
-            </a:pPr>
-            <a:r>
-              <a:rPr lang="en-US" sz="600" dirty="0">
-                <a:solidFill>
-                  <a:srgbClr val="8B94A3"/>
-                </a:solidFill>
-                <a:latin typeface="Noto Sans SC" pitchFamily="34" charset="0"/>
-                <a:ea typeface="Noto Sans SC" pitchFamily="34" charset="-122"/>
-                <a:cs typeface="Noto Sans SC" pitchFamily="34" charset="-120"/>
-              </a:rPr>
-              <a:t>Pattern: 点零分</a:t>
-            </a:r>
-            <a:endParaRPr lang="en-US" sz="600" dirty="0"/>
-          </a:p>
-        </p:txBody>
-      </p:sp>
-      <p:sp>
-        <p:nvSpPr>
-          <p:cNvPr id="53" name="Text 51"/>
-          <p:cNvSpPr/>
-          <p:nvPr/>
-        </p:nvSpPr>
-        <p:spPr>
-          <a:xfrm>
-            <a:off x="6750777" y="4282827"/>
-            <a:ext cx="887298" cy="209550"/>
-          </a:xfrm>
-          <a:prstGeom prst="rect">
-            <a:avLst/>
-          </a:prstGeom>
-          <a:noFill/>
-          <a:ln/>
-        </p:spPr>
-        <p:txBody>
-          <a:bodyPr wrap="square" lIns="0" tIns="0" rIns="0" bIns="0" rtlCol="0" anchor="t"/>
-          <a:lstStyle/>
-          <a:p>
-            <a:pPr algn="ctr" indent="0" marL="0">
-              <a:buNone/>
-            </a:pPr>
-            <a:r>
-              <a:rPr lang="en-US" sz="1200" b="1" dirty="0">
-                <a:solidFill>
-                  <a:srgbClr val="1E2A38"/>
-                </a:solidFill>
-                <a:latin typeface="Noto Serif SC" pitchFamily="34" charset="0"/>
-                <a:ea typeface="Noto Serif SC" pitchFamily="34" charset="-122"/>
-                <a:cs typeface="Noto Serif SC" pitchFamily="34" charset="-120"/>
-              </a:rPr>
-              <a:t>十点零五分</a:t>
-            </a:r>
-            <a:endParaRPr lang="en-US" sz="1200" dirty="0"/>
-          </a:p>
-        </p:txBody>
-      </p:sp>
-      <p:sp>
-        <p:nvSpPr>
-          <p:cNvPr id="54" name="Text 52"/>
-          <p:cNvSpPr/>
-          <p:nvPr/>
-        </p:nvSpPr>
-        <p:spPr>
-          <a:xfrm>
-            <a:off x="6750777" y="4492377"/>
-            <a:ext cx="887298" cy="104775"/>
-          </a:xfrm>
-          <a:prstGeom prst="rect">
-            <a:avLst/>
-          </a:prstGeom>
-          <a:noFill/>
-          <a:ln/>
-        </p:spPr>
-        <p:txBody>
-          <a:bodyPr wrap="square" lIns="0" tIns="0" rIns="0" bIns="0" rtlCol="0" anchor="t"/>
-          <a:lstStyle/>
-          <a:p>
-            <a:pPr algn="ctr" indent="0" marL="0">
-              <a:buNone/>
-            </a:pPr>
-            <a:r>
-              <a:rPr lang="en-US" sz="600" dirty="0">
-                <a:solidFill>
-                  <a:srgbClr val="8B94A3"/>
-                </a:solidFill>
-                <a:latin typeface="Noto Sans SC" pitchFamily="34" charset="0"/>
-                <a:ea typeface="Noto Sans SC" pitchFamily="34" charset="-122"/>
-                <a:cs typeface="Noto Sans SC" pitchFamily="34" charset="-120"/>
-              </a:rPr>
-              <a:t>10:05</a:t>
-            </a:r>
-            <a:endParaRPr lang="en-US" sz="600" dirty="0"/>
-          </a:p>
-        </p:txBody>
-      </p:sp>
-      <p:sp>
-        <p:nvSpPr>
-          <p:cNvPr id="55" name="Text 53"/>
-          <p:cNvSpPr/>
-          <p:nvPr/>
-        </p:nvSpPr>
-        <p:spPr>
-          <a:xfrm>
-            <a:off x="4412010" y="4800154"/>
-            <a:ext cx="3367832" cy="307777"/>
+          <p:cNvPr id="31" name="Text 29"/>
+          <p:cNvSpPr/>
+          <p:nvPr/>
+        </p:nvSpPr>
+        <p:spPr>
+          <a:xfrm>
+            <a:off x="4580334" y="3971776"/>
+            <a:ext cx="959644" cy="307777"/>
           </a:xfrm>
           <a:prstGeom prst="roundRect">
             <a:avLst>
@@ -3992,13 +3077,226 @@
             </a:avLst>
           </a:prstGeom>
           <a:solidFill>
-            <a:srgbClr val="D4756B">
+            <a:srgbClr val="F6F2E8"/>
+          </a:solidFill>
+          <a:ln/>
+        </p:spPr>
+        <p:txBody>
+          <a:bodyPr wrap="square" rtlCol="0" anchor="ctr"/>
+          <a:lstStyle/>
+          <a:p>
+            <a:pPr indent="0" marL="0">
+              <a:buNone/>
+            </a:pPr>
+            <a:endParaRPr lang="en-US" dirty="0"/>
+          </a:p>
+        </p:txBody>
+      </p:sp>
+      <p:sp>
+        <p:nvSpPr>
+          <p:cNvPr id="32" name="Text 30"/>
+          <p:cNvSpPr/>
+          <p:nvPr/>
+        </p:nvSpPr>
+        <p:spPr>
+          <a:xfrm>
+            <a:off x="4648462" y="4073277"/>
+            <a:ext cx="823389" cy="104775"/>
+          </a:xfrm>
+          <a:prstGeom prst="rect">
+            <a:avLst/>
+          </a:prstGeom>
+          <a:noFill/>
+          <a:ln/>
+        </p:spPr>
+        <p:txBody>
+          <a:bodyPr wrap="square" lIns="0" tIns="0" rIns="0" bIns="0" rtlCol="0" anchor="t"/>
+          <a:lstStyle/>
+          <a:p>
+            <a:pPr algn="ctr" indent="0" marL="0">
+              <a:buNone/>
+            </a:pPr>
+            <a:r>
+              <a:rPr lang="en-US" sz="600" b="1" dirty="0">
+                <a:solidFill>
+                  <a:srgbClr val="3A7D8C"/>
+                </a:solidFill>
+                <a:latin typeface="Noto Sans SC" pitchFamily="34" charset="0"/>
+                <a:ea typeface="Noto Sans SC" pitchFamily="34" charset="-122"/>
+                <a:cs typeface="Noto Sans SC" pitchFamily="34" charset="-120"/>
+              </a:rPr>
+              <a:t>Round 4</a:t>
+            </a:r>
+            <a:endParaRPr lang="en-US" sz="600" dirty="0"/>
+          </a:p>
+        </p:txBody>
+      </p:sp>
+      <p:sp>
+        <p:nvSpPr>
+          <p:cNvPr id="33" name="Text 31"/>
+          <p:cNvSpPr/>
+          <p:nvPr/>
+        </p:nvSpPr>
+        <p:spPr>
+          <a:xfrm>
+            <a:off x="5616178" y="3971776"/>
+            <a:ext cx="959644" cy="307777"/>
+          </a:xfrm>
+          <a:prstGeom prst="roundRect">
+            <a:avLst>
+              <a:gd name="adj" fmla="val 24758"/>
+            </a:avLst>
+          </a:prstGeom>
+          <a:solidFill>
+            <a:srgbClr val="F6F2E8"/>
+          </a:solidFill>
+          <a:ln/>
+        </p:spPr>
+        <p:txBody>
+          <a:bodyPr wrap="square" rtlCol="0" anchor="ctr"/>
+          <a:lstStyle/>
+          <a:p>
+            <a:pPr indent="0" marL="0">
+              <a:buNone/>
+            </a:pPr>
+            <a:endParaRPr lang="en-US" dirty="0"/>
+          </a:p>
+        </p:txBody>
+      </p:sp>
+      <p:sp>
+        <p:nvSpPr>
+          <p:cNvPr id="34" name="Text 32"/>
+          <p:cNvSpPr/>
+          <p:nvPr/>
+        </p:nvSpPr>
+        <p:spPr>
+          <a:xfrm>
+            <a:off x="5684306" y="4073277"/>
+            <a:ext cx="823389" cy="104775"/>
+          </a:xfrm>
+          <a:prstGeom prst="rect">
+            <a:avLst/>
+          </a:prstGeom>
+          <a:noFill/>
+          <a:ln/>
+        </p:spPr>
+        <p:txBody>
+          <a:bodyPr wrap="square" lIns="0" tIns="0" rIns="0" bIns="0" rtlCol="0" anchor="t"/>
+          <a:lstStyle/>
+          <a:p>
+            <a:pPr algn="ctr" indent="0" marL="0">
+              <a:buNone/>
+            </a:pPr>
+            <a:r>
+              <a:rPr lang="en-US" sz="600" b="1" dirty="0">
+                <a:solidFill>
+                  <a:srgbClr val="3A7D8C"/>
+                </a:solidFill>
+                <a:latin typeface="Noto Sans SC" pitchFamily="34" charset="0"/>
+                <a:ea typeface="Noto Sans SC" pitchFamily="34" charset="-122"/>
+                <a:cs typeface="Noto Sans SC" pitchFamily="34" charset="-120"/>
+              </a:rPr>
+              <a:t>Round 5</a:t>
+            </a:r>
+            <a:endParaRPr lang="en-US" sz="600" dirty="0"/>
+          </a:p>
+        </p:txBody>
+      </p:sp>
+      <p:sp>
+        <p:nvSpPr>
+          <p:cNvPr id="35" name="Text 33"/>
+          <p:cNvSpPr/>
+          <p:nvPr/>
+        </p:nvSpPr>
+        <p:spPr>
+          <a:xfrm>
+            <a:off x="6652022" y="3971776"/>
+            <a:ext cx="959644" cy="307777"/>
+          </a:xfrm>
+          <a:prstGeom prst="roundRect">
+            <a:avLst>
+              <a:gd name="adj" fmla="val 24758"/>
+            </a:avLst>
+          </a:prstGeom>
+          <a:solidFill>
+            <a:srgbClr val="F6F2E8"/>
+          </a:solidFill>
+          <a:ln/>
+        </p:spPr>
+        <p:txBody>
+          <a:bodyPr wrap="square" rtlCol="0" anchor="ctr"/>
+          <a:lstStyle/>
+          <a:p>
+            <a:pPr indent="0" marL="0">
+              <a:buNone/>
+            </a:pPr>
+            <a:endParaRPr lang="en-US" dirty="0"/>
+          </a:p>
+        </p:txBody>
+      </p:sp>
+      <p:sp>
+        <p:nvSpPr>
+          <p:cNvPr id="36" name="Text 34"/>
+          <p:cNvSpPr/>
+          <p:nvPr/>
+        </p:nvSpPr>
+        <p:spPr>
+          <a:xfrm>
+            <a:off x="6720149" y="4073277"/>
+            <a:ext cx="823389" cy="104775"/>
+          </a:xfrm>
+          <a:prstGeom prst="rect">
+            <a:avLst/>
+          </a:prstGeom>
+          <a:noFill/>
+          <a:ln/>
+        </p:spPr>
+        <p:txBody>
+          <a:bodyPr wrap="square" lIns="0" tIns="0" rIns="0" bIns="0" rtlCol="0" anchor="t"/>
+          <a:lstStyle/>
+          <a:p>
+            <a:pPr algn="ctr" indent="0" marL="0">
+              <a:buNone/>
+            </a:pPr>
+            <a:r>
+              <a:rPr lang="en-US" sz="600" b="1" dirty="0">
+                <a:solidFill>
+                  <a:srgbClr val="3A7D8C"/>
+                </a:solidFill>
+                <a:latin typeface="Noto Sans SC" pitchFamily="34" charset="0"/>
+                <a:ea typeface="Noto Sans SC" pitchFamily="34" charset="-122"/>
+                <a:cs typeface="Noto Sans SC" pitchFamily="34" charset="-120"/>
+              </a:rPr>
+              <a:t>Round 6</a:t>
+            </a:r>
+            <a:endParaRPr lang="en-US" sz="600" dirty="0"/>
+          </a:p>
+        </p:txBody>
+      </p:sp>
+      <p:sp>
+        <p:nvSpPr>
+          <p:cNvPr id="37" name="Text 35"/>
+          <p:cNvSpPr/>
+          <p:nvPr/>
+        </p:nvSpPr>
+        <p:spPr>
+          <a:xfrm>
+            <a:off x="5307806" y="4381054"/>
+            <a:ext cx="1576239" cy="307777"/>
+          </a:xfrm>
+          <a:prstGeom prst="roundRect">
+            <a:avLst>
+              <a:gd name="adj" fmla="val 24758"/>
+            </a:avLst>
+          </a:prstGeom>
+          <a:solidFill>
+            <a:srgbClr val="3A7D8C">
               <a:alpha val="10000"/>
             </a:srgbClr>
           </a:solidFill>
           <a:ln w="19050">
             <a:solidFill>
-              <a:srgbClr val="D4756B"/>
+              <a:srgbClr val="3A7D8C"/>
             </a:solidFill>
           </a:ln>
         </p:spPr>
@@ -4015,14 +3313,14 @@
       </p:sp>
       <p:sp>
         <p:nvSpPr>
-          <p:cNvPr id="56" name="Text 54"/>
-          <p:cNvSpPr/>
-          <p:nvPr/>
-        </p:nvSpPr>
-        <p:spPr>
-          <a:xfrm>
-            <a:off x="4604976" y="4882604"/>
-            <a:ext cx="2981899" cy="142875"/>
+          <p:cNvPr id="38" name="Text 36"/>
+          <p:cNvSpPr/>
+          <p:nvPr/>
+        </p:nvSpPr>
+        <p:spPr>
+          <a:xfrm>
+            <a:off x="5518688" y="4463504"/>
+            <a:ext cx="1154475" cy="142875"/>
           </a:xfrm>
           <a:prstGeom prst="rect">
             <a:avLst/>
@@ -4040,13 +3338,13 @@
             <a:r>
               <a:rPr lang="en-US" sz="800" b="1" dirty="0">
                 <a:solidFill>
-                  <a:srgbClr val="D4756B"/>
-                </a:solidFill>
-                <a:latin typeface="Noto Sans SC" pitchFamily="34" charset="0"/>
-                <a:ea typeface="Noto Sans SC" pitchFamily="34" charset="-122"/>
-                <a:cs typeface="Noto Sans SC" pitchFamily="34" charset="-120"/>
-              </a:rPr>
-              <a:t>Round 3 trap: 2:30 = 两点半 (两 + 半 — two traps in one!)</a:t>
+                  <a:srgbClr val="3A7D8C"/>
+                </a:solidFill>
+                <a:latin typeface="Noto Sans SC" pitchFamily="34" charset="0"/>
+                <a:ea typeface="Noto Sans SC" pitchFamily="34" charset="-122"/>
+                <a:cs typeface="Noto Sans SC" pitchFamily="34" charset="-120"/>
+              </a:rPr>
+              <a:t>Answers on next slide</a:t>
             </a:r>
             <a:endParaRPr lang="en-US" sz="800" dirty="0"/>
           </a:p>
@@ -4054,13 +3352,13 @@
       </p:sp>
       <p:sp>
         <p:nvSpPr>
-          <p:cNvPr id="57" name="Text 55"/>
-          <p:cNvSpPr/>
-          <p:nvPr/>
-        </p:nvSpPr>
-        <p:spPr>
-          <a:xfrm>
-            <a:off x="3578757" y="5184130"/>
+          <p:cNvPr id="39" name="Text 37"/>
+          <p:cNvSpPr/>
+          <p:nvPr/>
+        </p:nvSpPr>
+        <p:spPr>
+          <a:xfrm>
+            <a:off x="3578757" y="4765030"/>
             <a:ext cx="1301877" cy="123825"/>
           </a:xfrm>
           <a:prstGeom prst="rect">
@@ -4093,13 +3391,13 @@
       </p:sp>
       <p:sp>
         <p:nvSpPr>
-          <p:cNvPr id="58" name="Text 56"/>
-          <p:cNvSpPr/>
-          <p:nvPr/>
-        </p:nvSpPr>
-        <p:spPr>
-          <a:xfrm>
-            <a:off x="5028456" y="5184130"/>
+          <p:cNvPr id="40" name="Text 38"/>
+          <p:cNvSpPr/>
+          <p:nvPr/>
+        </p:nvSpPr>
+        <p:spPr>
+          <a:xfrm>
+            <a:off x="5028456" y="4765030"/>
             <a:ext cx="1745754" cy="123825"/>
           </a:xfrm>
           <a:prstGeom prst="rect">
@@ -4132,13 +3430,13 @@
       </p:sp>
       <p:sp>
         <p:nvSpPr>
-          <p:cNvPr id="59" name="Text 57"/>
-          <p:cNvSpPr/>
-          <p:nvPr/>
-        </p:nvSpPr>
-        <p:spPr>
-          <a:xfrm>
-            <a:off x="6918140" y="5184130"/>
+          <p:cNvPr id="41" name="Text 39"/>
+          <p:cNvSpPr/>
+          <p:nvPr/>
+        </p:nvSpPr>
+        <p:spPr>
+          <a:xfrm>
+            <a:off x="6918140" y="4765030"/>
             <a:ext cx="1698846" cy="123825"/>
           </a:xfrm>
           <a:prstGeom prst="rect">
@@ -4171,7 +3469,7 @@
       </p:sp>
       <p:sp>
         <p:nvSpPr>
-          <p:cNvPr id="60" name="Shape 58"/>
+          <p:cNvPr id="42" name="Shape 40"/>
           <p:cNvSpPr/>
           <p:nvPr/>
         </p:nvSpPr>
@@ -4194,7 +3492,7 @@
       </p:sp>
       <p:sp>
         <p:nvSpPr>
-          <p:cNvPr id="61" name="Text 59"/>
+          <p:cNvPr id="43" name="Text 41"/>
           <p:cNvSpPr/>
           <p:nvPr/>
         </p:nvSpPr>
@@ -12107,6 +11405,1214 @@
         </p:nvSpPr>
         <p:spPr>
           <a:xfrm>
+            <a:off x="533400" y="1593503"/>
+            <a:ext cx="1348633" cy="142875"/>
+          </a:xfrm>
+          <a:prstGeom prst="rect">
+            <a:avLst/>
+          </a:prstGeom>
+          <a:noFill/>
+          <a:ln/>
+        </p:spPr>
+        <p:txBody>
+          <a:bodyPr wrap="square" lIns="0" tIns="0" rIns="0" bIns="0" rtlCol="0" anchor="t"/>
+          <a:lstStyle/>
+          <a:p>
+            <a:pPr algn="l" indent="0" marL="0">
+              <a:buNone/>
+            </a:pPr>
+            <a:r>
+              <a:rPr lang="en-US" sz="800" dirty="0">
+                <a:solidFill>
+                  <a:srgbClr val="1E2A38"/>
+                </a:solidFill>
+                <a:latin typeface="Noto Sans SC" pitchFamily="34" charset="0"/>
+                <a:ea typeface="Noto Sans SC" pitchFamily="34" charset="-122"/>
+                <a:cs typeface="Noto Sans SC" pitchFamily="34" charset="-120"/>
+              </a:rPr>
+              <a:t>3:00</a:t>
+            </a:r>
+            <a:endParaRPr lang="en-US" sz="800" dirty="0"/>
+          </a:p>
+        </p:txBody>
+      </p:sp>
+      <p:sp>
+        <p:nvSpPr>
+          <p:cNvPr id="11" name="Text 9"/>
+          <p:cNvSpPr/>
+          <p:nvPr/>
+        </p:nvSpPr>
+        <p:spPr>
+          <a:xfrm>
+            <a:off x="2007989" y="1603177"/>
+            <a:ext cx="234702" cy="168176"/>
+          </a:xfrm>
+          <a:prstGeom prst="roundRect">
+            <a:avLst>
+              <a:gd name="adj" fmla="val 7544061"/>
+            </a:avLst>
+          </a:prstGeom>
+          <a:solidFill>
+            <a:srgbClr val="C8943E">
+              <a:alpha val="15000"/>
+            </a:srgbClr>
+          </a:solidFill>
+          <a:ln/>
+        </p:spPr>
+        <p:txBody>
+          <a:bodyPr wrap="square" rtlCol="0" anchor="ctr"/>
+          <a:lstStyle/>
+          <a:p>
+            <a:pPr indent="0" marL="0">
+              <a:buNone/>
+            </a:pPr>
+            <a:endParaRPr lang="en-US" dirty="0"/>
+          </a:p>
+        </p:txBody>
+      </p:sp>
+      <p:sp>
+        <p:nvSpPr>
+          <p:cNvPr id="12" name="Text 10"/>
+          <p:cNvSpPr/>
+          <p:nvPr/>
+        </p:nvSpPr>
+        <p:spPr>
+          <a:xfrm>
+            <a:off x="2071390" y="1615827"/>
+            <a:ext cx="110058" cy="142875"/>
+          </a:xfrm>
+          <a:prstGeom prst="rect">
+            <a:avLst/>
+          </a:prstGeom>
+          <a:noFill/>
+          <a:ln/>
+        </p:spPr>
+        <p:txBody>
+          <a:bodyPr wrap="square" lIns="0" tIns="0" rIns="0" bIns="0" rtlCol="0" anchor="t"/>
+          <a:lstStyle/>
+          <a:p>
+            <a:pPr algn="l" indent="0" marL="0">
+              <a:buNone/>
+            </a:pPr>
+            <a:r>
+              <a:rPr lang="en-US" sz="800" b="1" dirty="0">
+                <a:solidFill>
+                  <a:srgbClr val="1E2A38"/>
+                </a:solidFill>
+                <a:latin typeface="Noto Sans SC" pitchFamily="34" charset="0"/>
+                <a:ea typeface="Noto Sans SC" pitchFamily="34" charset="-122"/>
+                <a:cs typeface="Noto Sans SC" pitchFamily="34" charset="-120"/>
+              </a:rPr>
+              <a:t>点</a:t>
+            </a:r>
+            <a:endParaRPr lang="en-US" sz="800" dirty="0"/>
+          </a:p>
+        </p:txBody>
+      </p:sp>
+      <p:sp>
+        <p:nvSpPr>
+          <p:cNvPr id="13" name="Text 11"/>
+          <p:cNvSpPr/>
+          <p:nvPr/>
+        </p:nvSpPr>
+        <p:spPr>
+          <a:xfrm>
+            <a:off x="4175820" y="1593503"/>
+            <a:ext cx="2688309" cy="142875"/>
+          </a:xfrm>
+          <a:prstGeom prst="rect">
+            <a:avLst/>
+          </a:prstGeom>
+          <a:noFill/>
+          <a:ln/>
+        </p:spPr>
+        <p:txBody>
+          <a:bodyPr wrap="square" lIns="0" tIns="0" rIns="0" bIns="0" rtlCol="0" anchor="t"/>
+          <a:lstStyle/>
+          <a:p>
+            <a:pPr algn="l" indent="0" marL="0">
+              <a:buNone/>
+            </a:pPr>
+            <a:r>
+              <a:rPr lang="en-US" sz="800" dirty="0">
+                <a:solidFill>
+                  <a:srgbClr val="1E2A38"/>
+                </a:solidFill>
+                <a:latin typeface="Noto Sans SC" pitchFamily="34" charset="0"/>
+                <a:ea typeface="Noto Sans SC" pitchFamily="34" charset="-122"/>
+                <a:cs typeface="Noto Sans SC" pitchFamily="34" charset="-120"/>
+              </a:rPr>
+              <a:t>三点</a:t>
+            </a:r>
+            <a:endParaRPr lang="en-US" sz="800" dirty="0"/>
+          </a:p>
+        </p:txBody>
+      </p:sp>
+      <p:sp>
+        <p:nvSpPr>
+          <p:cNvPr id="14" name="Text 12"/>
+          <p:cNvSpPr/>
+          <p:nvPr/>
+        </p:nvSpPr>
+        <p:spPr>
+          <a:xfrm>
+            <a:off x="533400" y="1891903"/>
+            <a:ext cx="1348633" cy="142875"/>
+          </a:xfrm>
+          <a:prstGeom prst="rect">
+            <a:avLst/>
+          </a:prstGeom>
+          <a:noFill/>
+          <a:ln/>
+        </p:spPr>
+        <p:txBody>
+          <a:bodyPr wrap="square" lIns="0" tIns="0" rIns="0" bIns="0" rtlCol="0" anchor="t"/>
+          <a:lstStyle/>
+          <a:p>
+            <a:pPr algn="l" indent="0" marL="0">
+              <a:buNone/>
+            </a:pPr>
+            <a:r>
+              <a:rPr lang="en-US" sz="800" dirty="0">
+                <a:solidFill>
+                  <a:srgbClr val="1E2A38"/>
+                </a:solidFill>
+                <a:latin typeface="Noto Sans SC" pitchFamily="34" charset="0"/>
+                <a:ea typeface="Noto Sans SC" pitchFamily="34" charset="-122"/>
+                <a:cs typeface="Noto Sans SC" pitchFamily="34" charset="-120"/>
+              </a:rPr>
+              <a:t>7:30</a:t>
+            </a:r>
+            <a:endParaRPr lang="en-US" sz="800" dirty="0"/>
+          </a:p>
+        </p:txBody>
+      </p:sp>
+      <p:sp>
+        <p:nvSpPr>
+          <p:cNvPr id="15" name="Text 13"/>
+          <p:cNvSpPr/>
+          <p:nvPr/>
+        </p:nvSpPr>
+        <p:spPr>
+          <a:xfrm>
+            <a:off x="2007989" y="1901577"/>
+            <a:ext cx="342602" cy="168176"/>
+          </a:xfrm>
+          <a:prstGeom prst="roundRect">
+            <a:avLst>
+              <a:gd name="adj" fmla="val 7544061"/>
+            </a:avLst>
+          </a:prstGeom>
+          <a:solidFill>
+            <a:srgbClr val="C8943E">
+              <a:alpha val="15000"/>
+            </a:srgbClr>
+          </a:solidFill>
+          <a:ln/>
+        </p:spPr>
+        <p:txBody>
+          <a:bodyPr wrap="square" rtlCol="0" anchor="ctr"/>
+          <a:lstStyle/>
+          <a:p>
+            <a:pPr indent="0" marL="0">
+              <a:buNone/>
+            </a:pPr>
+            <a:endParaRPr lang="en-US" dirty="0"/>
+          </a:p>
+        </p:txBody>
+      </p:sp>
+      <p:sp>
+        <p:nvSpPr>
+          <p:cNvPr id="16" name="Text 14"/>
+          <p:cNvSpPr/>
+          <p:nvPr/>
+        </p:nvSpPr>
+        <p:spPr>
+          <a:xfrm>
+            <a:off x="2071390" y="1914227"/>
+            <a:ext cx="220117" cy="142875"/>
+          </a:xfrm>
+          <a:prstGeom prst="rect">
+            <a:avLst/>
+          </a:prstGeom>
+          <a:noFill/>
+          <a:ln/>
+        </p:spPr>
+        <p:txBody>
+          <a:bodyPr wrap="square" lIns="0" tIns="0" rIns="0" bIns="0" rtlCol="0" anchor="t"/>
+          <a:lstStyle/>
+          <a:p>
+            <a:pPr algn="l" indent="0" marL="0">
+              <a:buNone/>
+            </a:pPr>
+            <a:r>
+              <a:rPr lang="en-US" sz="800" b="1" dirty="0">
+                <a:solidFill>
+                  <a:srgbClr val="1E2A38"/>
+                </a:solidFill>
+                <a:latin typeface="Noto Sans SC" pitchFamily="34" charset="0"/>
+                <a:ea typeface="Noto Sans SC" pitchFamily="34" charset="-122"/>
+                <a:cs typeface="Noto Sans SC" pitchFamily="34" charset="-120"/>
+              </a:rPr>
+              <a:t>点半</a:t>
+            </a:r>
+            <a:endParaRPr lang="en-US" sz="800" dirty="0"/>
+          </a:p>
+        </p:txBody>
+      </p:sp>
+      <p:sp>
+        <p:nvSpPr>
+          <p:cNvPr id="17" name="Text 15"/>
+          <p:cNvSpPr/>
+          <p:nvPr/>
+        </p:nvSpPr>
+        <p:spPr>
+          <a:xfrm>
+            <a:off x="4175820" y="1891903"/>
+            <a:ext cx="2688309" cy="142875"/>
+          </a:xfrm>
+          <a:prstGeom prst="rect">
+            <a:avLst/>
+          </a:prstGeom>
+          <a:noFill/>
+          <a:ln/>
+        </p:spPr>
+        <p:txBody>
+          <a:bodyPr wrap="square" lIns="0" tIns="0" rIns="0" bIns="0" rtlCol="0" anchor="t"/>
+          <a:lstStyle/>
+          <a:p>
+            <a:pPr algn="l" indent="0" marL="0">
+              <a:buNone/>
+            </a:pPr>
+            <a:r>
+              <a:rPr lang="en-US" sz="800" dirty="0">
+                <a:solidFill>
+                  <a:srgbClr val="1E2A38"/>
+                </a:solidFill>
+                <a:latin typeface="Noto Sans SC" pitchFamily="34" charset="0"/>
+                <a:ea typeface="Noto Sans SC" pitchFamily="34" charset="-122"/>
+                <a:cs typeface="Noto Sans SC" pitchFamily="34" charset="-120"/>
+              </a:rPr>
+              <a:t>七点半</a:t>
+            </a:r>
+            <a:endParaRPr lang="en-US" sz="800" dirty="0"/>
+          </a:p>
+        </p:txBody>
+      </p:sp>
+      <p:sp>
+        <p:nvSpPr>
+          <p:cNvPr id="18" name="Text 16"/>
+          <p:cNvSpPr/>
+          <p:nvPr/>
+        </p:nvSpPr>
+        <p:spPr>
+          <a:xfrm>
+            <a:off x="533400" y="2190304"/>
+            <a:ext cx="1348633" cy="142875"/>
+          </a:xfrm>
+          <a:prstGeom prst="rect">
+            <a:avLst/>
+          </a:prstGeom>
+          <a:noFill/>
+          <a:ln/>
+        </p:spPr>
+        <p:txBody>
+          <a:bodyPr wrap="square" lIns="0" tIns="0" rIns="0" bIns="0" rtlCol="0" anchor="t"/>
+          <a:lstStyle/>
+          <a:p>
+            <a:pPr algn="l" indent="0" marL="0">
+              <a:buNone/>
+            </a:pPr>
+            <a:r>
+              <a:rPr lang="en-US" sz="800" dirty="0">
+                <a:solidFill>
+                  <a:srgbClr val="1E2A38"/>
+                </a:solidFill>
+                <a:latin typeface="Noto Sans SC" pitchFamily="34" charset="0"/>
+                <a:ea typeface="Noto Sans SC" pitchFamily="34" charset="-122"/>
+                <a:cs typeface="Noto Sans SC" pitchFamily="34" charset="-120"/>
+              </a:rPr>
+              <a:t>2:15</a:t>
+            </a:r>
+            <a:endParaRPr lang="en-US" sz="800" dirty="0"/>
+          </a:p>
+        </p:txBody>
+      </p:sp>
+      <p:sp>
+        <p:nvSpPr>
+          <p:cNvPr id="19" name="Text 17"/>
+          <p:cNvSpPr/>
+          <p:nvPr/>
+        </p:nvSpPr>
+        <p:spPr>
+          <a:xfrm>
+            <a:off x="2007989" y="2199977"/>
+            <a:ext cx="342602" cy="168176"/>
+          </a:xfrm>
+          <a:prstGeom prst="roundRect">
+            <a:avLst>
+              <a:gd name="adj" fmla="val 7544061"/>
+            </a:avLst>
+          </a:prstGeom>
+          <a:solidFill>
+            <a:srgbClr val="3A7D8C">
+              <a:alpha val="15000"/>
+            </a:srgbClr>
+          </a:solidFill>
+          <a:ln/>
+        </p:spPr>
+        <p:txBody>
+          <a:bodyPr wrap="square" rtlCol="0" anchor="ctr"/>
+          <a:lstStyle/>
+          <a:p>
+            <a:pPr indent="0" marL="0">
+              <a:buNone/>
+            </a:pPr>
+            <a:endParaRPr lang="en-US" dirty="0"/>
+          </a:p>
+        </p:txBody>
+      </p:sp>
+      <p:sp>
+        <p:nvSpPr>
+          <p:cNvPr id="20" name="Text 18"/>
+          <p:cNvSpPr/>
+          <p:nvPr/>
+        </p:nvSpPr>
+        <p:spPr>
+          <a:xfrm>
+            <a:off x="2071390" y="2212628"/>
+            <a:ext cx="220117" cy="142875"/>
+          </a:xfrm>
+          <a:prstGeom prst="rect">
+            <a:avLst/>
+          </a:prstGeom>
+          <a:noFill/>
+          <a:ln/>
+        </p:spPr>
+        <p:txBody>
+          <a:bodyPr wrap="square" lIns="0" tIns="0" rIns="0" bIns="0" rtlCol="0" anchor="t"/>
+          <a:lstStyle/>
+          <a:p>
+            <a:pPr algn="l" indent="0" marL="0">
+              <a:buNone/>
+            </a:pPr>
+            <a:r>
+              <a:rPr lang="en-US" sz="800" b="1" dirty="0">
+                <a:solidFill>
+                  <a:srgbClr val="1E2A38"/>
+                </a:solidFill>
+                <a:latin typeface="Noto Sans SC" pitchFamily="34" charset="0"/>
+                <a:ea typeface="Noto Sans SC" pitchFamily="34" charset="-122"/>
+                <a:cs typeface="Noto Sans SC" pitchFamily="34" charset="-120"/>
+              </a:rPr>
+              <a:t>点分</a:t>
+            </a:r>
+            <a:endParaRPr lang="en-US" sz="800" dirty="0"/>
+          </a:p>
+        </p:txBody>
+      </p:sp>
+      <p:sp>
+        <p:nvSpPr>
+          <p:cNvPr id="21" name="Text 19"/>
+          <p:cNvSpPr/>
+          <p:nvPr/>
+        </p:nvSpPr>
+        <p:spPr>
+          <a:xfrm>
+            <a:off x="4175820" y="2190304"/>
+            <a:ext cx="2688309" cy="142875"/>
+          </a:xfrm>
+          <a:prstGeom prst="rect">
+            <a:avLst/>
+          </a:prstGeom>
+          <a:noFill/>
+          <a:ln/>
+        </p:spPr>
+        <p:txBody>
+          <a:bodyPr wrap="square" lIns="0" tIns="0" rIns="0" bIns="0" rtlCol="0" anchor="t"/>
+          <a:lstStyle/>
+          <a:p>
+            <a:pPr algn="l" indent="0" marL="0">
+              <a:buNone/>
+            </a:pPr>
+            <a:r>
+              <a:rPr lang="en-US" sz="800" dirty="0">
+                <a:solidFill>
+                  <a:srgbClr val="1E2A38"/>
+                </a:solidFill>
+                <a:latin typeface="Noto Sans SC" pitchFamily="34" charset="0"/>
+                <a:ea typeface="Noto Sans SC" pitchFamily="34" charset="-122"/>
+                <a:cs typeface="Noto Sans SC" pitchFamily="34" charset="-120"/>
+              </a:rPr>
+              <a:t>两点十五分</a:t>
+            </a:r>
+            <a:endParaRPr lang="en-US" sz="800" dirty="0"/>
+          </a:p>
+        </p:txBody>
+      </p:sp>
+      <p:sp>
+        <p:nvSpPr>
+          <p:cNvPr id="22" name="Text 20"/>
+          <p:cNvSpPr/>
+          <p:nvPr/>
+        </p:nvSpPr>
+        <p:spPr>
+          <a:xfrm>
+            <a:off x="533400" y="2488704"/>
+            <a:ext cx="1348633" cy="142875"/>
+          </a:xfrm>
+          <a:prstGeom prst="rect">
+            <a:avLst/>
+          </a:prstGeom>
+          <a:noFill/>
+          <a:ln/>
+        </p:spPr>
+        <p:txBody>
+          <a:bodyPr wrap="square" lIns="0" tIns="0" rIns="0" bIns="0" rtlCol="0" anchor="t"/>
+          <a:lstStyle/>
+          <a:p>
+            <a:pPr algn="l" indent="0" marL="0">
+              <a:buNone/>
+            </a:pPr>
+            <a:r>
+              <a:rPr lang="en-US" sz="800" dirty="0">
+                <a:solidFill>
+                  <a:srgbClr val="1E2A38"/>
+                </a:solidFill>
+                <a:latin typeface="Noto Sans SC" pitchFamily="34" charset="0"/>
+                <a:ea typeface="Noto Sans SC" pitchFamily="34" charset="-122"/>
+                <a:cs typeface="Noto Sans SC" pitchFamily="34" charset="-120"/>
+              </a:rPr>
+              <a:t>8:30</a:t>
+            </a:r>
+            <a:endParaRPr lang="en-US" sz="800" dirty="0"/>
+          </a:p>
+        </p:txBody>
+      </p:sp>
+      <p:sp>
+        <p:nvSpPr>
+          <p:cNvPr id="23" name="Text 21"/>
+          <p:cNvSpPr/>
+          <p:nvPr/>
+        </p:nvSpPr>
+        <p:spPr>
+          <a:xfrm>
+            <a:off x="2007989" y="2498378"/>
+            <a:ext cx="342602" cy="168176"/>
+          </a:xfrm>
+          <a:prstGeom prst="roundRect">
+            <a:avLst>
+              <a:gd name="adj" fmla="val 7544061"/>
+            </a:avLst>
+          </a:prstGeom>
+          <a:solidFill>
+            <a:srgbClr val="C8943E">
+              <a:alpha val="15000"/>
+            </a:srgbClr>
+          </a:solidFill>
+          <a:ln/>
+        </p:spPr>
+        <p:txBody>
+          <a:bodyPr wrap="square" rtlCol="0" anchor="ctr"/>
+          <a:lstStyle/>
+          <a:p>
+            <a:pPr indent="0" marL="0">
+              <a:buNone/>
+            </a:pPr>
+            <a:endParaRPr lang="en-US" dirty="0"/>
+          </a:p>
+        </p:txBody>
+      </p:sp>
+      <p:sp>
+        <p:nvSpPr>
+          <p:cNvPr id="24" name="Text 22"/>
+          <p:cNvSpPr/>
+          <p:nvPr/>
+        </p:nvSpPr>
+        <p:spPr>
+          <a:xfrm>
+            <a:off x="2071390" y="2511028"/>
+            <a:ext cx="220117" cy="142875"/>
+          </a:xfrm>
+          <a:prstGeom prst="rect">
+            <a:avLst/>
+          </a:prstGeom>
+          <a:noFill/>
+          <a:ln/>
+        </p:spPr>
+        <p:txBody>
+          <a:bodyPr wrap="square" lIns="0" tIns="0" rIns="0" bIns="0" rtlCol="0" anchor="t"/>
+          <a:lstStyle/>
+          <a:p>
+            <a:pPr algn="l" indent="0" marL="0">
+              <a:buNone/>
+            </a:pPr>
+            <a:r>
+              <a:rPr lang="en-US" sz="800" b="1" dirty="0">
+                <a:solidFill>
+                  <a:srgbClr val="1E2A38"/>
+                </a:solidFill>
+                <a:latin typeface="Noto Sans SC" pitchFamily="34" charset="0"/>
+                <a:ea typeface="Noto Sans SC" pitchFamily="34" charset="-122"/>
+                <a:cs typeface="Noto Sans SC" pitchFamily="34" charset="-120"/>
+              </a:rPr>
+              <a:t>点半</a:t>
+            </a:r>
+            <a:endParaRPr lang="en-US" sz="800" dirty="0"/>
+          </a:p>
+        </p:txBody>
+      </p:sp>
+      <p:sp>
+        <p:nvSpPr>
+          <p:cNvPr id="25" name="Text 23"/>
+          <p:cNvSpPr/>
+          <p:nvPr/>
+        </p:nvSpPr>
+        <p:spPr>
+          <a:xfrm>
+            <a:off x="4175820" y="2488704"/>
+            <a:ext cx="2688309" cy="142875"/>
+          </a:xfrm>
+          <a:prstGeom prst="rect">
+            <a:avLst/>
+          </a:prstGeom>
+          <a:noFill/>
+          <a:ln/>
+        </p:spPr>
+        <p:txBody>
+          <a:bodyPr wrap="square" lIns="0" tIns="0" rIns="0" bIns="0" rtlCol="0" anchor="t"/>
+          <a:lstStyle/>
+          <a:p>
+            <a:pPr algn="l" indent="0" marL="0">
+              <a:buNone/>
+            </a:pPr>
+            <a:r>
+              <a:rPr lang="en-US" sz="800" dirty="0">
+                <a:solidFill>
+                  <a:srgbClr val="1E2A38"/>
+                </a:solidFill>
+                <a:latin typeface="Noto Sans SC" pitchFamily="34" charset="0"/>
+                <a:ea typeface="Noto Sans SC" pitchFamily="34" charset="-122"/>
+                <a:cs typeface="Noto Sans SC" pitchFamily="34" charset="-120"/>
+              </a:rPr>
+              <a:t>八点半</a:t>
+            </a:r>
+            <a:endParaRPr lang="en-US" sz="800" dirty="0"/>
+          </a:p>
+        </p:txBody>
+      </p:sp>
+      <p:sp>
+        <p:nvSpPr>
+          <p:cNvPr id="26" name="Text 24"/>
+          <p:cNvSpPr/>
+          <p:nvPr/>
+        </p:nvSpPr>
+        <p:spPr>
+          <a:xfrm>
+            <a:off x="533400" y="2787104"/>
+            <a:ext cx="1348633" cy="142875"/>
+          </a:xfrm>
+          <a:prstGeom prst="rect">
+            <a:avLst/>
+          </a:prstGeom>
+          <a:noFill/>
+          <a:ln/>
+        </p:spPr>
+        <p:txBody>
+          <a:bodyPr wrap="square" lIns="0" tIns="0" rIns="0" bIns="0" rtlCol="0" anchor="t"/>
+          <a:lstStyle/>
+          <a:p>
+            <a:pPr algn="l" indent="0" marL="0">
+              <a:buNone/>
+            </a:pPr>
+            <a:r>
+              <a:rPr lang="en-US" sz="800" dirty="0">
+                <a:solidFill>
+                  <a:srgbClr val="1E2A38"/>
+                </a:solidFill>
+                <a:latin typeface="Noto Sans SC" pitchFamily="34" charset="0"/>
+                <a:ea typeface="Noto Sans SC" pitchFamily="34" charset="-122"/>
+                <a:cs typeface="Noto Sans SC" pitchFamily="34" charset="-120"/>
+              </a:rPr>
+              <a:t>10:05</a:t>
+            </a:r>
+            <a:endParaRPr lang="en-US" sz="800" dirty="0"/>
+          </a:p>
+        </p:txBody>
+      </p:sp>
+      <p:sp>
+        <p:nvSpPr>
+          <p:cNvPr id="27" name="Text 25"/>
+          <p:cNvSpPr/>
+          <p:nvPr/>
+        </p:nvSpPr>
+        <p:spPr>
+          <a:xfrm>
+            <a:off x="2007989" y="2796778"/>
+            <a:ext cx="450354" cy="168176"/>
+          </a:xfrm>
+          <a:prstGeom prst="roundRect">
+            <a:avLst>
+              <a:gd name="adj" fmla="val 7544061"/>
+            </a:avLst>
+          </a:prstGeom>
+          <a:solidFill>
+            <a:srgbClr val="D4756B">
+              <a:alpha val="15000"/>
+            </a:srgbClr>
+          </a:solidFill>
+          <a:ln/>
+        </p:spPr>
+        <p:txBody>
+          <a:bodyPr wrap="square" rtlCol="0" anchor="ctr"/>
+          <a:lstStyle/>
+          <a:p>
+            <a:pPr indent="0" marL="0">
+              <a:buNone/>
+            </a:pPr>
+            <a:endParaRPr lang="en-US" dirty="0"/>
+          </a:p>
+        </p:txBody>
+      </p:sp>
+      <p:sp>
+        <p:nvSpPr>
+          <p:cNvPr id="28" name="Text 26"/>
+          <p:cNvSpPr/>
+          <p:nvPr/>
+        </p:nvSpPr>
+        <p:spPr>
+          <a:xfrm>
+            <a:off x="2071390" y="2809429"/>
+            <a:ext cx="330023" cy="142875"/>
+          </a:xfrm>
+          <a:prstGeom prst="rect">
+            <a:avLst/>
+          </a:prstGeom>
+          <a:noFill/>
+          <a:ln/>
+        </p:spPr>
+        <p:txBody>
+          <a:bodyPr wrap="square" lIns="0" tIns="0" rIns="0" bIns="0" rtlCol="0" anchor="t"/>
+          <a:lstStyle/>
+          <a:p>
+            <a:pPr algn="l" indent="0" marL="0">
+              <a:buNone/>
+            </a:pPr>
+            <a:r>
+              <a:rPr lang="en-US" sz="800" b="1" dirty="0">
+                <a:solidFill>
+                  <a:srgbClr val="1E2A38"/>
+                </a:solidFill>
+                <a:latin typeface="Noto Sans SC" pitchFamily="34" charset="0"/>
+                <a:ea typeface="Noto Sans SC" pitchFamily="34" charset="-122"/>
+                <a:cs typeface="Noto Sans SC" pitchFamily="34" charset="-120"/>
+              </a:rPr>
+              <a:t>点零分</a:t>
+            </a:r>
+            <a:endParaRPr lang="en-US" sz="800" dirty="0"/>
+          </a:p>
+        </p:txBody>
+      </p:sp>
+      <p:sp>
+        <p:nvSpPr>
+          <p:cNvPr id="29" name="Text 27"/>
+          <p:cNvSpPr/>
+          <p:nvPr/>
+        </p:nvSpPr>
+        <p:spPr>
+          <a:xfrm>
+            <a:off x="4175820" y="2787104"/>
+            <a:ext cx="2688309" cy="142875"/>
+          </a:xfrm>
+          <a:prstGeom prst="rect">
+            <a:avLst/>
+          </a:prstGeom>
+          <a:noFill/>
+          <a:ln/>
+        </p:spPr>
+        <p:txBody>
+          <a:bodyPr wrap="square" lIns="0" tIns="0" rIns="0" bIns="0" rtlCol="0" anchor="t"/>
+          <a:lstStyle/>
+          <a:p>
+            <a:pPr algn="l" indent="0" marL="0">
+              <a:buNone/>
+            </a:pPr>
+            <a:r>
+              <a:rPr lang="en-US" sz="800" dirty="0">
+                <a:solidFill>
+                  <a:srgbClr val="1E2A38"/>
+                </a:solidFill>
+                <a:latin typeface="Noto Sans SC" pitchFamily="34" charset="0"/>
+                <a:ea typeface="Noto Sans SC" pitchFamily="34" charset="-122"/>
+                <a:cs typeface="Noto Sans SC" pitchFamily="34" charset="-120"/>
+              </a:rPr>
+              <a:t>十点零五分</a:t>
+            </a:r>
+            <a:endParaRPr lang="en-US" sz="800" dirty="0"/>
+          </a:p>
+        </p:txBody>
+      </p:sp>
+      <p:sp>
+        <p:nvSpPr>
+          <p:cNvPr id="30" name="Text 28"/>
+          <p:cNvSpPr/>
+          <p:nvPr/>
+        </p:nvSpPr>
+        <p:spPr>
+          <a:xfrm>
+            <a:off x="533400" y="3085505"/>
+            <a:ext cx="1348633" cy="142875"/>
+          </a:xfrm>
+          <a:prstGeom prst="rect">
+            <a:avLst/>
+          </a:prstGeom>
+          <a:noFill/>
+          <a:ln/>
+        </p:spPr>
+        <p:txBody>
+          <a:bodyPr wrap="square" lIns="0" tIns="0" rIns="0" bIns="0" rtlCol="0" anchor="t"/>
+          <a:lstStyle/>
+          <a:p>
+            <a:pPr algn="l" indent="0" marL="0">
+              <a:buNone/>
+            </a:pPr>
+            <a:r>
+              <a:rPr lang="en-US" sz="800" dirty="0">
+                <a:solidFill>
+                  <a:srgbClr val="1E2A38"/>
+                </a:solidFill>
+                <a:latin typeface="Noto Sans SC" pitchFamily="34" charset="0"/>
+                <a:ea typeface="Noto Sans SC" pitchFamily="34" charset="-122"/>
+                <a:cs typeface="Noto Sans SC" pitchFamily="34" charset="-120"/>
+              </a:rPr>
+              <a:t>12:00</a:t>
+            </a:r>
+            <a:endParaRPr lang="en-US" sz="800" dirty="0"/>
+          </a:p>
+        </p:txBody>
+      </p:sp>
+      <p:sp>
+        <p:nvSpPr>
+          <p:cNvPr id="31" name="Text 29"/>
+          <p:cNvSpPr/>
+          <p:nvPr/>
+        </p:nvSpPr>
+        <p:spPr>
+          <a:xfrm>
+            <a:off x="2007989" y="3095179"/>
+            <a:ext cx="234702" cy="168176"/>
+          </a:xfrm>
+          <a:prstGeom prst="roundRect">
+            <a:avLst>
+              <a:gd name="adj" fmla="val 7544061"/>
+            </a:avLst>
+          </a:prstGeom>
+          <a:solidFill>
+            <a:srgbClr val="C8943E">
+              <a:alpha val="15000"/>
+            </a:srgbClr>
+          </a:solidFill>
+          <a:ln/>
+        </p:spPr>
+        <p:txBody>
+          <a:bodyPr wrap="square" rtlCol="0" anchor="ctr"/>
+          <a:lstStyle/>
+          <a:p>
+            <a:pPr indent="0" marL="0">
+              <a:buNone/>
+            </a:pPr>
+            <a:endParaRPr lang="en-US" dirty="0"/>
+          </a:p>
+        </p:txBody>
+      </p:sp>
+      <p:sp>
+        <p:nvSpPr>
+          <p:cNvPr id="32" name="Text 30"/>
+          <p:cNvSpPr/>
+          <p:nvPr/>
+        </p:nvSpPr>
+        <p:spPr>
+          <a:xfrm>
+            <a:off x="2071390" y="3107829"/>
+            <a:ext cx="110058" cy="142875"/>
+          </a:xfrm>
+          <a:prstGeom prst="rect">
+            <a:avLst/>
+          </a:prstGeom>
+          <a:noFill/>
+          <a:ln/>
+        </p:spPr>
+        <p:txBody>
+          <a:bodyPr wrap="square" lIns="0" tIns="0" rIns="0" bIns="0" rtlCol="0" anchor="t"/>
+          <a:lstStyle/>
+          <a:p>
+            <a:pPr algn="l" indent="0" marL="0">
+              <a:buNone/>
+            </a:pPr>
+            <a:r>
+              <a:rPr lang="en-US" sz="800" b="1" dirty="0">
+                <a:solidFill>
+                  <a:srgbClr val="1E2A38"/>
+                </a:solidFill>
+                <a:latin typeface="Noto Sans SC" pitchFamily="34" charset="0"/>
+                <a:ea typeface="Noto Sans SC" pitchFamily="34" charset="-122"/>
+                <a:cs typeface="Noto Sans SC" pitchFamily="34" charset="-120"/>
+              </a:rPr>
+              <a:t>点</a:t>
+            </a:r>
+            <a:endParaRPr lang="en-US" sz="800" dirty="0"/>
+          </a:p>
+        </p:txBody>
+      </p:sp>
+      <p:sp>
+        <p:nvSpPr>
+          <p:cNvPr id="33" name="Text 31"/>
+          <p:cNvSpPr/>
+          <p:nvPr/>
+        </p:nvSpPr>
+        <p:spPr>
+          <a:xfrm>
+            <a:off x="4175820" y="3085505"/>
+            <a:ext cx="2688309" cy="142875"/>
+          </a:xfrm>
+          <a:prstGeom prst="rect">
+            <a:avLst/>
+          </a:prstGeom>
+          <a:noFill/>
+          <a:ln/>
+        </p:spPr>
+        <p:txBody>
+          <a:bodyPr wrap="square" lIns="0" tIns="0" rIns="0" bIns="0" rtlCol="0" anchor="t"/>
+          <a:lstStyle/>
+          <a:p>
+            <a:pPr algn="l" indent="0" marL="0">
+              <a:buNone/>
+            </a:pPr>
+            <a:r>
+              <a:rPr lang="en-US" sz="800" dirty="0">
+                <a:solidFill>
+                  <a:srgbClr val="1E2A38"/>
+                </a:solidFill>
+                <a:latin typeface="Noto Sans SC" pitchFamily="34" charset="0"/>
+                <a:ea typeface="Noto Sans SC" pitchFamily="34" charset="-122"/>
+                <a:cs typeface="Noto Sans SC" pitchFamily="34" charset="-120"/>
+              </a:rPr>
+              <a:t>十二点</a:t>
+            </a:r>
+            <a:endParaRPr lang="en-US" sz="800" dirty="0"/>
+          </a:p>
+        </p:txBody>
+      </p:sp>
+      <p:sp>
+        <p:nvSpPr>
+          <p:cNvPr id="34" name="Text 32"/>
+          <p:cNvSpPr/>
+          <p:nvPr/>
+        </p:nvSpPr>
+        <p:spPr>
+          <a:xfrm>
+            <a:off x="533400" y="3383905"/>
+            <a:ext cx="1348633" cy="142875"/>
+          </a:xfrm>
+          <a:prstGeom prst="rect">
+            <a:avLst/>
+          </a:prstGeom>
+          <a:noFill/>
+          <a:ln/>
+        </p:spPr>
+        <p:txBody>
+          <a:bodyPr wrap="square" lIns="0" tIns="0" rIns="0" bIns="0" rtlCol="0" anchor="t"/>
+          <a:lstStyle/>
+          <a:p>
+            <a:pPr algn="l" indent="0" marL="0">
+              <a:buNone/>
+            </a:pPr>
+            <a:r>
+              <a:rPr lang="en-US" sz="800" dirty="0">
+                <a:solidFill>
+                  <a:srgbClr val="1E2A38"/>
+                </a:solidFill>
+                <a:latin typeface="Noto Sans SC" pitchFamily="34" charset="0"/>
+                <a:ea typeface="Noto Sans SC" pitchFamily="34" charset="-122"/>
+                <a:cs typeface="Noto Sans SC" pitchFamily="34" charset="-120"/>
+              </a:rPr>
+              <a:t>5:30</a:t>
+            </a:r>
+            <a:endParaRPr lang="en-US" sz="800" dirty="0"/>
+          </a:p>
+        </p:txBody>
+      </p:sp>
+      <p:sp>
+        <p:nvSpPr>
+          <p:cNvPr id="35" name="Text 33"/>
+          <p:cNvSpPr/>
+          <p:nvPr/>
+        </p:nvSpPr>
+        <p:spPr>
+          <a:xfrm>
+            <a:off x="2007989" y="3393579"/>
+            <a:ext cx="342602" cy="168176"/>
+          </a:xfrm>
+          <a:prstGeom prst="roundRect">
+            <a:avLst>
+              <a:gd name="adj" fmla="val 7544061"/>
+            </a:avLst>
+          </a:prstGeom>
+          <a:solidFill>
+            <a:srgbClr val="C8943E">
+              <a:alpha val="15000"/>
+            </a:srgbClr>
+          </a:solidFill>
+          <a:ln/>
+        </p:spPr>
+        <p:txBody>
+          <a:bodyPr wrap="square" rtlCol="0" anchor="ctr"/>
+          <a:lstStyle/>
+          <a:p>
+            <a:pPr indent="0" marL="0">
+              <a:buNone/>
+            </a:pPr>
+            <a:endParaRPr lang="en-US" dirty="0"/>
+          </a:p>
+        </p:txBody>
+      </p:sp>
+      <p:sp>
+        <p:nvSpPr>
+          <p:cNvPr id="36" name="Text 34"/>
+          <p:cNvSpPr/>
+          <p:nvPr/>
+        </p:nvSpPr>
+        <p:spPr>
+          <a:xfrm>
+            <a:off x="2071390" y="3406229"/>
+            <a:ext cx="220117" cy="142875"/>
+          </a:xfrm>
+          <a:prstGeom prst="rect">
+            <a:avLst/>
+          </a:prstGeom>
+          <a:noFill/>
+          <a:ln/>
+        </p:spPr>
+        <p:txBody>
+          <a:bodyPr wrap="square" lIns="0" tIns="0" rIns="0" bIns="0" rtlCol="0" anchor="t"/>
+          <a:lstStyle/>
+          <a:p>
+            <a:pPr algn="l" indent="0" marL="0">
+              <a:buNone/>
+            </a:pPr>
+            <a:r>
+              <a:rPr lang="en-US" sz="800" b="1" dirty="0">
+                <a:solidFill>
+                  <a:srgbClr val="1E2A38"/>
+                </a:solidFill>
+                <a:latin typeface="Noto Sans SC" pitchFamily="34" charset="0"/>
+                <a:ea typeface="Noto Sans SC" pitchFamily="34" charset="-122"/>
+                <a:cs typeface="Noto Sans SC" pitchFamily="34" charset="-120"/>
+              </a:rPr>
+              <a:t>点半</a:t>
+            </a:r>
+            <a:endParaRPr lang="en-US" sz="800" dirty="0"/>
+          </a:p>
+        </p:txBody>
+      </p:sp>
+      <p:sp>
+        <p:nvSpPr>
+          <p:cNvPr id="37" name="Text 35"/>
+          <p:cNvSpPr/>
+          <p:nvPr/>
+        </p:nvSpPr>
+        <p:spPr>
+          <a:xfrm>
+            <a:off x="4175820" y="3383905"/>
+            <a:ext cx="2688309" cy="142875"/>
+          </a:xfrm>
+          <a:prstGeom prst="rect">
+            <a:avLst/>
+          </a:prstGeom>
+          <a:noFill/>
+          <a:ln/>
+        </p:spPr>
+        <p:txBody>
+          <a:bodyPr wrap="square" lIns="0" tIns="0" rIns="0" bIns="0" rtlCol="0" anchor="t"/>
+          <a:lstStyle/>
+          <a:p>
+            <a:pPr algn="l" indent="0" marL="0">
+              <a:buNone/>
+            </a:pPr>
+            <a:r>
+              <a:rPr lang="en-US" sz="800" dirty="0">
+                <a:solidFill>
+                  <a:srgbClr val="1E2A38"/>
+                </a:solidFill>
+                <a:latin typeface="Noto Sans SC" pitchFamily="34" charset="0"/>
+                <a:ea typeface="Noto Sans SC" pitchFamily="34" charset="-122"/>
+                <a:cs typeface="Noto Sans SC" pitchFamily="34" charset="-120"/>
+              </a:rPr>
+              <a:t>五点半</a:t>
+            </a:r>
+            <a:endParaRPr lang="en-US" sz="800" dirty="0"/>
+          </a:p>
+        </p:txBody>
+      </p:sp>
+      <p:sp>
+        <p:nvSpPr>
+          <p:cNvPr id="38" name="Text 36"/>
+          <p:cNvSpPr/>
+          <p:nvPr/>
+        </p:nvSpPr>
+        <p:spPr>
+          <a:xfrm>
+            <a:off x="533400" y="3682305"/>
+            <a:ext cx="1348633" cy="142875"/>
+          </a:xfrm>
+          <a:prstGeom prst="rect">
+            <a:avLst/>
+          </a:prstGeom>
+          <a:noFill/>
+          <a:ln/>
+        </p:spPr>
+        <p:txBody>
+          <a:bodyPr wrap="square" lIns="0" tIns="0" rIns="0" bIns="0" rtlCol="0" anchor="t"/>
+          <a:lstStyle/>
+          <a:p>
+            <a:pPr algn="l" indent="0" marL="0">
+              <a:buNone/>
+            </a:pPr>
+            <a:r>
+              <a:rPr lang="en-US" sz="800" dirty="0">
+                <a:solidFill>
+                  <a:srgbClr val="1E2A38"/>
+                </a:solidFill>
+                <a:latin typeface="Noto Sans SC" pitchFamily="34" charset="0"/>
+                <a:ea typeface="Noto Sans SC" pitchFamily="34" charset="-122"/>
+                <a:cs typeface="Noto Sans SC" pitchFamily="34" charset="-120"/>
+              </a:rPr>
+              <a:t>1:45</a:t>
+            </a:r>
+            <a:endParaRPr lang="en-US" sz="800" dirty="0"/>
+          </a:p>
+        </p:txBody>
+      </p:sp>
+      <p:sp>
+        <p:nvSpPr>
+          <p:cNvPr id="39" name="Text 37"/>
+          <p:cNvSpPr/>
+          <p:nvPr/>
+        </p:nvSpPr>
+        <p:spPr>
+          <a:xfrm>
+            <a:off x="2007989" y="3691979"/>
+            <a:ext cx="342602" cy="168176"/>
+          </a:xfrm>
+          <a:prstGeom prst="roundRect">
+            <a:avLst>
+              <a:gd name="adj" fmla="val 7544061"/>
+            </a:avLst>
+          </a:prstGeom>
+          <a:solidFill>
+            <a:srgbClr val="3A7D8C">
+              <a:alpha val="15000"/>
+            </a:srgbClr>
+          </a:solidFill>
+          <a:ln/>
+        </p:spPr>
+        <p:txBody>
+          <a:bodyPr wrap="square" rtlCol="0" anchor="ctr"/>
+          <a:lstStyle/>
+          <a:p>
+            <a:pPr indent="0" marL="0">
+              <a:buNone/>
+            </a:pPr>
+            <a:endParaRPr lang="en-US" dirty="0"/>
+          </a:p>
+        </p:txBody>
+      </p:sp>
+      <p:sp>
+        <p:nvSpPr>
+          <p:cNvPr id="40" name="Text 38"/>
+          <p:cNvSpPr/>
+          <p:nvPr/>
+        </p:nvSpPr>
+        <p:spPr>
+          <a:xfrm>
+            <a:off x="2071390" y="3704630"/>
+            <a:ext cx="220117" cy="142875"/>
+          </a:xfrm>
+          <a:prstGeom prst="rect">
+            <a:avLst/>
+          </a:prstGeom>
+          <a:noFill/>
+          <a:ln/>
+        </p:spPr>
+        <p:txBody>
+          <a:bodyPr wrap="square" lIns="0" tIns="0" rIns="0" bIns="0" rtlCol="0" anchor="t"/>
+          <a:lstStyle/>
+          <a:p>
+            <a:pPr algn="l" indent="0" marL="0">
+              <a:buNone/>
+            </a:pPr>
+            <a:r>
+              <a:rPr lang="en-US" sz="800" b="1" dirty="0">
+                <a:solidFill>
+                  <a:srgbClr val="1E2A38"/>
+                </a:solidFill>
+                <a:latin typeface="Noto Sans SC" pitchFamily="34" charset="0"/>
+                <a:ea typeface="Noto Sans SC" pitchFamily="34" charset="-122"/>
+                <a:cs typeface="Noto Sans SC" pitchFamily="34" charset="-120"/>
+              </a:rPr>
+              <a:t>点分</a:t>
+            </a:r>
+            <a:endParaRPr lang="en-US" sz="800" dirty="0"/>
+          </a:p>
+        </p:txBody>
+      </p:sp>
+      <p:sp>
+        <p:nvSpPr>
+          <p:cNvPr id="41" name="Text 39"/>
+          <p:cNvSpPr/>
+          <p:nvPr/>
+        </p:nvSpPr>
+        <p:spPr>
+          <a:xfrm>
+            <a:off x="4175820" y="3682305"/>
+            <a:ext cx="2688309" cy="142875"/>
+          </a:xfrm>
+          <a:prstGeom prst="rect">
+            <a:avLst/>
+          </a:prstGeom>
+          <a:noFill/>
+          <a:ln/>
+        </p:spPr>
+        <p:txBody>
+          <a:bodyPr wrap="square" lIns="0" tIns="0" rIns="0" bIns="0" rtlCol="0" anchor="t"/>
+          <a:lstStyle/>
+          <a:p>
+            <a:pPr algn="l" indent="0" marL="0">
+              <a:buNone/>
+            </a:pPr>
+            <a:r>
+              <a:rPr lang="en-US" sz="800" dirty="0">
+                <a:solidFill>
+                  <a:srgbClr val="1E2A38"/>
+                </a:solidFill>
+                <a:latin typeface="Noto Sans SC" pitchFamily="34" charset="0"/>
+                <a:ea typeface="Noto Sans SC" pitchFamily="34" charset="-122"/>
+                <a:cs typeface="Noto Sans SC" pitchFamily="34" charset="-120"/>
+              </a:rPr>
+              <a:t>一点四十五分</a:t>
+            </a:r>
+            <a:endParaRPr lang="en-US" sz="800" dirty="0"/>
+          </a:p>
+        </p:txBody>
+      </p:sp>
+      <p:sp>
+        <p:nvSpPr>
+          <p:cNvPr id="42" name="Text 40"/>
+          <p:cNvSpPr/>
+          <p:nvPr/>
+        </p:nvSpPr>
+        <p:spPr>
+          <a:xfrm>
             <a:off x="7141518" y="584150"/>
             <a:ext cx="4685148" cy="123825"/>
           </a:xfrm>
@@ -12140,7 +12646,7 @@
       </p:sp>
       <p:sp>
         <p:nvSpPr>
-          <p:cNvPr id="11" name="Text 9"/>
+          <p:cNvPr id="43" name="Text 41"/>
           <p:cNvSpPr/>
           <p:nvPr/>
         </p:nvSpPr>
@@ -12172,7 +12678,7 @@
       </p:sp>
       <p:sp>
         <p:nvSpPr>
-          <p:cNvPr id="12" name="Text 10"/>
+          <p:cNvPr id="44" name="Text 42"/>
           <p:cNvSpPr/>
           <p:nvPr/>
         </p:nvSpPr>
@@ -12213,7 +12719,7 @@
       </p:sp>
       <p:sp>
         <p:nvSpPr>
-          <p:cNvPr id="13" name="Text 11"/>
+          <p:cNvPr id="45" name="Text 43"/>
           <p:cNvSpPr/>
           <p:nvPr/>
         </p:nvSpPr>
@@ -12252,7 +12758,7 @@
       </p:sp>
       <p:sp>
         <p:nvSpPr>
-          <p:cNvPr id="14" name="Text 12"/>
+          <p:cNvPr id="46" name="Text 44"/>
           <p:cNvSpPr/>
           <p:nvPr/>
         </p:nvSpPr>
@@ -12291,7 +12797,7 @@
       </p:sp>
       <p:sp>
         <p:nvSpPr>
-          <p:cNvPr id="15" name="Text 13"/>
+          <p:cNvPr id="47" name="Text 45"/>
           <p:cNvSpPr/>
           <p:nvPr/>
         </p:nvSpPr>
@@ -12323,7 +12829,7 @@
       </p:sp>
       <p:sp>
         <p:nvSpPr>
-          <p:cNvPr id="16" name="Text 14"/>
+          <p:cNvPr id="48" name="Text 46"/>
           <p:cNvSpPr/>
           <p:nvPr/>
         </p:nvSpPr>
@@ -12364,7 +12870,7 @@
       </p:sp>
       <p:sp>
         <p:nvSpPr>
-          <p:cNvPr id="17" name="Text 15"/>
+          <p:cNvPr id="49" name="Text 47"/>
           <p:cNvSpPr/>
           <p:nvPr/>
         </p:nvSpPr>
@@ -12403,7 +12909,7 @@
       </p:sp>
       <p:sp>
         <p:nvSpPr>
-          <p:cNvPr id="18" name="Text 16"/>
+          <p:cNvPr id="50" name="Text 48"/>
           <p:cNvSpPr/>
           <p:nvPr/>
         </p:nvSpPr>
@@ -12442,7 +12948,7 @@
       </p:sp>
       <p:sp>
         <p:nvSpPr>
-          <p:cNvPr id="19" name="Text 17"/>
+          <p:cNvPr id="51" name="Text 49"/>
           <p:cNvSpPr/>
           <p:nvPr/>
         </p:nvSpPr>
@@ -12474,7 +12980,7 @@
       </p:sp>
       <p:sp>
         <p:nvSpPr>
-          <p:cNvPr id="20" name="Text 18"/>
+          <p:cNvPr id="52" name="Text 50"/>
           <p:cNvSpPr/>
           <p:nvPr/>
         </p:nvSpPr>
@@ -12515,7 +13021,7 @@
       </p:sp>
       <p:sp>
         <p:nvSpPr>
-          <p:cNvPr id="21" name="Text 19"/>
+          <p:cNvPr id="53" name="Text 51"/>
           <p:cNvSpPr/>
           <p:nvPr/>
         </p:nvSpPr>
@@ -12554,7 +13060,7 @@
       </p:sp>
       <p:sp>
         <p:nvSpPr>
-          <p:cNvPr id="22" name="Text 20"/>
+          <p:cNvPr id="54" name="Text 52"/>
           <p:cNvSpPr/>
           <p:nvPr/>
         </p:nvSpPr>
@@ -12593,7 +13099,7 @@
       </p:sp>
       <p:sp>
         <p:nvSpPr>
-          <p:cNvPr id="23" name="Text 21"/>
+          <p:cNvPr id="55" name="Text 53"/>
           <p:cNvSpPr/>
           <p:nvPr/>
         </p:nvSpPr>
@@ -12625,7 +13131,7 @@
       </p:sp>
       <p:sp>
         <p:nvSpPr>
-          <p:cNvPr id="24" name="Text 22"/>
+          <p:cNvPr id="56" name="Text 54"/>
           <p:cNvSpPr/>
           <p:nvPr/>
         </p:nvSpPr>
@@ -12666,7 +13172,7 @@
       </p:sp>
       <p:sp>
         <p:nvSpPr>
-          <p:cNvPr id="25" name="Text 23"/>
+          <p:cNvPr id="57" name="Text 55"/>
           <p:cNvSpPr/>
           <p:nvPr/>
         </p:nvSpPr>
@@ -12705,7 +13211,7 @@
       </p:sp>
       <p:sp>
         <p:nvSpPr>
-          <p:cNvPr id="26" name="Text 24"/>
+          <p:cNvPr id="58" name="Text 56"/>
           <p:cNvSpPr/>
           <p:nvPr/>
         </p:nvSpPr>
@@ -12744,7 +13250,7 @@
       </p:sp>
       <p:sp>
         <p:nvSpPr>
-          <p:cNvPr id="27" name="Text 25"/>
+          <p:cNvPr id="59" name="Text 57"/>
           <p:cNvSpPr/>
           <p:nvPr/>
         </p:nvSpPr>
@@ -12783,7 +13289,7 @@
       </p:sp>
       <p:sp>
         <p:nvSpPr>
-          <p:cNvPr id="28" name="Text 26"/>
+          <p:cNvPr id="60" name="Text 58"/>
           <p:cNvSpPr/>
           <p:nvPr/>
         </p:nvSpPr>
@@ -12822,7 +13328,7 @@
       </p:sp>
       <p:sp>
         <p:nvSpPr>
-          <p:cNvPr id="29" name="Shape 27"/>
+          <p:cNvPr id="61" name="Shape 59"/>
           <p:cNvSpPr/>
           <p:nvPr/>
         </p:nvSpPr>
@@ -12845,7 +13351,7 @@
       </p:sp>
       <p:sp>
         <p:nvSpPr>
-          <p:cNvPr id="30" name="Text 28"/>
+          <p:cNvPr id="62" name="Text 60"/>
           <p:cNvSpPr/>
           <p:nvPr/>
         </p:nvSpPr>
@@ -13083,7 +13589,7 @@
         </p:nvSpPr>
         <p:spPr>
           <a:xfrm>
-            <a:off x="304800" y="1164282"/>
+            <a:off x="304800" y="1373832"/>
             <a:ext cx="11814048" cy="142875"/>
           </a:xfrm>
           <a:prstGeom prst="rect">
@@ -13122,7 +13628,7 @@
         </p:nvSpPr>
         <p:spPr>
           <a:xfrm>
-            <a:off x="304800" y="1332458"/>
+            <a:off x="304800" y="1542008"/>
             <a:ext cx="11814048" cy="285750"/>
           </a:xfrm>
           <a:prstGeom prst="rect">
@@ -13161,7 +13667,7 @@
         </p:nvSpPr>
         <p:spPr>
           <a:xfrm>
-            <a:off x="304800" y="1630859"/>
+            <a:off x="304800" y="1840409"/>
             <a:ext cx="11814048" cy="123825"/>
           </a:xfrm>
           <a:prstGeom prst="rect">
@@ -13200,12 +13706,12 @@
         </p:nvSpPr>
         <p:spPr>
           <a:xfrm>
-            <a:off x="304800" y="1830884"/>
-            <a:ext cx="2265759" cy="888802"/>
+            <a:off x="304800" y="2040434"/>
+            <a:ext cx="2265759" cy="784027"/>
           </a:xfrm>
           <a:prstGeom prst="roundRect">
             <a:avLst>
-              <a:gd name="adj" fmla="val 8573"/>
+              <a:gd name="adj" fmla="val 9719"/>
             </a:avLst>
           </a:prstGeom>
           <a:solidFill>
@@ -13232,7 +13738,7 @@
         </p:nvSpPr>
         <p:spPr>
           <a:xfrm>
-            <a:off x="1190030" y="1894284"/>
+            <a:off x="1190030" y="2103834"/>
             <a:ext cx="495300" cy="495300"/>
           </a:xfrm>
           <a:prstGeom prst="roundRect">
@@ -13268,7 +13774,7 @@
         </p:nvSpPr>
         <p:spPr>
           <a:xfrm>
-            <a:off x="1365956" y="2027230"/>
+            <a:off x="1365956" y="2236780"/>
             <a:ext cx="79973" cy="119467"/>
           </a:xfrm>
           <a:prstGeom prst="roundRect">
@@ -13300,7 +13806,7 @@
         </p:nvSpPr>
         <p:spPr>
           <a:xfrm>
-            <a:off x="1431354" y="1964234"/>
+            <a:off x="1431354" y="2173784"/>
             <a:ext cx="12650" cy="177701"/>
           </a:xfrm>
           <a:prstGeom prst="roundRect">
@@ -13332,7 +13838,7 @@
         </p:nvSpPr>
         <p:spPr>
           <a:xfrm>
-            <a:off x="346811" y="2427684"/>
+            <a:off x="346811" y="2637234"/>
             <a:ext cx="2181737" cy="123825"/>
           </a:xfrm>
           <a:prstGeom prst="rect">
@@ -13371,51 +13877,12 @@
         </p:nvSpPr>
         <p:spPr>
           <a:xfrm>
-            <a:off x="346811" y="2551509"/>
-            <a:ext cx="2181737" cy="104775"/>
-          </a:xfrm>
-          <a:prstGeom prst="rect">
-            <a:avLst/>
-          </a:prstGeom>
-          <a:noFill/>
-          <a:ln/>
-        </p:spPr>
-        <p:txBody>
-          <a:bodyPr wrap="square" lIns="0" tIns="0" rIns="0" bIns="0" rtlCol="0" anchor="t"/>
-          <a:lstStyle/>
-          <a:p>
-            <a:pPr algn="ctr" indent="0" marL="0">
-              <a:buNone/>
-            </a:pPr>
-            <a:r>
-              <a:rPr lang="en-US" sz="600" dirty="0">
-                <a:solidFill>
-                  <a:srgbClr val="8B94A3"/>
-                </a:solidFill>
-                <a:latin typeface="Noto Sans SC" pitchFamily="34" charset="0"/>
-                <a:ea typeface="Noto Sans SC" pitchFamily="34" charset="-122"/>
-                <a:cs typeface="Noto Sans SC" pitchFamily="34" charset="-120"/>
-              </a:rPr>
-              <a:t>1:00</a:t>
-            </a:r>
-            <a:endParaRPr lang="en-US" sz="600" dirty="0"/>
-          </a:p>
-        </p:txBody>
-      </p:sp>
-      <p:sp>
-        <p:nvSpPr>
-          <p:cNvPr id="16" name="Text 14"/>
-          <p:cNvSpPr/>
-          <p:nvPr/>
-        </p:nvSpPr>
-        <p:spPr>
-          <a:xfrm>
-            <a:off x="2633960" y="1830884"/>
-            <a:ext cx="2265759" cy="888802"/>
+            <a:off x="2633960" y="2040434"/>
+            <a:ext cx="2265759" cy="784027"/>
           </a:xfrm>
           <a:prstGeom prst="roundRect">
             <a:avLst>
-              <a:gd name="adj" fmla="val 8573"/>
+              <a:gd name="adj" fmla="val 9719"/>
             </a:avLst>
           </a:prstGeom>
           <a:solidFill>
@@ -13436,13 +13903,13 @@
       </p:sp>
       <p:sp>
         <p:nvSpPr>
-          <p:cNvPr id="17" name="Text 15"/>
-          <p:cNvSpPr/>
-          <p:nvPr/>
-        </p:nvSpPr>
-        <p:spPr>
-          <a:xfrm>
-            <a:off x="3519190" y="1894284"/>
+          <p:cNvPr id="16" name="Text 14"/>
+          <p:cNvSpPr/>
+          <p:nvPr/>
+        </p:nvSpPr>
+        <p:spPr>
+          <a:xfrm>
+            <a:off x="3519190" y="2103834"/>
             <a:ext cx="495300" cy="495300"/>
           </a:xfrm>
           <a:prstGeom prst="roundRect">
@@ -13472,13 +13939,13 @@
       </p:sp>
       <p:sp>
         <p:nvSpPr>
-          <p:cNvPr id="18" name="Text 16"/>
-          <p:cNvSpPr/>
-          <p:nvPr/>
-        </p:nvSpPr>
-        <p:spPr>
-          <a:xfrm>
-            <a:off x="3762077" y="2070210"/>
+          <p:cNvPr id="17" name="Text 15"/>
+          <p:cNvSpPr/>
+          <p:nvPr/>
+        </p:nvSpPr>
+        <p:spPr>
+          <a:xfrm>
+            <a:off x="3762077" y="2279760"/>
             <a:ext cx="119467" cy="79973"/>
           </a:xfrm>
           <a:prstGeom prst="roundRect">
@@ -13504,13 +13971,13 @@
       </p:sp>
       <p:sp>
         <p:nvSpPr>
-          <p:cNvPr id="19" name="Text 17"/>
-          <p:cNvSpPr/>
-          <p:nvPr/>
-        </p:nvSpPr>
-        <p:spPr>
-          <a:xfrm>
-            <a:off x="3760515" y="2141934"/>
+          <p:cNvPr id="18" name="Text 16"/>
+          <p:cNvSpPr/>
+          <p:nvPr/>
+        </p:nvSpPr>
+        <p:spPr>
+          <a:xfrm>
+            <a:off x="3760515" y="2351484"/>
             <a:ext cx="12650" cy="177701"/>
           </a:xfrm>
           <a:prstGeom prst="roundRect">
@@ -13536,13 +14003,13 @@
       </p:sp>
       <p:sp>
         <p:nvSpPr>
-          <p:cNvPr id="20" name="Text 18"/>
-          <p:cNvSpPr/>
-          <p:nvPr/>
-        </p:nvSpPr>
-        <p:spPr>
-          <a:xfrm>
-            <a:off x="2675971" y="2427684"/>
+          <p:cNvPr id="19" name="Text 17"/>
+          <p:cNvSpPr/>
+          <p:nvPr/>
+        </p:nvSpPr>
+        <p:spPr>
+          <a:xfrm>
+            <a:off x="2675971" y="2637234"/>
             <a:ext cx="2181737" cy="123825"/>
           </a:xfrm>
           <a:prstGeom prst="rect">
@@ -13575,57 +14042,18 @@
       </p:sp>
       <p:sp>
         <p:nvSpPr>
-          <p:cNvPr id="21" name="Text 19"/>
-          <p:cNvSpPr/>
-          <p:nvPr/>
-        </p:nvSpPr>
-        <p:spPr>
-          <a:xfrm>
-            <a:off x="2675971" y="2551509"/>
-            <a:ext cx="2181737" cy="104775"/>
-          </a:xfrm>
-          <a:prstGeom prst="rect">
-            <a:avLst/>
-          </a:prstGeom>
-          <a:noFill/>
-          <a:ln/>
-        </p:spPr>
-        <p:txBody>
-          <a:bodyPr wrap="square" lIns="0" tIns="0" rIns="0" bIns="0" rtlCol="0" anchor="t"/>
-          <a:lstStyle/>
-          <a:p>
-            <a:pPr algn="ctr" indent="0" marL="0">
-              <a:buNone/>
-            </a:pPr>
-            <a:r>
-              <a:rPr lang="en-US" sz="600" dirty="0">
-                <a:solidFill>
-                  <a:srgbClr val="8B94A3"/>
-                </a:solidFill>
-                <a:latin typeface="Noto Sans SC" pitchFamily="34" charset="0"/>
-                <a:ea typeface="Noto Sans SC" pitchFamily="34" charset="-122"/>
-                <a:cs typeface="Noto Sans SC" pitchFamily="34" charset="-120"/>
-              </a:rPr>
-              <a:t>2:30</a:t>
-            </a:r>
-            <a:endParaRPr lang="en-US" sz="600" dirty="0"/>
-          </a:p>
-        </p:txBody>
-      </p:sp>
-      <p:sp>
-        <p:nvSpPr>
-          <p:cNvPr id="22" name="Text 20"/>
-          <p:cNvSpPr/>
-          <p:nvPr/>
-        </p:nvSpPr>
-        <p:spPr>
-          <a:xfrm>
-            <a:off x="4963120" y="1830884"/>
-            <a:ext cx="2265759" cy="888802"/>
+          <p:cNvPr id="20" name="Text 18"/>
+          <p:cNvSpPr/>
+          <p:nvPr/>
+        </p:nvSpPr>
+        <p:spPr>
+          <a:xfrm>
+            <a:off x="4963120" y="2040434"/>
+            <a:ext cx="2265759" cy="784027"/>
           </a:xfrm>
           <a:prstGeom prst="roundRect">
             <a:avLst>
-              <a:gd name="adj" fmla="val 8573"/>
+              <a:gd name="adj" fmla="val 9719"/>
             </a:avLst>
           </a:prstGeom>
           <a:solidFill>
@@ -13646,13 +14074,13 @@
       </p:sp>
       <p:sp>
         <p:nvSpPr>
-          <p:cNvPr id="23" name="Text 21"/>
-          <p:cNvSpPr/>
-          <p:nvPr/>
-        </p:nvSpPr>
-        <p:spPr>
-          <a:xfrm>
-            <a:off x="5848350" y="1894284"/>
+          <p:cNvPr id="21" name="Text 19"/>
+          <p:cNvSpPr/>
+          <p:nvPr/>
+        </p:nvSpPr>
+        <p:spPr>
+          <a:xfrm>
+            <a:off x="5848350" y="2103834"/>
             <a:ext cx="495300" cy="495300"/>
           </a:xfrm>
           <a:prstGeom prst="roundRect">
@@ -13682,13 +14110,13 @@
       </p:sp>
       <p:sp>
         <p:nvSpPr>
-          <p:cNvPr id="24" name="Text 22"/>
-          <p:cNvSpPr/>
-          <p:nvPr/>
-        </p:nvSpPr>
-        <p:spPr>
-          <a:xfrm>
-            <a:off x="6096000" y="2132409"/>
+          <p:cNvPr id="22" name="Text 20"/>
+          <p:cNvSpPr/>
+          <p:nvPr/>
+        </p:nvSpPr>
+        <p:spPr>
+          <a:xfrm>
+            <a:off x="6096000" y="2341959"/>
             <a:ext cx="126950" cy="19050"/>
           </a:xfrm>
           <a:prstGeom prst="roundRect">
@@ -13714,13 +14142,13 @@
       </p:sp>
       <p:sp>
         <p:nvSpPr>
-          <p:cNvPr id="25" name="Text 23"/>
-          <p:cNvSpPr/>
-          <p:nvPr/>
-        </p:nvSpPr>
-        <p:spPr>
-          <a:xfrm>
-            <a:off x="6089675" y="1964234"/>
+          <p:cNvPr id="23" name="Text 21"/>
+          <p:cNvSpPr/>
+          <p:nvPr/>
+        </p:nvSpPr>
+        <p:spPr>
+          <a:xfrm>
+            <a:off x="6089675" y="2173784"/>
             <a:ext cx="12650" cy="177701"/>
           </a:xfrm>
           <a:prstGeom prst="roundRect">
@@ -13746,13 +14174,13 @@
       </p:sp>
       <p:sp>
         <p:nvSpPr>
-          <p:cNvPr id="26" name="Text 24"/>
-          <p:cNvSpPr/>
-          <p:nvPr/>
-        </p:nvSpPr>
-        <p:spPr>
-          <a:xfrm>
-            <a:off x="5005132" y="2427684"/>
+          <p:cNvPr id="24" name="Text 22"/>
+          <p:cNvSpPr/>
+          <p:nvPr/>
+        </p:nvSpPr>
+        <p:spPr>
+          <a:xfrm>
+            <a:off x="5005132" y="2637234"/>
             <a:ext cx="2181737" cy="123825"/>
           </a:xfrm>
           <a:prstGeom prst="rect">
@@ -13785,57 +14213,18 @@
       </p:sp>
       <p:sp>
         <p:nvSpPr>
-          <p:cNvPr id="27" name="Text 25"/>
-          <p:cNvSpPr/>
-          <p:nvPr/>
-        </p:nvSpPr>
-        <p:spPr>
-          <a:xfrm>
-            <a:off x="5005132" y="2551509"/>
-            <a:ext cx="2181737" cy="104775"/>
-          </a:xfrm>
-          <a:prstGeom prst="rect">
-            <a:avLst/>
-          </a:prstGeom>
-          <a:noFill/>
-          <a:ln/>
-        </p:spPr>
-        <p:txBody>
-          <a:bodyPr wrap="square" lIns="0" tIns="0" rIns="0" bIns="0" rtlCol="0" anchor="t"/>
-          <a:lstStyle/>
-          <a:p>
-            <a:pPr algn="ctr" indent="0" marL="0">
-              <a:buNone/>
-            </a:pPr>
-            <a:r>
-              <a:rPr lang="en-US" sz="600" dirty="0">
-                <a:solidFill>
-                  <a:srgbClr val="8B94A3"/>
-                </a:solidFill>
-                <a:latin typeface="Noto Sans SC" pitchFamily="34" charset="0"/>
-                <a:ea typeface="Noto Sans SC" pitchFamily="34" charset="-122"/>
-                <a:cs typeface="Noto Sans SC" pitchFamily="34" charset="-120"/>
-              </a:rPr>
-              <a:t>3:00</a:t>
-            </a:r>
-            <a:endParaRPr lang="en-US" sz="600" dirty="0"/>
-          </a:p>
-        </p:txBody>
-      </p:sp>
-      <p:sp>
-        <p:nvSpPr>
-          <p:cNvPr id="28" name="Text 26"/>
-          <p:cNvSpPr/>
-          <p:nvPr/>
-        </p:nvSpPr>
-        <p:spPr>
-          <a:xfrm>
-            <a:off x="7292280" y="1830884"/>
-            <a:ext cx="2265759" cy="888802"/>
+          <p:cNvPr id="25" name="Text 23"/>
+          <p:cNvSpPr/>
+          <p:nvPr/>
+        </p:nvSpPr>
+        <p:spPr>
+          <a:xfrm>
+            <a:off x="7292280" y="2040434"/>
+            <a:ext cx="2265759" cy="784027"/>
           </a:xfrm>
           <a:prstGeom prst="roundRect">
             <a:avLst>
-              <a:gd name="adj" fmla="val 8573"/>
+              <a:gd name="adj" fmla="val 9719"/>
             </a:avLst>
           </a:prstGeom>
           <a:solidFill>
@@ -13856,13 +14245,13 @@
       </p:sp>
       <p:sp>
         <p:nvSpPr>
-          <p:cNvPr id="29" name="Text 27"/>
-          <p:cNvSpPr/>
-          <p:nvPr/>
-        </p:nvSpPr>
-        <p:spPr>
-          <a:xfrm>
-            <a:off x="8177510" y="1894284"/>
+          <p:cNvPr id="26" name="Text 24"/>
+          <p:cNvSpPr/>
+          <p:nvPr/>
+        </p:nvSpPr>
+        <p:spPr>
+          <a:xfrm>
+            <a:off x="8177510" y="2103834"/>
             <a:ext cx="495300" cy="495300"/>
           </a:xfrm>
           <a:prstGeom prst="roundRect">
@@ -13892,13 +14281,13 @@
       </p:sp>
       <p:sp>
         <p:nvSpPr>
-          <p:cNvPr id="30" name="Text 28"/>
-          <p:cNvSpPr/>
-          <p:nvPr/>
-        </p:nvSpPr>
-        <p:spPr>
-          <a:xfrm>
-            <a:off x="8420398" y="2133685"/>
+          <p:cNvPr id="27" name="Text 25"/>
+          <p:cNvSpPr/>
+          <p:nvPr/>
+        </p:nvSpPr>
+        <p:spPr>
+          <a:xfrm>
+            <a:off x="8420398" y="2343235"/>
             <a:ext cx="119467" cy="79973"/>
           </a:xfrm>
           <a:prstGeom prst="roundRect">
@@ -13924,13 +14313,13 @@
       </p:sp>
       <p:sp>
         <p:nvSpPr>
-          <p:cNvPr id="31" name="Text 29"/>
-          <p:cNvSpPr/>
-          <p:nvPr/>
-        </p:nvSpPr>
-        <p:spPr>
-          <a:xfrm>
-            <a:off x="8418835" y="2141934"/>
+          <p:cNvPr id="28" name="Text 26"/>
+          <p:cNvSpPr/>
+          <p:nvPr/>
+        </p:nvSpPr>
+        <p:spPr>
+          <a:xfrm>
+            <a:off x="8418835" y="2351484"/>
             <a:ext cx="12650" cy="177701"/>
           </a:xfrm>
           <a:prstGeom prst="roundRect">
@@ -13956,13 +14345,13 @@
       </p:sp>
       <p:sp>
         <p:nvSpPr>
-          <p:cNvPr id="32" name="Text 30"/>
-          <p:cNvSpPr/>
-          <p:nvPr/>
-        </p:nvSpPr>
-        <p:spPr>
-          <a:xfrm>
-            <a:off x="7334292" y="2427684"/>
+          <p:cNvPr id="29" name="Text 27"/>
+          <p:cNvSpPr/>
+          <p:nvPr/>
+        </p:nvSpPr>
+        <p:spPr>
+          <a:xfrm>
+            <a:off x="7334292" y="2637234"/>
             <a:ext cx="2181737" cy="123825"/>
           </a:xfrm>
           <a:prstGeom prst="rect">
@@ -13995,57 +14384,18 @@
       </p:sp>
       <p:sp>
         <p:nvSpPr>
-          <p:cNvPr id="33" name="Text 31"/>
-          <p:cNvSpPr/>
-          <p:nvPr/>
-        </p:nvSpPr>
-        <p:spPr>
-          <a:xfrm>
-            <a:off x="7334292" y="2551509"/>
-            <a:ext cx="2181737" cy="104775"/>
-          </a:xfrm>
-          <a:prstGeom prst="rect">
-            <a:avLst/>
-          </a:prstGeom>
-          <a:noFill/>
-          <a:ln/>
-        </p:spPr>
-        <p:txBody>
-          <a:bodyPr wrap="square" lIns="0" tIns="0" rIns="0" bIns="0" rtlCol="0" anchor="t"/>
-          <a:lstStyle/>
-          <a:p>
-            <a:pPr algn="ctr" indent="0" marL="0">
-              <a:buNone/>
-            </a:pPr>
-            <a:r>
-              <a:rPr lang="en-US" sz="600" dirty="0">
-                <a:solidFill>
-                  <a:srgbClr val="8B94A3"/>
-                </a:solidFill>
-                <a:latin typeface="Noto Sans SC" pitchFamily="34" charset="0"/>
-                <a:ea typeface="Noto Sans SC" pitchFamily="34" charset="-122"/>
-                <a:cs typeface="Noto Sans SC" pitchFamily="34" charset="-120"/>
-              </a:rPr>
-              <a:t>4:30</a:t>
-            </a:r>
-            <a:endParaRPr lang="en-US" sz="600" dirty="0"/>
-          </a:p>
-        </p:txBody>
-      </p:sp>
-      <p:sp>
-        <p:nvSpPr>
-          <p:cNvPr id="34" name="Text 32"/>
-          <p:cNvSpPr/>
-          <p:nvPr/>
-        </p:nvSpPr>
-        <p:spPr>
-          <a:xfrm>
-            <a:off x="9621441" y="1830884"/>
-            <a:ext cx="2265759" cy="888802"/>
+          <p:cNvPr id="30" name="Text 28"/>
+          <p:cNvSpPr/>
+          <p:nvPr/>
+        </p:nvSpPr>
+        <p:spPr>
+          <a:xfrm>
+            <a:off x="9621441" y="2040434"/>
+            <a:ext cx="2265759" cy="784027"/>
           </a:xfrm>
           <a:prstGeom prst="roundRect">
             <a:avLst>
-              <a:gd name="adj" fmla="val 8573"/>
+              <a:gd name="adj" fmla="val 9719"/>
             </a:avLst>
           </a:prstGeom>
           <a:solidFill>
@@ -14066,13 +14416,13 @@
       </p:sp>
       <p:sp>
         <p:nvSpPr>
-          <p:cNvPr id="35" name="Text 33"/>
-          <p:cNvSpPr/>
-          <p:nvPr/>
-        </p:nvSpPr>
-        <p:spPr>
-          <a:xfrm>
-            <a:off x="10506670" y="1894284"/>
+          <p:cNvPr id="31" name="Text 29"/>
+          <p:cNvSpPr/>
+          <p:nvPr/>
+        </p:nvSpPr>
+        <p:spPr>
+          <a:xfrm>
+            <a:off x="10506670" y="2103834"/>
             <a:ext cx="495300" cy="495300"/>
           </a:xfrm>
           <a:prstGeom prst="roundRect">
@@ -14102,13 +14452,13 @@
       </p:sp>
       <p:sp>
         <p:nvSpPr>
-          <p:cNvPr id="36" name="Text 34"/>
-          <p:cNvSpPr/>
-          <p:nvPr/>
-        </p:nvSpPr>
-        <p:spPr>
-          <a:xfrm>
-            <a:off x="10746072" y="2137172"/>
+          <p:cNvPr id="32" name="Text 30"/>
+          <p:cNvSpPr/>
+          <p:nvPr/>
+        </p:nvSpPr>
+        <p:spPr>
+          <a:xfrm>
+            <a:off x="10746072" y="2346722"/>
             <a:ext cx="79972" cy="119467"/>
           </a:xfrm>
           <a:prstGeom prst="roundRect">
@@ -14134,13 +14484,13 @@
       </p:sp>
       <p:sp>
         <p:nvSpPr>
-          <p:cNvPr id="37" name="Text 35"/>
-          <p:cNvSpPr/>
-          <p:nvPr/>
-        </p:nvSpPr>
-        <p:spPr>
-          <a:xfrm>
-            <a:off x="10752366" y="2081006"/>
+          <p:cNvPr id="33" name="Text 31"/>
+          <p:cNvSpPr/>
+          <p:nvPr/>
+        </p:nvSpPr>
+        <p:spPr>
+          <a:xfrm>
+            <a:off x="10752366" y="2290556"/>
             <a:ext cx="172913" cy="66944"/>
           </a:xfrm>
           <a:prstGeom prst="roundRect">
@@ -14166,13 +14516,13 @@
       </p:sp>
       <p:sp>
         <p:nvSpPr>
-          <p:cNvPr id="38" name="Text 36"/>
-          <p:cNvSpPr/>
-          <p:nvPr/>
-        </p:nvSpPr>
-        <p:spPr>
-          <a:xfrm>
-            <a:off x="9663452" y="2427684"/>
+          <p:cNvPr id="34" name="Text 32"/>
+          <p:cNvSpPr/>
+          <p:nvPr/>
+        </p:nvSpPr>
+        <p:spPr>
+          <a:xfrm>
+            <a:off x="9663452" y="2637234"/>
             <a:ext cx="2181737" cy="123825"/>
           </a:xfrm>
           <a:prstGeom prst="rect">
@@ -14205,57 +14555,18 @@
       </p:sp>
       <p:sp>
         <p:nvSpPr>
-          <p:cNvPr id="39" name="Text 37"/>
-          <p:cNvSpPr/>
-          <p:nvPr/>
-        </p:nvSpPr>
-        <p:spPr>
-          <a:xfrm>
-            <a:off x="9663452" y="2551509"/>
-            <a:ext cx="2181737" cy="104775"/>
-          </a:xfrm>
-          <a:prstGeom prst="rect">
-            <a:avLst/>
-          </a:prstGeom>
-          <a:noFill/>
-          <a:ln/>
-        </p:spPr>
-        <p:txBody>
-          <a:bodyPr wrap="square" lIns="0" tIns="0" rIns="0" bIns="0" rtlCol="0" anchor="t"/>
-          <a:lstStyle/>
-          <a:p>
-            <a:pPr algn="ctr" indent="0" marL="0">
-              <a:buNone/>
-            </a:pPr>
-            <a:r>
-              <a:rPr lang="en-US" sz="600" dirty="0">
-                <a:solidFill>
-                  <a:srgbClr val="8B94A3"/>
-                </a:solidFill>
-                <a:latin typeface="Noto Sans SC" pitchFamily="34" charset="0"/>
-                <a:ea typeface="Noto Sans SC" pitchFamily="34" charset="-122"/>
-                <a:cs typeface="Noto Sans SC" pitchFamily="34" charset="-120"/>
-              </a:rPr>
-              <a:t>5:12</a:t>
-            </a:r>
-            <a:endParaRPr lang="en-US" sz="600" dirty="0"/>
-          </a:p>
-        </p:txBody>
-      </p:sp>
-      <p:sp>
-        <p:nvSpPr>
-          <p:cNvPr id="40" name="Text 38"/>
-          <p:cNvSpPr/>
-          <p:nvPr/>
-        </p:nvSpPr>
-        <p:spPr>
-          <a:xfrm>
-            <a:off x="304800" y="2783086"/>
-            <a:ext cx="2265759" cy="926902"/>
+          <p:cNvPr id="35" name="Text 33"/>
+          <p:cNvSpPr/>
+          <p:nvPr/>
+        </p:nvSpPr>
+        <p:spPr>
+          <a:xfrm>
+            <a:off x="304800" y="2887861"/>
+            <a:ext cx="2265759" cy="822127"/>
           </a:xfrm>
           <a:prstGeom prst="roundRect">
             <a:avLst>
-              <a:gd name="adj" fmla="val 8221"/>
+              <a:gd name="adj" fmla="val 9269"/>
             </a:avLst>
           </a:prstGeom>
           <a:solidFill>
@@ -14276,13 +14587,13 @@
       </p:sp>
       <p:sp>
         <p:nvSpPr>
-          <p:cNvPr id="41" name="Text 39"/>
-          <p:cNvSpPr/>
-          <p:nvPr/>
-        </p:nvSpPr>
-        <p:spPr>
-          <a:xfrm>
-            <a:off x="1190030" y="2846487"/>
+          <p:cNvPr id="36" name="Text 34"/>
+          <p:cNvSpPr/>
+          <p:nvPr/>
+        </p:nvSpPr>
+        <p:spPr>
+          <a:xfrm>
+            <a:off x="1190030" y="2951262"/>
             <a:ext cx="495300" cy="495300"/>
           </a:xfrm>
           <a:prstGeom prst="roundRect">
@@ -14312,13 +14623,13 @@
       </p:sp>
       <p:sp>
         <p:nvSpPr>
-          <p:cNvPr id="42" name="Text 40"/>
-          <p:cNvSpPr/>
-          <p:nvPr/>
-        </p:nvSpPr>
-        <p:spPr>
-          <a:xfrm>
-            <a:off x="1428155" y="3094137"/>
+          <p:cNvPr id="37" name="Text 35"/>
+          <p:cNvSpPr/>
+          <p:nvPr/>
+        </p:nvSpPr>
+        <p:spPr>
+          <a:xfrm>
+            <a:off x="1428155" y="3198912"/>
             <a:ext cx="19050" cy="126950"/>
           </a:xfrm>
           <a:prstGeom prst="roundRect">
@@ -14344,13 +14655,13 @@
       </p:sp>
       <p:sp>
         <p:nvSpPr>
-          <p:cNvPr id="43" name="Text 41"/>
-          <p:cNvSpPr/>
-          <p:nvPr/>
-        </p:nvSpPr>
-        <p:spPr>
-          <a:xfrm>
-            <a:off x="1431354" y="3094137"/>
+          <p:cNvPr id="38" name="Text 36"/>
+          <p:cNvSpPr/>
+          <p:nvPr/>
+        </p:nvSpPr>
+        <p:spPr>
+          <a:xfrm>
+            <a:off x="1431354" y="3198912"/>
             <a:ext cx="12650" cy="177701"/>
           </a:xfrm>
           <a:prstGeom prst="roundRect">
@@ -14376,13 +14687,13 @@
       </p:sp>
       <p:sp>
         <p:nvSpPr>
-          <p:cNvPr id="44" name="Text 42"/>
-          <p:cNvSpPr/>
-          <p:nvPr/>
-        </p:nvSpPr>
-        <p:spPr>
-          <a:xfrm>
-            <a:off x="346811" y="3379887"/>
+          <p:cNvPr id="39" name="Text 37"/>
+          <p:cNvSpPr/>
+          <p:nvPr/>
+        </p:nvSpPr>
+        <p:spPr>
+          <a:xfrm>
+            <a:off x="346811" y="3484662"/>
             <a:ext cx="2181737" cy="123825"/>
           </a:xfrm>
           <a:prstGeom prst="rect">
@@ -14415,57 +14726,18 @@
       </p:sp>
       <p:sp>
         <p:nvSpPr>
-          <p:cNvPr id="45" name="Text 43"/>
-          <p:cNvSpPr/>
-          <p:nvPr/>
-        </p:nvSpPr>
-        <p:spPr>
-          <a:xfrm>
-            <a:off x="346811" y="3503712"/>
-            <a:ext cx="2181737" cy="104775"/>
-          </a:xfrm>
-          <a:prstGeom prst="rect">
-            <a:avLst/>
-          </a:prstGeom>
-          <a:noFill/>
-          <a:ln/>
-        </p:spPr>
-        <p:txBody>
-          <a:bodyPr wrap="square" lIns="0" tIns="0" rIns="0" bIns="0" rtlCol="0" anchor="t"/>
-          <a:lstStyle/>
-          <a:p>
-            <a:pPr algn="ctr" indent="0" marL="0">
-              <a:buNone/>
-            </a:pPr>
-            <a:r>
-              <a:rPr lang="en-US" sz="600" dirty="0">
-                <a:solidFill>
-                  <a:srgbClr val="8B94A3"/>
-                </a:solidFill>
-                <a:latin typeface="Noto Sans SC" pitchFamily="34" charset="0"/>
-                <a:ea typeface="Noto Sans SC" pitchFamily="34" charset="-122"/>
-                <a:cs typeface="Noto Sans SC" pitchFamily="34" charset="-120"/>
-              </a:rPr>
-              <a:t>6:30</a:t>
-            </a:r>
-            <a:endParaRPr lang="en-US" sz="600" dirty="0"/>
-          </a:p>
-        </p:txBody>
-      </p:sp>
-      <p:sp>
-        <p:nvSpPr>
-          <p:cNvPr id="46" name="Text 44"/>
-          <p:cNvSpPr/>
-          <p:nvPr/>
-        </p:nvSpPr>
-        <p:spPr>
-          <a:xfrm>
-            <a:off x="2633960" y="2783086"/>
-            <a:ext cx="2265759" cy="926902"/>
+          <p:cNvPr id="40" name="Text 38"/>
+          <p:cNvSpPr/>
+          <p:nvPr/>
+        </p:nvSpPr>
+        <p:spPr>
+          <a:xfrm>
+            <a:off x="2633960" y="2887861"/>
+            <a:ext cx="2265759" cy="822127"/>
           </a:xfrm>
           <a:prstGeom prst="roundRect">
             <a:avLst>
-              <a:gd name="adj" fmla="val 8221"/>
+              <a:gd name="adj" fmla="val 9269"/>
             </a:avLst>
           </a:prstGeom>
           <a:solidFill>
@@ -14486,13 +14758,13 @@
       </p:sp>
       <p:sp>
         <p:nvSpPr>
-          <p:cNvPr id="47" name="Text 45"/>
-          <p:cNvSpPr/>
-          <p:nvPr/>
-        </p:nvSpPr>
-        <p:spPr>
-          <a:xfrm>
-            <a:off x="3519190" y="2846487"/>
+          <p:cNvPr id="41" name="Text 39"/>
+          <p:cNvSpPr/>
+          <p:nvPr/>
+        </p:nvSpPr>
+        <p:spPr>
+          <a:xfrm>
+            <a:off x="3519190" y="2951262"/>
             <a:ext cx="495300" cy="495300"/>
           </a:xfrm>
           <a:prstGeom prst="roundRect">
@@ -14522,13 +14794,13 @@
       </p:sp>
       <p:sp>
         <p:nvSpPr>
-          <p:cNvPr id="48" name="Text 46"/>
-          <p:cNvSpPr/>
-          <p:nvPr/>
-        </p:nvSpPr>
-        <p:spPr>
-          <a:xfrm>
-            <a:off x="3695116" y="3089374"/>
+          <p:cNvPr id="42" name="Text 40"/>
+          <p:cNvSpPr/>
+          <p:nvPr/>
+        </p:nvSpPr>
+        <p:spPr>
+          <a:xfrm>
+            <a:off x="3695116" y="3194149"/>
             <a:ext cx="79973" cy="119467"/>
           </a:xfrm>
           <a:prstGeom prst="roundRect">
@@ -14554,13 +14826,13 @@
       </p:sp>
       <p:sp>
         <p:nvSpPr>
-          <p:cNvPr id="49" name="Text 47"/>
-          <p:cNvSpPr/>
-          <p:nvPr/>
-        </p:nvSpPr>
-        <p:spPr>
-          <a:xfrm>
-            <a:off x="3760515" y="2916436"/>
+          <p:cNvPr id="43" name="Text 41"/>
+          <p:cNvSpPr/>
+          <p:nvPr/>
+        </p:nvSpPr>
+        <p:spPr>
+          <a:xfrm>
+            <a:off x="3760515" y="3021211"/>
             <a:ext cx="12650" cy="177701"/>
           </a:xfrm>
           <a:prstGeom prst="roundRect">
@@ -14586,13 +14858,13 @@
       </p:sp>
       <p:sp>
         <p:nvSpPr>
-          <p:cNvPr id="50" name="Text 48"/>
-          <p:cNvSpPr/>
-          <p:nvPr/>
-        </p:nvSpPr>
-        <p:spPr>
-          <a:xfrm>
-            <a:off x="2675971" y="3379887"/>
+          <p:cNvPr id="44" name="Text 42"/>
+          <p:cNvSpPr/>
+          <p:nvPr/>
+        </p:nvSpPr>
+        <p:spPr>
+          <a:xfrm>
+            <a:off x="2675971" y="3484662"/>
             <a:ext cx="2181737" cy="123825"/>
           </a:xfrm>
           <a:prstGeom prst="rect">
@@ -14625,57 +14897,18 @@
       </p:sp>
       <p:sp>
         <p:nvSpPr>
-          <p:cNvPr id="51" name="Text 49"/>
-          <p:cNvSpPr/>
-          <p:nvPr/>
-        </p:nvSpPr>
-        <p:spPr>
-          <a:xfrm>
-            <a:off x="2675971" y="3503712"/>
-            <a:ext cx="2181737" cy="104775"/>
-          </a:xfrm>
-          <a:prstGeom prst="rect">
-            <a:avLst/>
-          </a:prstGeom>
-          <a:noFill/>
-          <a:ln/>
-        </p:spPr>
-        <p:txBody>
-          <a:bodyPr wrap="square" lIns="0" tIns="0" rIns="0" bIns="0" rtlCol="0" anchor="t"/>
-          <a:lstStyle/>
-          <a:p>
-            <a:pPr algn="ctr" indent="0" marL="0">
-              <a:buNone/>
-            </a:pPr>
-            <a:r>
-              <a:rPr lang="en-US" sz="600" dirty="0">
-                <a:solidFill>
-                  <a:srgbClr val="8B94A3"/>
-                </a:solidFill>
-                <a:latin typeface="Noto Sans SC" pitchFamily="34" charset="0"/>
-                <a:ea typeface="Noto Sans SC" pitchFamily="34" charset="-122"/>
-                <a:cs typeface="Noto Sans SC" pitchFamily="34" charset="-120"/>
-              </a:rPr>
-              <a:t>7:00</a:t>
-            </a:r>
-            <a:endParaRPr lang="en-US" sz="600" dirty="0"/>
-          </a:p>
-        </p:txBody>
-      </p:sp>
-      <p:sp>
-        <p:nvSpPr>
-          <p:cNvPr id="52" name="Text 50"/>
-          <p:cNvSpPr/>
-          <p:nvPr/>
-        </p:nvSpPr>
-        <p:spPr>
-          <a:xfrm>
-            <a:off x="4963120" y="2783086"/>
-            <a:ext cx="2265759" cy="926902"/>
+          <p:cNvPr id="45" name="Text 43"/>
+          <p:cNvSpPr/>
+          <p:nvPr/>
+        </p:nvSpPr>
+        <p:spPr>
+          <a:xfrm>
+            <a:off x="4963120" y="2887861"/>
+            <a:ext cx="2265759" cy="822127"/>
           </a:xfrm>
           <a:prstGeom prst="roundRect">
             <a:avLst>
-              <a:gd name="adj" fmla="val 8221"/>
+              <a:gd name="adj" fmla="val 9269"/>
             </a:avLst>
           </a:prstGeom>
           <a:solidFill>
@@ -14696,13 +14929,13 @@
       </p:sp>
       <p:sp>
         <p:nvSpPr>
-          <p:cNvPr id="53" name="Text 51"/>
-          <p:cNvSpPr/>
-          <p:nvPr/>
-        </p:nvSpPr>
-        <p:spPr>
-          <a:xfrm>
-            <a:off x="5848350" y="2846487"/>
+          <p:cNvPr id="46" name="Text 44"/>
+          <p:cNvSpPr/>
+          <p:nvPr/>
+        </p:nvSpPr>
+        <p:spPr>
+          <a:xfrm>
+            <a:off x="5848350" y="2951262"/>
             <a:ext cx="495300" cy="495300"/>
           </a:xfrm>
           <a:prstGeom prst="roundRect">
@@ -14732,13 +14965,13 @@
       </p:sp>
       <p:sp>
         <p:nvSpPr>
-          <p:cNvPr id="54" name="Text 52"/>
-          <p:cNvSpPr/>
-          <p:nvPr/>
-        </p:nvSpPr>
-        <p:spPr>
-          <a:xfrm>
-            <a:off x="5981295" y="3085888"/>
+          <p:cNvPr id="47" name="Text 45"/>
+          <p:cNvSpPr/>
+          <p:nvPr/>
+        </p:nvSpPr>
+        <p:spPr>
+          <a:xfrm>
+            <a:off x="5981295" y="3190663"/>
             <a:ext cx="119467" cy="79973"/>
           </a:xfrm>
           <a:prstGeom prst="roundRect">
@@ -14764,13 +14997,13 @@
       </p:sp>
       <p:sp>
         <p:nvSpPr>
-          <p:cNvPr id="55" name="Text 53"/>
-          <p:cNvSpPr/>
-          <p:nvPr/>
-        </p:nvSpPr>
-        <p:spPr>
-          <a:xfrm>
-            <a:off x="6089675" y="3094137"/>
+          <p:cNvPr id="48" name="Text 46"/>
+          <p:cNvSpPr/>
+          <p:nvPr/>
+        </p:nvSpPr>
+        <p:spPr>
+          <a:xfrm>
+            <a:off x="6089675" y="3198912"/>
             <a:ext cx="12650" cy="177701"/>
           </a:xfrm>
           <a:prstGeom prst="roundRect">
@@ -14796,13 +15029,13 @@
       </p:sp>
       <p:sp>
         <p:nvSpPr>
-          <p:cNvPr id="56" name="Text 54"/>
-          <p:cNvSpPr/>
-          <p:nvPr/>
-        </p:nvSpPr>
-        <p:spPr>
-          <a:xfrm>
-            <a:off x="5005132" y="3379887"/>
+          <p:cNvPr id="49" name="Text 47"/>
+          <p:cNvSpPr/>
+          <p:nvPr/>
+        </p:nvSpPr>
+        <p:spPr>
+          <a:xfrm>
+            <a:off x="5005132" y="3484662"/>
             <a:ext cx="2181737" cy="123825"/>
           </a:xfrm>
           <a:prstGeom prst="rect">
@@ -14835,57 +15068,18 @@
       </p:sp>
       <p:sp>
         <p:nvSpPr>
-          <p:cNvPr id="57" name="Text 55"/>
-          <p:cNvSpPr/>
-          <p:nvPr/>
-        </p:nvSpPr>
-        <p:spPr>
-          <a:xfrm>
-            <a:off x="5005132" y="3503712"/>
-            <a:ext cx="2181737" cy="104775"/>
-          </a:xfrm>
-          <a:prstGeom prst="rect">
-            <a:avLst/>
-          </a:prstGeom>
-          <a:noFill/>
-          <a:ln/>
-        </p:spPr>
-        <p:txBody>
-          <a:bodyPr wrap="square" lIns="0" tIns="0" rIns="0" bIns="0" rtlCol="0" anchor="t"/>
-          <a:lstStyle/>
-          <a:p>
-            <a:pPr algn="ctr" indent="0" marL="0">
-              <a:buNone/>
-            </a:pPr>
-            <a:r>
-              <a:rPr lang="en-US" sz="600" dirty="0">
-                <a:solidFill>
-                  <a:srgbClr val="8B94A3"/>
-                </a:solidFill>
-                <a:latin typeface="Noto Sans SC" pitchFamily="34" charset="0"/>
-                <a:ea typeface="Noto Sans SC" pitchFamily="34" charset="-122"/>
-                <a:cs typeface="Noto Sans SC" pitchFamily="34" charset="-120"/>
-              </a:rPr>
-              <a:t>8:30</a:t>
-            </a:r>
-            <a:endParaRPr lang="en-US" sz="600" dirty="0"/>
-          </a:p>
-        </p:txBody>
-      </p:sp>
-      <p:sp>
-        <p:nvSpPr>
-          <p:cNvPr id="58" name="Text 56"/>
-          <p:cNvSpPr/>
-          <p:nvPr/>
-        </p:nvSpPr>
-        <p:spPr>
-          <a:xfrm>
-            <a:off x="7292280" y="2783086"/>
-            <a:ext cx="2265759" cy="926902"/>
+          <p:cNvPr id="50" name="Text 48"/>
+          <p:cNvSpPr/>
+          <p:nvPr/>
+        </p:nvSpPr>
+        <p:spPr>
+          <a:xfrm>
+            <a:off x="7292280" y="2887861"/>
+            <a:ext cx="2265759" cy="822127"/>
           </a:xfrm>
           <a:prstGeom prst="roundRect">
             <a:avLst>
-              <a:gd name="adj" fmla="val 8221"/>
+              <a:gd name="adj" fmla="val 9269"/>
             </a:avLst>
           </a:prstGeom>
           <a:solidFill>
@@ -14910,13 +15104,13 @@
       </p:sp>
       <p:sp>
         <p:nvSpPr>
-          <p:cNvPr id="59" name="Text 57"/>
-          <p:cNvSpPr/>
-          <p:nvPr/>
-        </p:nvSpPr>
-        <p:spPr>
-          <a:xfrm>
-            <a:off x="8177510" y="2865537"/>
+          <p:cNvPr id="51" name="Text 49"/>
+          <p:cNvSpPr/>
+          <p:nvPr/>
+        </p:nvSpPr>
+        <p:spPr>
+          <a:xfrm>
+            <a:off x="8177510" y="2970312"/>
             <a:ext cx="495300" cy="495300"/>
           </a:xfrm>
           <a:prstGeom prst="roundRect">
@@ -14946,13 +15140,13 @@
       </p:sp>
       <p:sp>
         <p:nvSpPr>
-          <p:cNvPr id="60" name="Text 58"/>
-          <p:cNvSpPr/>
-          <p:nvPr/>
-        </p:nvSpPr>
-        <p:spPr>
-          <a:xfrm>
-            <a:off x="8420398" y="3041463"/>
+          <p:cNvPr id="52" name="Text 50"/>
+          <p:cNvSpPr/>
+          <p:nvPr/>
+        </p:nvSpPr>
+        <p:spPr>
+          <a:xfrm>
+            <a:off x="8420398" y="3146238"/>
             <a:ext cx="119467" cy="79973"/>
           </a:xfrm>
           <a:prstGeom prst="roundRect">
@@ -14978,13 +15172,13 @@
       </p:sp>
       <p:sp>
         <p:nvSpPr>
-          <p:cNvPr id="61" name="Text 59"/>
-          <p:cNvSpPr/>
-          <p:nvPr/>
-        </p:nvSpPr>
-        <p:spPr>
-          <a:xfrm>
-            <a:off x="8418835" y="3113187"/>
+          <p:cNvPr id="53" name="Text 51"/>
+          <p:cNvSpPr/>
+          <p:nvPr/>
+        </p:nvSpPr>
+        <p:spPr>
+          <a:xfrm>
+            <a:off x="8418835" y="3217962"/>
             <a:ext cx="12650" cy="177701"/>
           </a:xfrm>
           <a:prstGeom prst="roundRect">
@@ -15010,13 +15204,13 @@
       </p:sp>
       <p:sp>
         <p:nvSpPr>
-          <p:cNvPr id="62" name="Text 60"/>
-          <p:cNvSpPr/>
-          <p:nvPr/>
-        </p:nvSpPr>
-        <p:spPr>
-          <a:xfrm>
-            <a:off x="7353723" y="3398937"/>
+          <p:cNvPr id="54" name="Text 52"/>
+          <p:cNvSpPr/>
+          <p:nvPr/>
+        </p:nvSpPr>
+        <p:spPr>
+          <a:xfrm>
+            <a:off x="7353723" y="3503712"/>
             <a:ext cx="2142875" cy="123825"/>
           </a:xfrm>
           <a:prstGeom prst="rect">
@@ -15049,57 +15243,18 @@
       </p:sp>
       <p:sp>
         <p:nvSpPr>
-          <p:cNvPr id="63" name="Text 61"/>
-          <p:cNvSpPr/>
-          <p:nvPr/>
-        </p:nvSpPr>
-        <p:spPr>
-          <a:xfrm>
-            <a:off x="7353723" y="3522762"/>
-            <a:ext cx="2142875" cy="104775"/>
-          </a:xfrm>
-          <a:prstGeom prst="rect">
-            <a:avLst/>
-          </a:prstGeom>
-          <a:noFill/>
-          <a:ln/>
-        </p:spPr>
-        <p:txBody>
-          <a:bodyPr wrap="square" lIns="0" tIns="0" rIns="0" bIns="0" rtlCol="0" anchor="t"/>
-          <a:lstStyle/>
-          <a:p>
-            <a:pPr algn="ctr" indent="0" marL="0">
-              <a:buNone/>
-            </a:pPr>
-            <a:r>
-              <a:rPr lang="en-US" sz="600" dirty="0">
-                <a:solidFill>
-                  <a:srgbClr val="8B94A3"/>
-                </a:solidFill>
-                <a:latin typeface="Noto Sans SC" pitchFamily="34" charset="0"/>
-                <a:ea typeface="Noto Sans SC" pitchFamily="34" charset="-122"/>
-                <a:cs typeface="Noto Sans SC" pitchFamily="34" charset="-120"/>
-              </a:rPr>
-              <a:t>2:30 - trap!</a:t>
-            </a:r>
-            <a:endParaRPr lang="en-US" sz="600" dirty="0"/>
-          </a:p>
-        </p:txBody>
-      </p:sp>
-      <p:sp>
-        <p:nvSpPr>
-          <p:cNvPr id="64" name="Text 62"/>
-          <p:cNvSpPr/>
-          <p:nvPr/>
-        </p:nvSpPr>
-        <p:spPr>
-          <a:xfrm>
-            <a:off x="9621441" y="2783086"/>
-            <a:ext cx="2265759" cy="926902"/>
+          <p:cNvPr id="55" name="Text 53"/>
+          <p:cNvSpPr/>
+          <p:nvPr/>
+        </p:nvSpPr>
+        <p:spPr>
+          <a:xfrm>
+            <a:off x="9621441" y="2887861"/>
+            <a:ext cx="2265759" cy="822127"/>
           </a:xfrm>
           <a:prstGeom prst="roundRect">
             <a:avLst>
-              <a:gd name="adj" fmla="val 8221"/>
+              <a:gd name="adj" fmla="val 9269"/>
             </a:avLst>
           </a:prstGeom>
           <a:solidFill>
@@ -15120,13 +15275,13 @@
       </p:sp>
       <p:sp>
         <p:nvSpPr>
-          <p:cNvPr id="65" name="Text 63"/>
-          <p:cNvSpPr/>
-          <p:nvPr/>
-        </p:nvSpPr>
-        <p:spPr>
-          <a:xfrm>
-            <a:off x="10506670" y="2846487"/>
+          <p:cNvPr id="56" name="Text 54"/>
+          <p:cNvSpPr/>
+          <p:nvPr/>
+        </p:nvSpPr>
+        <p:spPr>
+          <a:xfrm>
+            <a:off x="10506670" y="2951262"/>
             <a:ext cx="495300" cy="495300"/>
           </a:xfrm>
           <a:prstGeom prst="roundRect">
@@ -15156,13 +15311,13 @@
       </p:sp>
       <p:sp>
         <p:nvSpPr>
-          <p:cNvPr id="66" name="Text 64"/>
-          <p:cNvSpPr/>
-          <p:nvPr/>
-        </p:nvSpPr>
-        <p:spPr>
-          <a:xfrm>
-            <a:off x="10639616" y="3022413"/>
+          <p:cNvPr id="57" name="Text 55"/>
+          <p:cNvSpPr/>
+          <p:nvPr/>
+        </p:nvSpPr>
+        <p:spPr>
+          <a:xfrm>
+            <a:off x="10639616" y="3127188"/>
             <a:ext cx="119467" cy="79973"/>
           </a:xfrm>
           <a:prstGeom prst="roundRect">
@@ -15188,13 +15343,13 @@
       </p:sp>
       <p:sp>
         <p:nvSpPr>
-          <p:cNvPr id="67" name="Text 65"/>
-          <p:cNvSpPr/>
-          <p:nvPr/>
-        </p:nvSpPr>
-        <p:spPr>
-          <a:xfrm>
-            <a:off x="10748030" y="2916748"/>
+          <p:cNvPr id="58" name="Text 56"/>
+          <p:cNvSpPr/>
+          <p:nvPr/>
+        </p:nvSpPr>
+        <p:spPr>
+          <a:xfrm>
+            <a:off x="10748030" y="3021523"/>
             <a:ext cx="31156" cy="178050"/>
           </a:xfrm>
           <a:prstGeom prst="roundRect">
@@ -15220,13 +15375,13 @@
       </p:sp>
       <p:sp>
         <p:nvSpPr>
-          <p:cNvPr id="68" name="Text 66"/>
-          <p:cNvSpPr/>
-          <p:nvPr/>
-        </p:nvSpPr>
-        <p:spPr>
-          <a:xfrm>
-            <a:off x="9663452" y="3379887"/>
+          <p:cNvPr id="59" name="Text 57"/>
+          <p:cNvSpPr/>
+          <p:nvPr/>
+        </p:nvSpPr>
+        <p:spPr>
+          <a:xfrm>
+            <a:off x="9663452" y="3484662"/>
             <a:ext cx="2181737" cy="123825"/>
           </a:xfrm>
           <a:prstGeom prst="rect">
@@ -15259,57 +15414,18 @@
       </p:sp>
       <p:sp>
         <p:nvSpPr>
-          <p:cNvPr id="69" name="Text 67"/>
-          <p:cNvSpPr/>
-          <p:nvPr/>
-        </p:nvSpPr>
-        <p:spPr>
-          <a:xfrm>
-            <a:off x="9663452" y="3503712"/>
-            <a:ext cx="2181737" cy="104775"/>
-          </a:xfrm>
-          <a:prstGeom prst="rect">
-            <a:avLst/>
-          </a:prstGeom>
-          <a:noFill/>
-          <a:ln/>
-        </p:spPr>
-        <p:txBody>
-          <a:bodyPr wrap="square" lIns="0" tIns="0" rIns="0" bIns="0" rtlCol="0" anchor="t"/>
-          <a:lstStyle/>
-          <a:p>
-            <a:pPr algn="ctr" indent="0" marL="0">
-              <a:buNone/>
-            </a:pPr>
-            <a:r>
-              <a:rPr lang="en-US" sz="600" dirty="0">
-                <a:solidFill>
-                  <a:srgbClr val="8B94A3"/>
-                </a:solidFill>
-                <a:latin typeface="Noto Sans SC" pitchFamily="34" charset="0"/>
-                <a:ea typeface="Noto Sans SC" pitchFamily="34" charset="-122"/>
-                <a:cs typeface="Noto Sans SC" pitchFamily="34" charset="-120"/>
-              </a:rPr>
-              <a:t>10:01</a:t>
-            </a:r>
-            <a:endParaRPr lang="en-US" sz="600" dirty="0"/>
-          </a:p>
-        </p:txBody>
-      </p:sp>
-      <p:sp>
-        <p:nvSpPr>
-          <p:cNvPr id="70" name="Text 68"/>
+          <p:cNvPr id="60" name="Text 58"/>
           <p:cNvSpPr/>
           <p:nvPr/>
         </p:nvSpPr>
         <p:spPr>
           <a:xfrm>
             <a:off x="304800" y="3773388"/>
-            <a:ext cx="2265759" cy="888802"/>
+            <a:ext cx="2265759" cy="784027"/>
           </a:xfrm>
           <a:prstGeom prst="roundRect">
             <a:avLst>
-              <a:gd name="adj" fmla="val 8573"/>
+              <a:gd name="adj" fmla="val 9719"/>
             </a:avLst>
           </a:prstGeom>
           <a:solidFill>
@@ -15330,7 +15446,7 @@
       </p:sp>
       <p:sp>
         <p:nvSpPr>
-          <p:cNvPr id="71" name="Text 69"/>
+          <p:cNvPr id="61" name="Text 59"/>
           <p:cNvSpPr/>
           <p:nvPr/>
         </p:nvSpPr>
@@ -15366,7 +15482,7 @@
       </p:sp>
       <p:sp>
         <p:nvSpPr>
-          <p:cNvPr id="72" name="Text 70"/>
+          <p:cNvPr id="62" name="Text 60"/>
           <p:cNvSpPr/>
           <p:nvPr/>
         </p:nvSpPr>
@@ -15398,7 +15514,7 @@
       </p:sp>
       <p:sp>
         <p:nvSpPr>
-          <p:cNvPr id="73" name="Text 71"/>
+          <p:cNvPr id="63" name="Text 61"/>
           <p:cNvSpPr/>
           <p:nvPr/>
         </p:nvSpPr>
@@ -15430,7 +15546,7 @@
       </p:sp>
       <p:sp>
         <p:nvSpPr>
-          <p:cNvPr id="74" name="Text 72"/>
+          <p:cNvPr id="64" name="Text 62"/>
           <p:cNvSpPr/>
           <p:nvPr/>
         </p:nvSpPr>
@@ -15469,57 +15585,18 @@
       </p:sp>
       <p:sp>
         <p:nvSpPr>
-          <p:cNvPr id="75" name="Text 73"/>
-          <p:cNvSpPr/>
-          <p:nvPr/>
-        </p:nvSpPr>
-        <p:spPr>
-          <a:xfrm>
-            <a:off x="346811" y="4494014"/>
-            <a:ext cx="2181737" cy="104775"/>
-          </a:xfrm>
-          <a:prstGeom prst="rect">
-            <a:avLst/>
-          </a:prstGeom>
-          <a:noFill/>
-          <a:ln/>
-        </p:spPr>
-        <p:txBody>
-          <a:bodyPr wrap="square" lIns="0" tIns="0" rIns="0" bIns="0" rtlCol="0" anchor="t"/>
-          <a:lstStyle/>
-          <a:p>
-            <a:pPr algn="ctr" indent="0" marL="0">
-              <a:buNone/>
-            </a:pPr>
-            <a:r>
-              <a:rPr lang="en-US" sz="600" dirty="0">
-                <a:solidFill>
-                  <a:srgbClr val="8B94A3"/>
-                </a:solidFill>
-                <a:latin typeface="Noto Sans SC" pitchFamily="34" charset="0"/>
-                <a:ea typeface="Noto Sans SC" pitchFamily="34" charset="-122"/>
-                <a:cs typeface="Noto Sans SC" pitchFamily="34" charset="-120"/>
-              </a:rPr>
-              <a:t>11:30</a:t>
-            </a:r>
-            <a:endParaRPr lang="en-US" sz="600" dirty="0"/>
-          </a:p>
-        </p:txBody>
-      </p:sp>
-      <p:sp>
-        <p:nvSpPr>
-          <p:cNvPr id="76" name="Text 74"/>
+          <p:cNvPr id="65" name="Text 63"/>
           <p:cNvSpPr/>
           <p:nvPr/>
         </p:nvSpPr>
         <p:spPr>
           <a:xfrm>
             <a:off x="2633960" y="3773388"/>
-            <a:ext cx="2265759" cy="888802"/>
+            <a:ext cx="2265759" cy="784027"/>
           </a:xfrm>
           <a:prstGeom prst="roundRect">
             <a:avLst>
-              <a:gd name="adj" fmla="val 8573"/>
+              <a:gd name="adj" fmla="val 9719"/>
             </a:avLst>
           </a:prstGeom>
           <a:solidFill>
@@ -15540,7 +15617,7 @@
       </p:sp>
       <p:sp>
         <p:nvSpPr>
-          <p:cNvPr id="77" name="Text 75"/>
+          <p:cNvPr id="66" name="Text 64"/>
           <p:cNvSpPr/>
           <p:nvPr/>
         </p:nvSpPr>
@@ -15576,7 +15653,7 @@
       </p:sp>
       <p:sp>
         <p:nvSpPr>
-          <p:cNvPr id="78" name="Text 76"/>
+          <p:cNvPr id="67" name="Text 65"/>
           <p:cNvSpPr/>
           <p:nvPr/>
         </p:nvSpPr>
@@ -15608,7 +15685,7 @@
       </p:sp>
       <p:sp>
         <p:nvSpPr>
-          <p:cNvPr id="79" name="Text 77"/>
+          <p:cNvPr id="68" name="Text 66"/>
           <p:cNvSpPr/>
           <p:nvPr/>
         </p:nvSpPr>
@@ -15640,7 +15717,7 @@
       </p:sp>
       <p:sp>
         <p:nvSpPr>
-          <p:cNvPr id="80" name="Text 78"/>
+          <p:cNvPr id="69" name="Text 67"/>
           <p:cNvSpPr/>
           <p:nvPr/>
         </p:nvSpPr>
@@ -15679,57 +15756,18 @@
       </p:sp>
       <p:sp>
         <p:nvSpPr>
-          <p:cNvPr id="81" name="Text 79"/>
-          <p:cNvSpPr/>
-          <p:nvPr/>
-        </p:nvSpPr>
-        <p:spPr>
-          <a:xfrm>
-            <a:off x="2675971" y="4494014"/>
-            <a:ext cx="2181737" cy="104775"/>
-          </a:xfrm>
-          <a:prstGeom prst="rect">
-            <a:avLst/>
-          </a:prstGeom>
-          <a:noFill/>
-          <a:ln/>
-        </p:spPr>
-        <p:txBody>
-          <a:bodyPr wrap="square" lIns="0" tIns="0" rIns="0" bIns="0" rtlCol="0" anchor="t"/>
-          <a:lstStyle/>
-          <a:p>
-            <a:pPr algn="ctr" indent="0" marL="0">
-              <a:buNone/>
-            </a:pPr>
-            <a:r>
-              <a:rPr lang="en-US" sz="600" dirty="0">
-                <a:solidFill>
-                  <a:srgbClr val="8B94A3"/>
-                </a:solidFill>
-                <a:latin typeface="Noto Sans SC" pitchFamily="34" charset="0"/>
-                <a:ea typeface="Noto Sans SC" pitchFamily="34" charset="-122"/>
-                <a:cs typeface="Noto Sans SC" pitchFamily="34" charset="-120"/>
-              </a:rPr>
-              <a:t>12:00</a:t>
-            </a:r>
-            <a:endParaRPr lang="en-US" sz="600" dirty="0"/>
-          </a:p>
-        </p:txBody>
-      </p:sp>
-      <p:sp>
-        <p:nvSpPr>
-          <p:cNvPr id="82" name="Text 80"/>
+          <p:cNvPr id="70" name="Text 68"/>
           <p:cNvSpPr/>
           <p:nvPr/>
         </p:nvSpPr>
         <p:spPr>
           <a:xfrm>
             <a:off x="4963120" y="3773388"/>
-            <a:ext cx="2265759" cy="888802"/>
+            <a:ext cx="2265759" cy="784027"/>
           </a:xfrm>
           <a:prstGeom prst="roundRect">
             <a:avLst>
-              <a:gd name="adj" fmla="val 8573"/>
+              <a:gd name="adj" fmla="val 9719"/>
             </a:avLst>
           </a:prstGeom>
           <a:solidFill>
@@ -15750,7 +15788,7 @@
       </p:sp>
       <p:sp>
         <p:nvSpPr>
-          <p:cNvPr id="83" name="Text 81"/>
+          <p:cNvPr id="71" name="Text 69"/>
           <p:cNvSpPr/>
           <p:nvPr/>
         </p:nvSpPr>
@@ -15786,7 +15824,7 @@
       </p:sp>
       <p:sp>
         <p:nvSpPr>
-          <p:cNvPr id="84" name="Text 82"/>
+          <p:cNvPr id="72" name="Text 70"/>
           <p:cNvSpPr/>
           <p:nvPr/>
         </p:nvSpPr>
@@ -15818,7 +15856,7 @@
       </p:sp>
       <p:sp>
         <p:nvSpPr>
-          <p:cNvPr id="85" name="Text 83"/>
+          <p:cNvPr id="73" name="Text 71"/>
           <p:cNvSpPr/>
           <p:nvPr/>
         </p:nvSpPr>
@@ -15850,7 +15888,7 @@
       </p:sp>
       <p:sp>
         <p:nvSpPr>
-          <p:cNvPr id="86" name="Text 84"/>
+          <p:cNvPr id="74" name="Text 72"/>
           <p:cNvSpPr/>
           <p:nvPr/>
         </p:nvSpPr>
@@ -15889,57 +15927,18 @@
       </p:sp>
       <p:sp>
         <p:nvSpPr>
-          <p:cNvPr id="87" name="Text 85"/>
-          <p:cNvSpPr/>
-          <p:nvPr/>
-        </p:nvSpPr>
-        <p:spPr>
-          <a:xfrm>
-            <a:off x="5005132" y="4494014"/>
-            <a:ext cx="2181737" cy="104775"/>
-          </a:xfrm>
-          <a:prstGeom prst="rect">
-            <a:avLst/>
-          </a:prstGeom>
-          <a:noFill/>
-          <a:ln/>
-        </p:spPr>
-        <p:txBody>
-          <a:bodyPr wrap="square" lIns="0" tIns="0" rIns="0" bIns="0" rtlCol="0" anchor="t"/>
-          <a:lstStyle/>
-          <a:p>
-            <a:pPr algn="ctr" indent="0" marL="0">
-              <a:buNone/>
-            </a:pPr>
-            <a:r>
-              <a:rPr lang="en-US" sz="600" dirty="0">
-                <a:solidFill>
-                  <a:srgbClr val="8B94A3"/>
-                </a:solidFill>
-                <a:latin typeface="Noto Sans SC" pitchFamily="34" charset="0"/>
-                <a:ea typeface="Noto Sans SC" pitchFamily="34" charset="-122"/>
-                <a:cs typeface="Noto Sans SC" pitchFamily="34" charset="-120"/>
-              </a:rPr>
-              <a:t>12:30</a:t>
-            </a:r>
-            <a:endParaRPr lang="en-US" sz="600" dirty="0"/>
-          </a:p>
-        </p:txBody>
-      </p:sp>
-      <p:sp>
-        <p:nvSpPr>
-          <p:cNvPr id="88" name="Text 86"/>
+          <p:cNvPr id="75" name="Text 73"/>
           <p:cNvSpPr/>
           <p:nvPr/>
         </p:nvSpPr>
         <p:spPr>
           <a:xfrm>
             <a:off x="7292280" y="3773388"/>
-            <a:ext cx="2265759" cy="888802"/>
+            <a:ext cx="2265759" cy="784027"/>
           </a:xfrm>
           <a:prstGeom prst="roundRect">
             <a:avLst>
-              <a:gd name="adj" fmla="val 8573"/>
+              <a:gd name="adj" fmla="val 9719"/>
             </a:avLst>
           </a:prstGeom>
           <a:solidFill>
@@ -15960,7 +15959,7 @@
       </p:sp>
       <p:sp>
         <p:nvSpPr>
-          <p:cNvPr id="89" name="Text 87"/>
+          <p:cNvPr id="76" name="Text 74"/>
           <p:cNvSpPr/>
           <p:nvPr/>
         </p:nvSpPr>
@@ -15996,7 +15995,7 @@
       </p:sp>
       <p:sp>
         <p:nvSpPr>
-          <p:cNvPr id="90" name="Text 88"/>
+          <p:cNvPr id="77" name="Text 75"/>
           <p:cNvSpPr/>
           <p:nvPr/>
         </p:nvSpPr>
@@ -16028,7 +16027,7 @@
       </p:sp>
       <p:sp>
         <p:nvSpPr>
-          <p:cNvPr id="91" name="Text 89"/>
+          <p:cNvPr id="78" name="Text 76"/>
           <p:cNvSpPr/>
           <p:nvPr/>
         </p:nvSpPr>
@@ -16060,7 +16059,7 @@
       </p:sp>
       <p:sp>
         <p:nvSpPr>
-          <p:cNvPr id="92" name="Text 90"/>
+          <p:cNvPr id="79" name="Text 77"/>
           <p:cNvSpPr/>
           <p:nvPr/>
         </p:nvSpPr>
@@ -16099,57 +16098,18 @@
       </p:sp>
       <p:sp>
         <p:nvSpPr>
-          <p:cNvPr id="93" name="Text 91"/>
-          <p:cNvSpPr/>
-          <p:nvPr/>
-        </p:nvSpPr>
-        <p:spPr>
-          <a:xfrm>
-            <a:off x="7334292" y="4494014"/>
-            <a:ext cx="2181737" cy="104775"/>
-          </a:xfrm>
-          <a:prstGeom prst="rect">
-            <a:avLst/>
-          </a:prstGeom>
-          <a:noFill/>
-          <a:ln/>
-        </p:spPr>
-        <p:txBody>
-          <a:bodyPr wrap="square" lIns="0" tIns="0" rIns="0" bIns="0" rtlCol="0" anchor="t"/>
-          <a:lstStyle/>
-          <a:p>
-            <a:pPr algn="ctr" indent="0" marL="0">
-              <a:buNone/>
-            </a:pPr>
-            <a:r>
-              <a:rPr lang="en-US" sz="600" dirty="0">
-                <a:solidFill>
-                  <a:srgbClr val="8B94A3"/>
-                </a:solidFill>
-                <a:latin typeface="Noto Sans SC" pitchFamily="34" charset="0"/>
-                <a:ea typeface="Noto Sans SC" pitchFamily="34" charset="-122"/>
-                <a:cs typeface="Noto Sans SC" pitchFamily="34" charset="-120"/>
-              </a:rPr>
-              <a:t>9:15</a:t>
-            </a:r>
-            <a:endParaRPr lang="en-US" sz="600" dirty="0"/>
-          </a:p>
-        </p:txBody>
-      </p:sp>
-      <p:sp>
-        <p:nvSpPr>
-          <p:cNvPr id="94" name="Text 92"/>
+          <p:cNvPr id="80" name="Text 78"/>
           <p:cNvSpPr/>
           <p:nvPr/>
         </p:nvSpPr>
         <p:spPr>
           <a:xfrm>
             <a:off x="9621441" y="3773388"/>
-            <a:ext cx="2265759" cy="888802"/>
+            <a:ext cx="2265759" cy="784027"/>
           </a:xfrm>
           <a:prstGeom prst="roundRect">
             <a:avLst>
-              <a:gd name="adj" fmla="val 8573"/>
+              <a:gd name="adj" fmla="val 9719"/>
             </a:avLst>
           </a:prstGeom>
           <a:solidFill>
@@ -16170,7 +16130,7 @@
       </p:sp>
       <p:sp>
         <p:nvSpPr>
-          <p:cNvPr id="95" name="Text 93"/>
+          <p:cNvPr id="81" name="Text 79"/>
           <p:cNvSpPr/>
           <p:nvPr/>
         </p:nvSpPr>
@@ -16206,7 +16166,7 @@
       </p:sp>
       <p:sp>
         <p:nvSpPr>
-          <p:cNvPr id="96" name="Text 94"/>
+          <p:cNvPr id="82" name="Text 80"/>
           <p:cNvSpPr/>
           <p:nvPr/>
         </p:nvSpPr>
@@ -16238,7 +16198,7 @@
       </p:sp>
       <p:sp>
         <p:nvSpPr>
-          <p:cNvPr id="97" name="Text 95"/>
+          <p:cNvPr id="83" name="Text 81"/>
           <p:cNvSpPr/>
           <p:nvPr/>
         </p:nvSpPr>
@@ -16270,7 +16230,7 @@
       </p:sp>
       <p:sp>
         <p:nvSpPr>
-          <p:cNvPr id="98" name="Text 96"/>
+          <p:cNvPr id="84" name="Text 82"/>
           <p:cNvSpPr/>
           <p:nvPr/>
         </p:nvSpPr>
@@ -16309,57 +16269,18 @@
       </p:sp>
       <p:sp>
         <p:nvSpPr>
-          <p:cNvPr id="99" name="Text 97"/>
-          <p:cNvSpPr/>
-          <p:nvPr/>
-        </p:nvSpPr>
-        <p:spPr>
-          <a:xfrm>
-            <a:off x="9663452" y="4494014"/>
-            <a:ext cx="2181737" cy="104775"/>
-          </a:xfrm>
-          <a:prstGeom prst="rect">
-            <a:avLst/>
-          </a:prstGeom>
-          <a:noFill/>
-          <a:ln/>
-        </p:spPr>
-        <p:txBody>
-          <a:bodyPr wrap="square" lIns="0" tIns="0" rIns="0" bIns="0" rtlCol="0" anchor="t"/>
-          <a:lstStyle/>
-          <a:p>
-            <a:pPr algn="ctr" indent="0" marL="0">
-              <a:buNone/>
-            </a:pPr>
-            <a:r>
-              <a:rPr lang="en-US" sz="600" dirty="0">
-                <a:solidFill>
-                  <a:srgbClr val="8B94A3"/>
-                </a:solidFill>
-                <a:latin typeface="Noto Sans SC" pitchFamily="34" charset="0"/>
-                <a:ea typeface="Noto Sans SC" pitchFamily="34" charset="-122"/>
-                <a:cs typeface="Noto Sans SC" pitchFamily="34" charset="-120"/>
-              </a:rPr>
-              <a:t>5:30</a:t>
-            </a:r>
-            <a:endParaRPr lang="en-US" sz="600" dirty="0"/>
-          </a:p>
-        </p:txBody>
-      </p:sp>
-      <p:sp>
-        <p:nvSpPr>
-          <p:cNvPr id="100" name="Text 98"/>
-          <p:cNvSpPr/>
-          <p:nvPr/>
-        </p:nvSpPr>
-        <p:spPr>
-          <a:xfrm>
-            <a:off x="304800" y="4725591"/>
-            <a:ext cx="2265759" cy="888802"/>
+          <p:cNvPr id="85" name="Text 83"/>
+          <p:cNvSpPr/>
+          <p:nvPr/>
+        </p:nvSpPr>
+        <p:spPr>
+          <a:xfrm>
+            <a:off x="304800" y="4620816"/>
+            <a:ext cx="2265759" cy="784027"/>
           </a:xfrm>
           <a:prstGeom prst="roundRect">
             <a:avLst>
-              <a:gd name="adj" fmla="val 8573"/>
+              <a:gd name="adj" fmla="val 9719"/>
             </a:avLst>
           </a:prstGeom>
           <a:solidFill>
@@ -16380,13 +16301,13 @@
       </p:sp>
       <p:sp>
         <p:nvSpPr>
-          <p:cNvPr id="101" name="Text 99"/>
-          <p:cNvSpPr/>
-          <p:nvPr/>
-        </p:nvSpPr>
-        <p:spPr>
-          <a:xfrm>
-            <a:off x="1190030" y="4788991"/>
+          <p:cNvPr id="86" name="Text 84"/>
+          <p:cNvSpPr/>
+          <p:nvPr/>
+        </p:nvSpPr>
+        <p:spPr>
+          <a:xfrm>
+            <a:off x="1190030" y="4684216"/>
             <a:ext cx="495300" cy="495300"/>
           </a:xfrm>
           <a:prstGeom prst="roundRect">
@@ -16416,13 +16337,13 @@
       </p:sp>
       <p:sp>
         <p:nvSpPr>
-          <p:cNvPr id="102" name="Text 100"/>
-          <p:cNvSpPr/>
-          <p:nvPr/>
-        </p:nvSpPr>
-        <p:spPr>
-          <a:xfrm>
-            <a:off x="1437680" y="5027116"/>
+          <p:cNvPr id="87" name="Text 85"/>
+          <p:cNvSpPr/>
+          <p:nvPr/>
+        </p:nvSpPr>
+        <p:spPr>
+          <a:xfrm>
+            <a:off x="1437680" y="4922341"/>
             <a:ext cx="126950" cy="19050"/>
           </a:xfrm>
           <a:prstGeom prst="roundRect">
@@ -16448,13 +16369,13 @@
       </p:sp>
       <p:sp>
         <p:nvSpPr>
-          <p:cNvPr id="103" name="Text 101"/>
-          <p:cNvSpPr/>
-          <p:nvPr/>
-        </p:nvSpPr>
-        <p:spPr>
-          <a:xfrm>
-            <a:off x="1431354" y="5036641"/>
+          <p:cNvPr id="88" name="Text 86"/>
+          <p:cNvSpPr/>
+          <p:nvPr/>
+        </p:nvSpPr>
+        <p:spPr>
+          <a:xfrm>
+            <a:off x="1431354" y="4931866"/>
             <a:ext cx="12650" cy="177701"/>
           </a:xfrm>
           <a:prstGeom prst="roundRect">
@@ -16480,13 +16401,13 @@
       </p:sp>
       <p:sp>
         <p:nvSpPr>
-          <p:cNvPr id="104" name="Text 102"/>
-          <p:cNvSpPr/>
-          <p:nvPr/>
-        </p:nvSpPr>
-        <p:spPr>
-          <a:xfrm>
-            <a:off x="346811" y="5322391"/>
+          <p:cNvPr id="89" name="Text 87"/>
+          <p:cNvSpPr/>
+          <p:nvPr/>
+        </p:nvSpPr>
+        <p:spPr>
+          <a:xfrm>
+            <a:off x="346811" y="5217616"/>
             <a:ext cx="2181737" cy="123825"/>
           </a:xfrm>
           <a:prstGeom prst="rect">
@@ -16519,57 +16440,18 @@
       </p:sp>
       <p:sp>
         <p:nvSpPr>
-          <p:cNvPr id="105" name="Text 103"/>
-          <p:cNvSpPr/>
-          <p:nvPr/>
-        </p:nvSpPr>
-        <p:spPr>
-          <a:xfrm>
-            <a:off x="346811" y="5446216"/>
-            <a:ext cx="2181737" cy="104775"/>
-          </a:xfrm>
-          <a:prstGeom prst="rect">
-            <a:avLst/>
-          </a:prstGeom>
-          <a:noFill/>
-          <a:ln/>
-        </p:spPr>
-        <p:txBody>
-          <a:bodyPr wrap="square" lIns="0" tIns="0" rIns="0" bIns="0" rtlCol="0" anchor="t"/>
-          <a:lstStyle/>
-          <a:p>
-            <a:pPr algn="ctr" indent="0" marL="0">
-              <a:buNone/>
-            </a:pPr>
-            <a:r>
-              <a:rPr lang="en-US" sz="600" dirty="0">
-                <a:solidFill>
-                  <a:srgbClr val="8B94A3"/>
-                </a:solidFill>
-                <a:latin typeface="Noto Sans SC" pitchFamily="34" charset="0"/>
-                <a:ea typeface="Noto Sans SC" pitchFamily="34" charset="-122"/>
-                <a:cs typeface="Noto Sans SC" pitchFamily="34" charset="-120"/>
-              </a:rPr>
-              <a:t>3:30</a:t>
-            </a:r>
-            <a:endParaRPr lang="en-US" sz="600" dirty="0"/>
-          </a:p>
-        </p:txBody>
-      </p:sp>
-      <p:sp>
-        <p:nvSpPr>
-          <p:cNvPr id="106" name="Text 104"/>
-          <p:cNvSpPr/>
-          <p:nvPr/>
-        </p:nvSpPr>
-        <p:spPr>
-          <a:xfrm>
-            <a:off x="2633960" y="4725591"/>
-            <a:ext cx="2265759" cy="888802"/>
+          <p:cNvPr id="90" name="Text 88"/>
+          <p:cNvSpPr/>
+          <p:nvPr/>
+        </p:nvSpPr>
+        <p:spPr>
+          <a:xfrm>
+            <a:off x="2633960" y="4620816"/>
+            <a:ext cx="2265759" cy="784027"/>
           </a:xfrm>
           <a:prstGeom prst="roundRect">
             <a:avLst>
-              <a:gd name="adj" fmla="val 8573"/>
+              <a:gd name="adj" fmla="val 9719"/>
             </a:avLst>
           </a:prstGeom>
           <a:solidFill>
@@ -16590,13 +16472,13 @@
       </p:sp>
       <p:sp>
         <p:nvSpPr>
-          <p:cNvPr id="107" name="Text 105"/>
-          <p:cNvSpPr/>
-          <p:nvPr/>
-        </p:nvSpPr>
-        <p:spPr>
-          <a:xfrm>
-            <a:off x="3519190" y="4788991"/>
+          <p:cNvPr id="91" name="Text 89"/>
+          <p:cNvSpPr/>
+          <p:nvPr/>
+        </p:nvSpPr>
+        <p:spPr>
+          <a:xfrm>
+            <a:off x="3519190" y="4684216"/>
             <a:ext cx="495300" cy="495300"/>
           </a:xfrm>
           <a:prstGeom prst="roundRect">
@@ -16626,13 +16508,13 @@
       </p:sp>
       <p:sp>
         <p:nvSpPr>
-          <p:cNvPr id="108" name="Text 106"/>
-          <p:cNvSpPr/>
-          <p:nvPr/>
-        </p:nvSpPr>
-        <p:spPr>
-          <a:xfrm>
-            <a:off x="3695116" y="5031879"/>
+          <p:cNvPr id="92" name="Text 90"/>
+          <p:cNvSpPr/>
+          <p:nvPr/>
+        </p:nvSpPr>
+        <p:spPr>
+          <a:xfrm>
+            <a:off x="3695116" y="4927104"/>
             <a:ext cx="79973" cy="119467"/>
           </a:xfrm>
           <a:prstGeom prst="roundRect">
@@ -16658,13 +16540,13 @@
       </p:sp>
       <p:sp>
         <p:nvSpPr>
-          <p:cNvPr id="109" name="Text 107"/>
-          <p:cNvSpPr/>
-          <p:nvPr/>
-        </p:nvSpPr>
-        <p:spPr>
-          <a:xfrm>
-            <a:off x="3760515" y="5036641"/>
+          <p:cNvPr id="93" name="Text 91"/>
+          <p:cNvSpPr/>
+          <p:nvPr/>
+        </p:nvSpPr>
+        <p:spPr>
+          <a:xfrm>
+            <a:off x="3760515" y="4931866"/>
             <a:ext cx="12650" cy="177701"/>
           </a:xfrm>
           <a:prstGeom prst="roundRect">
@@ -16690,13 +16572,13 @@
       </p:sp>
       <p:sp>
         <p:nvSpPr>
-          <p:cNvPr id="110" name="Text 108"/>
-          <p:cNvSpPr/>
-          <p:nvPr/>
-        </p:nvSpPr>
-        <p:spPr>
-          <a:xfrm>
-            <a:off x="2675971" y="5322391"/>
+          <p:cNvPr id="94" name="Text 92"/>
+          <p:cNvSpPr/>
+          <p:nvPr/>
+        </p:nvSpPr>
+        <p:spPr>
+          <a:xfrm>
+            <a:off x="2675971" y="5217616"/>
             <a:ext cx="2181737" cy="123825"/>
           </a:xfrm>
           <a:prstGeom prst="rect">
@@ -16729,57 +16611,18 @@
       </p:sp>
       <p:sp>
         <p:nvSpPr>
-          <p:cNvPr id="111" name="Text 109"/>
-          <p:cNvSpPr/>
-          <p:nvPr/>
-        </p:nvSpPr>
-        <p:spPr>
-          <a:xfrm>
-            <a:off x="2675971" y="5446216"/>
-            <a:ext cx="2181737" cy="104775"/>
-          </a:xfrm>
-          <a:prstGeom prst="rect">
-            <a:avLst/>
-          </a:prstGeom>
-          <a:noFill/>
-          <a:ln/>
-        </p:spPr>
-        <p:txBody>
-          <a:bodyPr wrap="square" lIns="0" tIns="0" rIns="0" bIns="0" rtlCol="0" anchor="t"/>
-          <a:lstStyle/>
-          <a:p>
-            <a:pPr algn="ctr" indent="0" marL="0">
-              <a:buNone/>
-            </a:pPr>
-            <a:r>
-              <a:rPr lang="en-US" sz="600" dirty="0">
-                <a:solidFill>
-                  <a:srgbClr val="8B94A3"/>
-                </a:solidFill>
-                <a:latin typeface="Noto Sans SC" pitchFamily="34" charset="0"/>
-                <a:ea typeface="Noto Sans SC" pitchFamily="34" charset="-122"/>
-                <a:cs typeface="Noto Sans SC" pitchFamily="34" charset="-120"/>
-              </a:rPr>
-              <a:t>7:30</a:t>
-            </a:r>
-            <a:endParaRPr lang="en-US" sz="600" dirty="0"/>
-          </a:p>
-        </p:txBody>
-      </p:sp>
-      <p:sp>
-        <p:nvSpPr>
-          <p:cNvPr id="112" name="Text 110"/>
-          <p:cNvSpPr/>
-          <p:nvPr/>
-        </p:nvSpPr>
-        <p:spPr>
-          <a:xfrm>
-            <a:off x="4963120" y="4725591"/>
-            <a:ext cx="2265759" cy="888802"/>
+          <p:cNvPr id="95" name="Text 93"/>
+          <p:cNvSpPr/>
+          <p:nvPr/>
+        </p:nvSpPr>
+        <p:spPr>
+          <a:xfrm>
+            <a:off x="4963120" y="4620816"/>
+            <a:ext cx="2265759" cy="784027"/>
           </a:xfrm>
           <a:prstGeom prst="roundRect">
             <a:avLst>
-              <a:gd name="adj" fmla="val 8573"/>
+              <a:gd name="adj" fmla="val 9719"/>
             </a:avLst>
           </a:prstGeom>
           <a:solidFill>
@@ -16800,13 +16643,13 @@
       </p:sp>
       <p:sp>
         <p:nvSpPr>
-          <p:cNvPr id="113" name="Text 111"/>
-          <p:cNvSpPr/>
-          <p:nvPr/>
-        </p:nvSpPr>
-        <p:spPr>
-          <a:xfrm>
-            <a:off x="5848350" y="4788991"/>
+          <p:cNvPr id="96" name="Text 94"/>
+          <p:cNvSpPr/>
+          <p:nvPr/>
+        </p:nvSpPr>
+        <p:spPr>
+          <a:xfrm>
+            <a:off x="5848350" y="4684216"/>
             <a:ext cx="495300" cy="495300"/>
           </a:xfrm>
           <a:prstGeom prst="roundRect">
@@ -16836,13 +16679,13 @@
       </p:sp>
       <p:sp>
         <p:nvSpPr>
-          <p:cNvPr id="114" name="Text 112"/>
-          <p:cNvSpPr/>
-          <p:nvPr/>
-        </p:nvSpPr>
-        <p:spPr>
-          <a:xfrm>
-            <a:off x="5969050" y="5027116"/>
+          <p:cNvPr id="97" name="Text 95"/>
+          <p:cNvSpPr/>
+          <p:nvPr/>
+        </p:nvSpPr>
+        <p:spPr>
+          <a:xfrm>
+            <a:off x="5969050" y="4922341"/>
             <a:ext cx="126950" cy="19050"/>
           </a:xfrm>
           <a:prstGeom prst="roundRect">
@@ -16868,13 +16711,13 @@
       </p:sp>
       <p:sp>
         <p:nvSpPr>
-          <p:cNvPr id="115" name="Text 113"/>
-          <p:cNvSpPr/>
-          <p:nvPr/>
-        </p:nvSpPr>
-        <p:spPr>
-          <a:xfrm>
-            <a:off x="6089675" y="4858941"/>
+          <p:cNvPr id="98" name="Text 96"/>
+          <p:cNvSpPr/>
+          <p:nvPr/>
+        </p:nvSpPr>
+        <p:spPr>
+          <a:xfrm>
+            <a:off x="6089675" y="4754166"/>
             <a:ext cx="12650" cy="177701"/>
           </a:xfrm>
           <a:prstGeom prst="roundRect">
@@ -16900,13 +16743,13 @@
       </p:sp>
       <p:sp>
         <p:nvSpPr>
-          <p:cNvPr id="116" name="Text 114"/>
-          <p:cNvSpPr/>
-          <p:nvPr/>
-        </p:nvSpPr>
-        <p:spPr>
-          <a:xfrm>
-            <a:off x="5005132" y="5322391"/>
+          <p:cNvPr id="99" name="Text 97"/>
+          <p:cNvSpPr/>
+          <p:nvPr/>
+        </p:nvSpPr>
+        <p:spPr>
+          <a:xfrm>
+            <a:off x="5005132" y="5217616"/>
             <a:ext cx="2181737" cy="123825"/>
           </a:xfrm>
           <a:prstGeom prst="rect">
@@ -16939,57 +16782,18 @@
       </p:sp>
       <p:sp>
         <p:nvSpPr>
-          <p:cNvPr id="117" name="Text 115"/>
-          <p:cNvSpPr/>
-          <p:nvPr/>
-        </p:nvSpPr>
-        <p:spPr>
-          <a:xfrm>
-            <a:off x="5005132" y="5446216"/>
-            <a:ext cx="2181737" cy="104775"/>
-          </a:xfrm>
-          <a:prstGeom prst="rect">
-            <a:avLst/>
-          </a:prstGeom>
-          <a:noFill/>
-          <a:ln/>
-        </p:spPr>
-        <p:txBody>
-          <a:bodyPr wrap="square" lIns="0" tIns="0" rIns="0" bIns="0" rtlCol="0" anchor="t"/>
-          <a:lstStyle/>
-          <a:p>
-            <a:pPr algn="ctr" indent="0" marL="0">
-              <a:buNone/>
-            </a:pPr>
-            <a:r>
-              <a:rPr lang="en-US" sz="600" dirty="0">
-                <a:solidFill>
-                  <a:srgbClr val="8B94A3"/>
-                </a:solidFill>
-                <a:latin typeface="Noto Sans SC" pitchFamily="34" charset="0"/>
-                <a:ea typeface="Noto Sans SC" pitchFamily="34" charset="-122"/>
-                <a:cs typeface="Noto Sans SC" pitchFamily="34" charset="-120"/>
-              </a:rPr>
-              <a:t>9:00</a:t>
-            </a:r>
-            <a:endParaRPr lang="en-US" sz="600" dirty="0"/>
-          </a:p>
-        </p:txBody>
-      </p:sp>
-      <p:sp>
-        <p:nvSpPr>
-          <p:cNvPr id="118" name="Text 116"/>
-          <p:cNvSpPr/>
-          <p:nvPr/>
-        </p:nvSpPr>
-        <p:spPr>
-          <a:xfrm>
-            <a:off x="7292280" y="4725591"/>
-            <a:ext cx="2265759" cy="888802"/>
+          <p:cNvPr id="100" name="Text 98"/>
+          <p:cNvSpPr/>
+          <p:nvPr/>
+        </p:nvSpPr>
+        <p:spPr>
+          <a:xfrm>
+            <a:off x="7292280" y="4620816"/>
+            <a:ext cx="2265759" cy="784027"/>
           </a:xfrm>
           <a:prstGeom prst="roundRect">
             <a:avLst>
-              <a:gd name="adj" fmla="val 8573"/>
+              <a:gd name="adj" fmla="val 9719"/>
             </a:avLst>
           </a:prstGeom>
           <a:solidFill>
@@ -17010,13 +16814,13 @@
       </p:sp>
       <p:sp>
         <p:nvSpPr>
-          <p:cNvPr id="119" name="Text 117"/>
-          <p:cNvSpPr/>
-          <p:nvPr/>
-        </p:nvSpPr>
-        <p:spPr>
-          <a:xfrm>
-            <a:off x="8177510" y="4788991"/>
+          <p:cNvPr id="101" name="Text 99"/>
+          <p:cNvSpPr/>
+          <p:nvPr/>
+        </p:nvSpPr>
+        <p:spPr>
+          <a:xfrm>
+            <a:off x="8177510" y="4684216"/>
             <a:ext cx="495300" cy="495300"/>
           </a:xfrm>
           <a:prstGeom prst="roundRect">
@@ -17046,13 +16850,13 @@
       </p:sp>
       <p:sp>
         <p:nvSpPr>
-          <p:cNvPr id="120" name="Text 118"/>
-          <p:cNvSpPr/>
-          <p:nvPr/>
-        </p:nvSpPr>
-        <p:spPr>
-          <a:xfrm>
-            <a:off x="8298210" y="5027116"/>
+          <p:cNvPr id="102" name="Text 100"/>
+          <p:cNvSpPr/>
+          <p:nvPr/>
+        </p:nvSpPr>
+        <p:spPr>
+          <a:xfrm>
+            <a:off x="8298210" y="4922341"/>
             <a:ext cx="126950" cy="19050"/>
           </a:xfrm>
           <a:prstGeom prst="roundRect">
@@ -17078,13 +16882,13 @@
       </p:sp>
       <p:sp>
         <p:nvSpPr>
-          <p:cNvPr id="121" name="Text 119"/>
-          <p:cNvSpPr/>
-          <p:nvPr/>
-        </p:nvSpPr>
-        <p:spPr>
-          <a:xfrm>
-            <a:off x="8418835" y="5036641"/>
+          <p:cNvPr id="103" name="Text 101"/>
+          <p:cNvSpPr/>
+          <p:nvPr/>
+        </p:nvSpPr>
+        <p:spPr>
+          <a:xfrm>
+            <a:off x="8418835" y="4931866"/>
             <a:ext cx="12650" cy="177701"/>
           </a:xfrm>
           <a:prstGeom prst="roundRect">
@@ -17110,13 +16914,13 @@
       </p:sp>
       <p:sp>
         <p:nvSpPr>
-          <p:cNvPr id="122" name="Text 120"/>
-          <p:cNvSpPr/>
-          <p:nvPr/>
-        </p:nvSpPr>
-        <p:spPr>
-          <a:xfrm>
-            <a:off x="7334292" y="5322391"/>
+          <p:cNvPr id="104" name="Text 102"/>
+          <p:cNvSpPr/>
+          <p:nvPr/>
+        </p:nvSpPr>
+        <p:spPr>
+          <a:xfrm>
+            <a:off x="7334292" y="5217616"/>
             <a:ext cx="2181737" cy="123825"/>
           </a:xfrm>
           <a:prstGeom prst="rect">
@@ -17149,57 +16953,18 @@
       </p:sp>
       <p:sp>
         <p:nvSpPr>
-          <p:cNvPr id="123" name="Text 121"/>
-          <p:cNvSpPr/>
-          <p:nvPr/>
-        </p:nvSpPr>
-        <p:spPr>
-          <a:xfrm>
-            <a:off x="7334292" y="5446216"/>
-            <a:ext cx="2181737" cy="104775"/>
-          </a:xfrm>
-          <a:prstGeom prst="rect">
-            <a:avLst/>
-          </a:prstGeom>
-          <a:noFill/>
-          <a:ln/>
-        </p:spPr>
-        <p:txBody>
-          <a:bodyPr wrap="square" lIns="0" tIns="0" rIns="0" bIns="0" rtlCol="0" anchor="t"/>
-          <a:lstStyle/>
-          <a:p>
-            <a:pPr algn="ctr" indent="0" marL="0">
-              <a:buNone/>
-            </a:pPr>
-            <a:r>
-              <a:rPr lang="en-US" sz="600" dirty="0">
-                <a:solidFill>
-                  <a:srgbClr val="8B94A3"/>
-                </a:solidFill>
-                <a:latin typeface="Noto Sans SC" pitchFamily="34" charset="0"/>
-                <a:ea typeface="Noto Sans SC" pitchFamily="34" charset="-122"/>
-                <a:cs typeface="Noto Sans SC" pitchFamily="34" charset="-120"/>
-              </a:rPr>
-              <a:t>9:30</a:t>
-            </a:r>
-            <a:endParaRPr lang="en-US" sz="600" dirty="0"/>
-          </a:p>
-        </p:txBody>
-      </p:sp>
-      <p:sp>
-        <p:nvSpPr>
-          <p:cNvPr id="124" name="Text 122"/>
-          <p:cNvSpPr/>
-          <p:nvPr/>
-        </p:nvSpPr>
-        <p:spPr>
-          <a:xfrm>
-            <a:off x="9621441" y="4725591"/>
-            <a:ext cx="2265759" cy="888802"/>
+          <p:cNvPr id="105" name="Text 103"/>
+          <p:cNvSpPr/>
+          <p:nvPr/>
+        </p:nvSpPr>
+        <p:spPr>
+          <a:xfrm>
+            <a:off x="9621441" y="4620816"/>
+            <a:ext cx="2265759" cy="784027"/>
           </a:xfrm>
           <a:prstGeom prst="roundRect">
             <a:avLst>
-              <a:gd name="adj" fmla="val 8573"/>
+              <a:gd name="adj" fmla="val 9719"/>
             </a:avLst>
           </a:prstGeom>
           <a:solidFill>
@@ -17220,13 +16985,13 @@
       </p:sp>
       <p:sp>
         <p:nvSpPr>
-          <p:cNvPr id="125" name="Text 123"/>
-          <p:cNvSpPr/>
-          <p:nvPr/>
-        </p:nvSpPr>
-        <p:spPr>
-          <a:xfrm>
-            <a:off x="10506670" y="4788991"/>
+          <p:cNvPr id="106" name="Text 104"/>
+          <p:cNvSpPr/>
+          <p:nvPr/>
+        </p:nvSpPr>
+        <p:spPr>
+          <a:xfrm>
+            <a:off x="10506670" y="4684216"/>
             <a:ext cx="495300" cy="495300"/>
           </a:xfrm>
           <a:prstGeom prst="roundRect">
@@ -17256,13 +17021,13 @@
       </p:sp>
       <p:sp>
         <p:nvSpPr>
-          <p:cNvPr id="126" name="Text 124"/>
-          <p:cNvSpPr/>
-          <p:nvPr/>
-        </p:nvSpPr>
-        <p:spPr>
-          <a:xfrm>
-            <a:off x="10751855" y="4994584"/>
+          <p:cNvPr id="107" name="Text 105"/>
+          <p:cNvSpPr/>
+          <p:nvPr/>
+        </p:nvSpPr>
+        <p:spPr>
+          <a:xfrm>
+            <a:off x="10751855" y="4889809"/>
             <a:ext cx="127555" cy="51258"/>
           </a:xfrm>
           <a:prstGeom prst="roundRect">
@@ -17288,13 +17053,13 @@
       </p:sp>
       <p:sp>
         <p:nvSpPr>
-          <p:cNvPr id="127" name="Text 125"/>
-          <p:cNvSpPr/>
-          <p:nvPr/>
-        </p:nvSpPr>
-        <p:spPr>
-          <a:xfrm>
-            <a:off x="10576620" y="5030316"/>
+          <p:cNvPr id="108" name="Text 106"/>
+          <p:cNvSpPr/>
+          <p:nvPr/>
+        </p:nvSpPr>
+        <p:spPr>
+          <a:xfrm>
+            <a:off x="10576620" y="4925541"/>
             <a:ext cx="177701" cy="12650"/>
           </a:xfrm>
           <a:prstGeom prst="roundRect">
@@ -17320,13 +17085,13 @@
       </p:sp>
       <p:sp>
         <p:nvSpPr>
-          <p:cNvPr id="128" name="Text 126"/>
-          <p:cNvSpPr/>
-          <p:nvPr/>
-        </p:nvSpPr>
-        <p:spPr>
-          <a:xfrm>
-            <a:off x="9663452" y="5322391"/>
+          <p:cNvPr id="109" name="Text 107"/>
+          <p:cNvSpPr/>
+          <p:nvPr/>
+        </p:nvSpPr>
+        <p:spPr>
+          <a:xfrm>
+            <a:off x="9663452" y="5217616"/>
             <a:ext cx="2181737" cy="123825"/>
           </a:xfrm>
           <a:prstGeom prst="rect">
@@ -17359,52 +17124,13 @@
       </p:sp>
       <p:sp>
         <p:nvSpPr>
-          <p:cNvPr id="129" name="Text 127"/>
-          <p:cNvSpPr/>
-          <p:nvPr/>
-        </p:nvSpPr>
-        <p:spPr>
-          <a:xfrm>
-            <a:off x="9663452" y="5446216"/>
-            <a:ext cx="2181737" cy="104775"/>
-          </a:xfrm>
-          <a:prstGeom prst="rect">
-            <a:avLst/>
-          </a:prstGeom>
-          <a:noFill/>
-          <a:ln/>
-        </p:spPr>
-        <p:txBody>
-          <a:bodyPr wrap="square" lIns="0" tIns="0" rIns="0" bIns="0" rtlCol="0" anchor="t"/>
-          <a:lstStyle/>
-          <a:p>
-            <a:pPr algn="ctr" indent="0" marL="0">
-              <a:buNone/>
-            </a:pPr>
-            <a:r>
-              <a:rPr lang="en-US" sz="600" dirty="0">
-                <a:solidFill>
-                  <a:srgbClr val="8B94A3"/>
-                </a:solidFill>
-                <a:latin typeface="Noto Sans SC" pitchFamily="34" charset="0"/>
-                <a:ea typeface="Noto Sans SC" pitchFamily="34" charset="-122"/>
-                <a:cs typeface="Noto Sans SC" pitchFamily="34" charset="-120"/>
-              </a:rPr>
-              <a:t>2:45</a:t>
-            </a:r>
-            <a:endParaRPr lang="en-US" sz="600" dirty="0"/>
-          </a:p>
-        </p:txBody>
-      </p:sp>
-      <p:sp>
-        <p:nvSpPr>
-          <p:cNvPr id="130" name="Text 128"/>
-          <p:cNvSpPr/>
-          <p:nvPr/>
-        </p:nvSpPr>
-        <p:spPr>
-          <a:xfrm>
-            <a:off x="304800" y="5690592"/>
+          <p:cNvPr id="110" name="Text 108"/>
+          <p:cNvSpPr/>
+          <p:nvPr/>
+        </p:nvSpPr>
+        <p:spPr>
+          <a:xfrm>
+            <a:off x="304800" y="5481042"/>
             <a:ext cx="1963489" cy="155377"/>
           </a:xfrm>
           <a:prstGeom prst="roundRect">
@@ -17430,13 +17156,13 @@
       </p:sp>
       <p:sp>
         <p:nvSpPr>
-          <p:cNvPr id="131" name="Text 129"/>
-          <p:cNvSpPr/>
-          <p:nvPr/>
-        </p:nvSpPr>
-        <p:spPr>
-          <a:xfrm>
-            <a:off x="406301" y="5715893"/>
+          <p:cNvPr id="111" name="Text 109"/>
+          <p:cNvSpPr/>
+          <p:nvPr/>
+        </p:nvSpPr>
+        <p:spPr>
+          <a:xfrm>
+            <a:off x="406301" y="5506343"/>
             <a:ext cx="1795698" cy="104775"/>
           </a:xfrm>
           <a:prstGeom prst="rect">
@@ -17469,13 +17195,13 @@
       </p:sp>
       <p:sp>
         <p:nvSpPr>
-          <p:cNvPr id="132" name="Text 130"/>
-          <p:cNvSpPr/>
-          <p:nvPr/>
-        </p:nvSpPr>
-        <p:spPr>
-          <a:xfrm>
-            <a:off x="2395240" y="5690592"/>
+          <p:cNvPr id="112" name="Text 110"/>
+          <p:cNvSpPr/>
+          <p:nvPr/>
+        </p:nvSpPr>
+        <p:spPr>
+          <a:xfrm>
+            <a:off x="2395240" y="5481042"/>
             <a:ext cx="1930450" cy="155377"/>
           </a:xfrm>
           <a:prstGeom prst="roundRect">
@@ -17501,13 +17227,13 @@
       </p:sp>
       <p:sp>
         <p:nvSpPr>
-          <p:cNvPr id="133" name="Text 131"/>
-          <p:cNvSpPr/>
-          <p:nvPr/>
-        </p:nvSpPr>
-        <p:spPr>
-          <a:xfrm>
-            <a:off x="2496741" y="5715893"/>
+          <p:cNvPr id="113" name="Text 111"/>
+          <p:cNvSpPr/>
+          <p:nvPr/>
+        </p:nvSpPr>
+        <p:spPr>
+          <a:xfrm>
+            <a:off x="2496741" y="5506343"/>
             <a:ext cx="1761997" cy="104775"/>
           </a:xfrm>
           <a:prstGeom prst="rect">
@@ -17540,14 +17266,14 @@
       </p:sp>
       <p:sp>
         <p:nvSpPr>
-          <p:cNvPr id="134" name="Text 132"/>
-          <p:cNvSpPr/>
-          <p:nvPr/>
-        </p:nvSpPr>
-        <p:spPr>
-          <a:xfrm>
-            <a:off x="4452640" y="5690592"/>
-            <a:ext cx="1281857" cy="155377"/>
+          <p:cNvPr id="114" name="Text 112"/>
+          <p:cNvSpPr/>
+          <p:nvPr/>
+        </p:nvSpPr>
+        <p:spPr>
+          <a:xfrm>
+            <a:off x="4452640" y="5481042"/>
+            <a:ext cx="1013520" cy="155377"/>
           </a:xfrm>
           <a:prstGeom prst="roundRect">
             <a:avLst>
@@ -17572,14 +17298,14 @@
       </p:sp>
       <p:sp>
         <p:nvSpPr>
-          <p:cNvPr id="135" name="Text 133"/>
-          <p:cNvSpPr/>
-          <p:nvPr/>
-        </p:nvSpPr>
-        <p:spPr>
-          <a:xfrm>
-            <a:off x="4554141" y="5715893"/>
-            <a:ext cx="1100432" cy="104775"/>
+          <p:cNvPr id="115" name="Text 113"/>
+          <p:cNvSpPr/>
+          <p:nvPr/>
+        </p:nvSpPr>
+        <p:spPr>
+          <a:xfrm>
+            <a:off x="4554141" y="5506343"/>
+            <a:ext cx="826728" cy="104775"/>
           </a:xfrm>
           <a:prstGeom prst="rect">
             <a:avLst/>
@@ -17603,7 +17329,7 @@
                 <a:ea typeface="Noto Sans SC" pitchFamily="34" charset="-122"/>
                 <a:cs typeface="Noto Sans SC" pitchFamily="34" charset="-120"/>
               </a:rPr>
-              <a:t>Watch for 两/二 trap at 2:30!</a:t>
+              <a:t>Answers on next slide</a:t>
             </a:r>
             <a:endParaRPr lang="en-US" sz="600" dirty="0"/>
           </a:p>
@@ -17611,7 +17337,7 @@
       </p:sp>
       <p:sp>
         <p:nvSpPr>
-          <p:cNvPr id="136" name="Shape 134"/>
+          <p:cNvPr id="116" name="Shape 114"/>
           <p:cNvSpPr/>
           <p:nvPr/>
         </p:nvSpPr>
@@ -17634,7 +17360,7 @@
       </p:sp>
       <p:sp>
         <p:nvSpPr>
-          <p:cNvPr id="137" name="Text 135"/>
+          <p:cNvPr id="117" name="Text 115"/>
           <p:cNvSpPr/>
           <p:nvPr/>
         </p:nvSpPr>
@@ -20062,7 +19788,81 @@
         <p:spPr>
           <a:xfrm>
             <a:off x="6248400" y="3427809"/>
-            <a:ext cx="5596128" cy="142131"/>
+            <a:ext cx="126950" cy="126950"/>
+          </a:xfrm>
+          <a:prstGeom prst="roundRect">
+            <a:avLst>
+              <a:gd name="adj" fmla="val 720284"/>
+            </a:avLst>
+          </a:prstGeom>
+          <a:solidFill>
+            <a:srgbClr val="3A7D8C"/>
+          </a:solidFill>
+          <a:ln/>
+        </p:spPr>
+        <p:txBody>
+          <a:bodyPr wrap="square" rtlCol="0" anchor="ctr"/>
+          <a:lstStyle/>
+          <a:p>
+            <a:pPr indent="0" marL="0">
+              <a:buNone/>
+            </a:pPr>
+            <a:endParaRPr lang="en-US" dirty="0"/>
+          </a:p>
+        </p:txBody>
+      </p:sp>
+      <p:sp>
+        <p:nvSpPr>
+          <p:cNvPr id="67" name="Text 65"/>
+          <p:cNvSpPr/>
+          <p:nvPr/>
+        </p:nvSpPr>
+        <p:spPr>
+          <a:xfrm>
+            <a:off x="6294537" y="3453110"/>
+            <a:ext cx="35219" cy="76200"/>
+          </a:xfrm>
+          <a:prstGeom prst="rect">
+            <a:avLst/>
+          </a:prstGeom>
+          <a:noFill/>
+          <a:ln/>
+        </p:spPr>
+        <p:txBody>
+          <a:bodyPr wrap="square" lIns="0" tIns="0" rIns="0" bIns="0" rtlCol="0" anchor="t"/>
+          <a:lstStyle/>
+          <a:p>
+            <a:pPr algn="l" indent="0" marL="0">
+              <a:lnSpc>
+                <a:spcPts val="600"/>
+              </a:lnSpc>
+              <a:buNone/>
+            </a:pPr>
+            <a:r>
+              <a:rPr lang="en-US" sz="600" b="1" dirty="0">
+                <a:solidFill>
+                  <a:srgbClr val="FFFFFF"/>
+                </a:solidFill>
+                <a:latin typeface="Noto Sans SC" pitchFamily="34" charset="0"/>
+                <a:ea typeface="Noto Sans SC" pitchFamily="34" charset="-122"/>
+                <a:cs typeface="Noto Sans SC" pitchFamily="34" charset="-120"/>
+              </a:rPr>
+              <a:t>1</a:t>
+            </a:r>
+            <a:endParaRPr lang="en-US" sz="600" dirty="0"/>
+          </a:p>
+        </p:txBody>
+      </p:sp>
+      <p:sp>
+        <p:nvSpPr>
+          <p:cNvPr id="68" name="Text 66"/>
+          <p:cNvSpPr/>
+          <p:nvPr/>
+        </p:nvSpPr>
+        <p:spPr>
+          <a:xfrm>
+            <a:off x="6426101" y="3427809"/>
+            <a:ext cx="1540210" cy="142131"/>
           </a:xfrm>
           <a:prstGeom prst="rect">
             <a:avLst/>
@@ -20081,6 +19881,80 @@
               <a:buNone/>
             </a:pPr>
             <a:r>
+              <a:rPr lang="en-US" sz="700" dirty="0">
+                <a:solidFill>
+                  <a:srgbClr val="5B6677"/>
+                </a:solidFill>
+                <a:latin typeface="Noto Sans SC" pitchFamily="34" charset="0"/>
+                <a:ea typeface="Noto Sans SC" pitchFamily="34" charset="-122"/>
+                <a:cs typeface="Noto Sans SC" pitchFamily="34" charset="-120"/>
+              </a:rPr>
+              <a:t>Draw a 3x3 grid. Centre = 半 FREE</a:t>
+            </a:r>
+            <a:endParaRPr lang="en-US" sz="700" dirty="0"/>
+          </a:p>
+        </p:txBody>
+      </p:sp>
+      <p:sp>
+        <p:nvSpPr>
+          <p:cNvPr id="69" name="Text 67"/>
+          <p:cNvSpPr/>
+          <p:nvPr/>
+        </p:nvSpPr>
+        <p:spPr>
+          <a:xfrm>
+            <a:off x="6248400" y="3569940"/>
+            <a:ext cx="126950" cy="126950"/>
+          </a:xfrm>
+          <a:prstGeom prst="roundRect">
+            <a:avLst>
+              <a:gd name="adj" fmla="val 720284"/>
+            </a:avLst>
+          </a:prstGeom>
+          <a:solidFill>
+            <a:srgbClr val="3A7D8C"/>
+          </a:solidFill>
+          <a:ln/>
+        </p:spPr>
+        <p:txBody>
+          <a:bodyPr wrap="square" rtlCol="0" anchor="ctr"/>
+          <a:lstStyle/>
+          <a:p>
+            <a:pPr indent="0" marL="0">
+              <a:buNone/>
+            </a:pPr>
+            <a:endParaRPr lang="en-US" dirty="0"/>
+          </a:p>
+        </p:txBody>
+      </p:sp>
+      <p:sp>
+        <p:nvSpPr>
+          <p:cNvPr id="70" name="Text 68"/>
+          <p:cNvSpPr/>
+          <p:nvPr/>
+        </p:nvSpPr>
+        <p:spPr>
+          <a:xfrm>
+            <a:off x="6287542" y="3595241"/>
+            <a:ext cx="49488" cy="76200"/>
+          </a:xfrm>
+          <a:prstGeom prst="rect">
+            <a:avLst/>
+          </a:prstGeom>
+          <a:noFill/>
+          <a:ln/>
+        </p:spPr>
+        <p:txBody>
+          <a:bodyPr wrap="square" lIns="0" tIns="0" rIns="0" bIns="0" rtlCol="0" anchor="t"/>
+          <a:lstStyle/>
+          <a:p>
+            <a:pPr algn="l" indent="0" marL="0">
+              <a:lnSpc>
+                <a:spcPts val="600"/>
+              </a:lnSpc>
+              <a:buNone/>
+            </a:pPr>
+            <a:r>
               <a:rPr lang="en-US" sz="600" b="1" dirty="0">
                 <a:solidFill>
                   <a:srgbClr val="FFFFFF"/>
@@ -20089,8 +19963,33 @@
                 <a:ea typeface="Noto Sans SC" pitchFamily="34" charset="-122"/>
                 <a:cs typeface="Noto Sans SC" pitchFamily="34" charset="-120"/>
               </a:rPr>
-              <a:t>1</a:t>
-            </a:r>
+              <a:t>2</a:t>
+            </a:r>
+            <a:endParaRPr lang="en-US" sz="600" dirty="0"/>
+          </a:p>
+        </p:txBody>
+      </p:sp>
+      <p:sp>
+        <p:nvSpPr>
+          <p:cNvPr id="71" name="Text 69"/>
+          <p:cNvSpPr/>
+          <p:nvPr/>
+        </p:nvSpPr>
+        <p:spPr>
+          <a:xfrm>
+            <a:off x="6426101" y="3569940"/>
+            <a:ext cx="2274945" cy="142131"/>
+          </a:xfrm>
+          <a:prstGeom prst="rect">
+            <a:avLst/>
+          </a:prstGeom>
+          <a:noFill/>
+          <a:ln/>
+        </p:spPr>
+        <p:txBody>
+          <a:bodyPr wrap="square" lIns="0" tIns="0" rIns="0" bIns="0" rtlCol="0" anchor="t"/>
+          <a:lstStyle/>
+          <a:p>
             <a:pPr algn="l" indent="0" marL="0">
               <a:lnSpc>
                 <a:spcPts val="1120"/>
@@ -20106,7 +20005,7 @@
                 <a:ea typeface="Noto Sans SC" pitchFamily="34" charset="-122"/>
                 <a:cs typeface="Noto Sans SC" pitchFamily="34" charset="-120"/>
               </a:rPr>
-              <a:t> Draw a 3x3 grid. Centre = 半 FREE</a:t>
+              <a:t>Pick 8 times from the word bank, arrange randomly</a:t>
             </a:r>
             <a:endParaRPr lang="en-US" sz="700" dirty="0"/>
           </a:p>
@@ -20114,14 +20013,88 @@
       </p:sp>
       <p:sp>
         <p:nvSpPr>
-          <p:cNvPr id="67" name="Text 65"/>
-          <p:cNvSpPr/>
-          <p:nvPr/>
-        </p:nvSpPr>
-        <p:spPr>
-          <a:xfrm>
-            <a:off x="6248400" y="3569940"/>
-            <a:ext cx="5596128" cy="142131"/>
+          <p:cNvPr id="72" name="Text 70"/>
+          <p:cNvSpPr/>
+          <p:nvPr/>
+        </p:nvSpPr>
+        <p:spPr>
+          <a:xfrm>
+            <a:off x="6248400" y="3712071"/>
+            <a:ext cx="126950" cy="126950"/>
+          </a:xfrm>
+          <a:prstGeom prst="roundRect">
+            <a:avLst>
+              <a:gd name="adj" fmla="val 720284"/>
+            </a:avLst>
+          </a:prstGeom>
+          <a:solidFill>
+            <a:srgbClr val="3A7D8C"/>
+          </a:solidFill>
+          <a:ln/>
+        </p:spPr>
+        <p:txBody>
+          <a:bodyPr wrap="square" rtlCol="0" anchor="ctr"/>
+          <a:lstStyle/>
+          <a:p>
+            <a:pPr indent="0" marL="0">
+              <a:buNone/>
+            </a:pPr>
+            <a:endParaRPr lang="en-US" dirty="0"/>
+          </a:p>
+        </p:txBody>
+      </p:sp>
+      <p:sp>
+        <p:nvSpPr>
+          <p:cNvPr id="73" name="Text 71"/>
+          <p:cNvSpPr/>
+          <p:nvPr/>
+        </p:nvSpPr>
+        <p:spPr>
+          <a:xfrm>
+            <a:off x="6287393" y="3737372"/>
+            <a:ext cx="49792" cy="76200"/>
+          </a:xfrm>
+          <a:prstGeom prst="rect">
+            <a:avLst/>
+          </a:prstGeom>
+          <a:noFill/>
+          <a:ln/>
+        </p:spPr>
+        <p:txBody>
+          <a:bodyPr wrap="square" lIns="0" tIns="0" rIns="0" bIns="0" rtlCol="0" anchor="t"/>
+          <a:lstStyle/>
+          <a:p>
+            <a:pPr algn="l" indent="0" marL="0">
+              <a:lnSpc>
+                <a:spcPts val="600"/>
+              </a:lnSpc>
+              <a:buNone/>
+            </a:pPr>
+            <a:r>
+              <a:rPr lang="en-US" sz="600" b="1" dirty="0">
+                <a:solidFill>
+                  <a:srgbClr val="FFFFFF"/>
+                </a:solidFill>
+                <a:latin typeface="Noto Sans SC" pitchFamily="34" charset="0"/>
+                <a:ea typeface="Noto Sans SC" pitchFamily="34" charset="-122"/>
+                <a:cs typeface="Noto Sans SC" pitchFamily="34" charset="-120"/>
+              </a:rPr>
+              <a:t>3</a:t>
+            </a:r>
+            <a:endParaRPr lang="en-US" sz="600" dirty="0"/>
+          </a:p>
+        </p:txBody>
+      </p:sp>
+      <p:sp>
+        <p:nvSpPr>
+          <p:cNvPr id="74" name="Text 72"/>
+          <p:cNvSpPr/>
+          <p:nvPr/>
+        </p:nvSpPr>
+        <p:spPr>
+          <a:xfrm>
+            <a:off x="6426101" y="3712071"/>
+            <a:ext cx="2186595" cy="142131"/>
           </a:xfrm>
           <a:prstGeom prst="rect">
             <a:avLst/>
@@ -20140,6 +20113,80 @@
               <a:buNone/>
             </a:pPr>
             <a:r>
+              <a:rPr lang="en-US" sz="700" dirty="0">
+                <a:solidFill>
+                  <a:srgbClr val="5B6677"/>
+                </a:solidFill>
+                <a:latin typeface="Noto Sans SC" pitchFamily="34" charset="0"/>
+                <a:ea typeface="Noto Sans SC" pitchFamily="34" charset="-122"/>
+                <a:cs typeface="Noto Sans SC" pitchFamily="34" charset="-120"/>
+              </a:rPr>
+              <a:t>Teacher calls times in Chinese — cross them off!</a:t>
+            </a:r>
+            <a:endParaRPr lang="en-US" sz="700" dirty="0"/>
+          </a:p>
+        </p:txBody>
+      </p:sp>
+      <p:sp>
+        <p:nvSpPr>
+          <p:cNvPr id="75" name="Text 73"/>
+          <p:cNvSpPr/>
+          <p:nvPr/>
+        </p:nvSpPr>
+        <p:spPr>
+          <a:xfrm>
+            <a:off x="6248400" y="3854202"/>
+            <a:ext cx="126950" cy="126950"/>
+          </a:xfrm>
+          <a:prstGeom prst="roundRect">
+            <a:avLst>
+              <a:gd name="adj" fmla="val 720284"/>
+            </a:avLst>
+          </a:prstGeom>
+          <a:solidFill>
+            <a:srgbClr val="3A7D8C"/>
+          </a:solidFill>
+          <a:ln/>
+        </p:spPr>
+        <p:txBody>
+          <a:bodyPr wrap="square" rtlCol="0" anchor="ctr"/>
+          <a:lstStyle/>
+          <a:p>
+            <a:pPr indent="0" marL="0">
+              <a:buNone/>
+            </a:pPr>
+            <a:endParaRPr lang="en-US" dirty="0"/>
+          </a:p>
+        </p:txBody>
+      </p:sp>
+      <p:sp>
+        <p:nvSpPr>
+          <p:cNvPr id="76" name="Text 74"/>
+          <p:cNvSpPr/>
+          <p:nvPr/>
+        </p:nvSpPr>
+        <p:spPr>
+          <a:xfrm>
+            <a:off x="6287095" y="3879503"/>
+            <a:ext cx="50399" cy="76200"/>
+          </a:xfrm>
+          <a:prstGeom prst="rect">
+            <a:avLst/>
+          </a:prstGeom>
+          <a:noFill/>
+          <a:ln/>
+        </p:spPr>
+        <p:txBody>
+          <a:bodyPr wrap="square" lIns="0" tIns="0" rIns="0" bIns="0" rtlCol="0" anchor="t"/>
+          <a:lstStyle/>
+          <a:p>
+            <a:pPr algn="l" indent="0" marL="0">
+              <a:lnSpc>
+                <a:spcPts val="600"/>
+              </a:lnSpc>
+              <a:buNone/>
+            </a:pPr>
+            <a:r>
               <a:rPr lang="en-US" sz="600" b="1" dirty="0">
                 <a:solidFill>
                   <a:srgbClr val="FFFFFF"/>
@@ -20148,8 +20195,33 @@
                 <a:ea typeface="Noto Sans SC" pitchFamily="34" charset="-122"/>
                 <a:cs typeface="Noto Sans SC" pitchFamily="34" charset="-120"/>
               </a:rPr>
-              <a:t>2</a:t>
-            </a:r>
+              <a:t>4</a:t>
+            </a:r>
+            <a:endParaRPr lang="en-US" sz="600" dirty="0"/>
+          </a:p>
+        </p:txBody>
+      </p:sp>
+      <p:sp>
+        <p:nvSpPr>
+          <p:cNvPr id="77" name="Text 75"/>
+          <p:cNvSpPr/>
+          <p:nvPr/>
+        </p:nvSpPr>
+        <p:spPr>
+          <a:xfrm>
+            <a:off x="6426101" y="3854202"/>
+            <a:ext cx="2439957" cy="142131"/>
+          </a:xfrm>
+          <a:prstGeom prst="rect">
+            <a:avLst/>
+          </a:prstGeom>
+          <a:noFill/>
+          <a:ln/>
+        </p:spPr>
+        <p:txBody>
+          <a:bodyPr wrap="square" lIns="0" tIns="0" rIns="0" bIns="0" rtlCol="0" anchor="t"/>
+          <a:lstStyle/>
+          <a:p>
             <a:pPr algn="l" indent="0" marL="0">
               <a:lnSpc>
                 <a:spcPts val="1120"/>
@@ -20165,7 +20237,7 @@
                 <a:ea typeface="Noto Sans SC" pitchFamily="34" charset="-122"/>
                 <a:cs typeface="Noto Sans SC" pitchFamily="34" charset="-120"/>
               </a:rPr>
-              <a:t> Pick 8 times from the word bank, arrange randomly</a:t>
+              <a:t>Shout BINGO! when you get a row, column, or diagonal</a:t>
             </a:r>
             <a:endParaRPr lang="en-US" sz="700" dirty="0"/>
           </a:p>
@@ -20173,125 +20245,7 @@
       </p:sp>
       <p:sp>
         <p:nvSpPr>
-          <p:cNvPr id="68" name="Text 66"/>
-          <p:cNvSpPr/>
-          <p:nvPr/>
-        </p:nvSpPr>
-        <p:spPr>
-          <a:xfrm>
-            <a:off x="6248400" y="3712071"/>
-            <a:ext cx="5596128" cy="142131"/>
-          </a:xfrm>
-          <a:prstGeom prst="rect">
-            <a:avLst/>
-          </a:prstGeom>
-          <a:noFill/>
-          <a:ln/>
-        </p:spPr>
-        <p:txBody>
-          <a:bodyPr wrap="square" lIns="0" tIns="0" rIns="0" bIns="0" rtlCol="0" anchor="t"/>
-          <a:lstStyle/>
-          <a:p>
-            <a:pPr algn="l" indent="0" marL="0">
-              <a:lnSpc>
-                <a:spcPts val="1120"/>
-              </a:lnSpc>
-              <a:buNone/>
-            </a:pPr>
-            <a:r>
-              <a:rPr lang="en-US" sz="600" b="1" dirty="0">
-                <a:solidFill>
-                  <a:srgbClr val="FFFFFF"/>
-                </a:solidFill>
-                <a:latin typeface="Noto Sans SC" pitchFamily="34" charset="0"/>
-                <a:ea typeface="Noto Sans SC" pitchFamily="34" charset="-122"/>
-                <a:cs typeface="Noto Sans SC" pitchFamily="34" charset="-120"/>
-              </a:rPr>
-              <a:t>3</a:t>
-            </a:r>
-            <a:pPr algn="l" indent="0" marL="0">
-              <a:lnSpc>
-                <a:spcPts val="1120"/>
-              </a:lnSpc>
-              <a:buNone/>
-            </a:pPr>
-            <a:r>
-              <a:rPr lang="en-US" sz="700" dirty="0">
-                <a:solidFill>
-                  <a:srgbClr val="5B6677"/>
-                </a:solidFill>
-                <a:latin typeface="Noto Sans SC" pitchFamily="34" charset="0"/>
-                <a:ea typeface="Noto Sans SC" pitchFamily="34" charset="-122"/>
-                <a:cs typeface="Noto Sans SC" pitchFamily="34" charset="-120"/>
-              </a:rPr>
-              <a:t> Teacher calls times in Chinese — cross them off!</a:t>
-            </a:r>
-            <a:endParaRPr lang="en-US" sz="700" dirty="0"/>
-          </a:p>
-        </p:txBody>
-      </p:sp>
-      <p:sp>
-        <p:nvSpPr>
-          <p:cNvPr id="69" name="Text 67"/>
-          <p:cNvSpPr/>
-          <p:nvPr/>
-        </p:nvSpPr>
-        <p:spPr>
-          <a:xfrm>
-            <a:off x="6248400" y="3854202"/>
-            <a:ext cx="5596128" cy="142131"/>
-          </a:xfrm>
-          <a:prstGeom prst="rect">
-            <a:avLst/>
-          </a:prstGeom>
-          <a:noFill/>
-          <a:ln/>
-        </p:spPr>
-        <p:txBody>
-          <a:bodyPr wrap="square" lIns="0" tIns="0" rIns="0" bIns="0" rtlCol="0" anchor="t"/>
-          <a:lstStyle/>
-          <a:p>
-            <a:pPr algn="l" indent="0" marL="0">
-              <a:lnSpc>
-                <a:spcPts val="1120"/>
-              </a:lnSpc>
-              <a:buNone/>
-            </a:pPr>
-            <a:r>
-              <a:rPr lang="en-US" sz="600" b="1" dirty="0">
-                <a:solidFill>
-                  <a:srgbClr val="FFFFFF"/>
-                </a:solidFill>
-                <a:latin typeface="Noto Sans SC" pitchFamily="34" charset="0"/>
-                <a:ea typeface="Noto Sans SC" pitchFamily="34" charset="-122"/>
-                <a:cs typeface="Noto Sans SC" pitchFamily="34" charset="-120"/>
-              </a:rPr>
-              <a:t>4</a:t>
-            </a:r>
-            <a:pPr algn="l" indent="0" marL="0">
-              <a:lnSpc>
-                <a:spcPts val="1120"/>
-              </a:lnSpc>
-              <a:buNone/>
-            </a:pPr>
-            <a:r>
-              <a:rPr lang="en-US" sz="700" dirty="0">
-                <a:solidFill>
-                  <a:srgbClr val="5B6677"/>
-                </a:solidFill>
-                <a:latin typeface="Noto Sans SC" pitchFamily="34" charset="0"/>
-                <a:ea typeface="Noto Sans SC" pitchFamily="34" charset="-122"/>
-                <a:cs typeface="Noto Sans SC" pitchFamily="34" charset="-120"/>
-              </a:rPr>
-              <a:t> Shout BINGO! when you get a row, column, or diagonal</a:t>
-            </a:r>
-            <a:endParaRPr lang="en-US" sz="700" dirty="0"/>
-          </a:p>
-        </p:txBody>
-      </p:sp>
-      <p:sp>
-        <p:nvSpPr>
-          <p:cNvPr id="70" name="Shape 68"/>
+          <p:cNvPr id="78" name="Shape 76"/>
           <p:cNvSpPr/>
           <p:nvPr/>
         </p:nvSpPr>
@@ -20314,7 +20268,7 @@
       </p:sp>
       <p:sp>
         <p:nvSpPr>
-          <p:cNvPr id="71" name="Text 69"/>
+          <p:cNvPr id="79" name="Text 77"/>
           <p:cNvSpPr/>
           <p:nvPr/>
         </p:nvSpPr>

--- a/index/designs/y7-l10/l3-half-past/l3-half-past.pptx
+++ b/index/designs/y7-l10/l3-half-past/l3-half-past.pptx
@@ -2492,9 +2492,6 @@
               </a:rPr>
               <a:t>Cumulative Clock Flash · 综合钟表闪卡</a:t>
             </a:r>
-            <a:pPr algn="l" indent="0" marL="0">
-              <a:buNone/>
-            </a:pPr>
             <a:r>
               <a:rPr lang="en-US" sz="600" b="1" dirty="0">
                 <a:solidFill>
@@ -11774,9 +11771,6 @@
               </a:rPr>
               <a:t>Writing Relay · 写字接力</a:t>
             </a:r>
-            <a:pPr algn="ctr" indent="0" marL="0">
-              <a:buNone/>
-            </a:pPr>
             <a:r>
               <a:rPr lang="en-US" sz="600" b="1" dirty="0">
                 <a:solidFill>
